--- a/5. Presentation/salary_survey_presentation.pptx
+++ b/5. Presentation/salary_survey_presentation.pptx
@@ -5,8 +5,23 @@
     <p:sldMasterId id="2147483648" r:id="rId1"/>
   </p:sldMasterIdLst>
   <p:notesMasterIdLst>
-    <p:notesMasterId r:id="rId2"/>
+    <p:notesMasterId r:id="rId15"/>
   </p:notesMasterIdLst>
+  <p:sldIdLst>
+    <p:sldId id="256" r:id="rId2"/>
+    <p:sldId id="257" r:id="rId3"/>
+    <p:sldId id="266" r:id="rId4"/>
+    <p:sldId id="258" r:id="rId5"/>
+    <p:sldId id="268" r:id="rId6"/>
+    <p:sldId id="267" r:id="rId7"/>
+    <p:sldId id="259" r:id="rId8"/>
+    <p:sldId id="260" r:id="rId9"/>
+    <p:sldId id="261" r:id="rId10"/>
+    <p:sldId id="262" r:id="rId11"/>
+    <p:sldId id="263" r:id="rId12"/>
+    <p:sldId id="264" r:id="rId13"/>
+    <p:sldId id="265" r:id="rId14"/>
+  </p:sldIdLst>
   <p:sldSz cx="12192000" cy="6858000"/>
   <p:notesSz cx="6858000" cy="12192000"/>
   <p:defaultTextStyle>
@@ -134,7 +149,7 @@
     </p:spTree>
     <p:extLst>
       <p:ext uri="{BB962C8B-B14F-4D97-AF65-F5344CB8AC3E}">
-        <p14:creationId xmlns:p14="http://schemas.microsoft.com/office/powerpoint/2010/main" val="2194185038"/>
+        <p14:creationId xmlns:p14="http://schemas.microsoft.com/office/powerpoint/2010/main" val="2582455275"/>
       </p:ext>
     </p:extLst>
   </p:cSld>
@@ -232,6 +247,846 @@
     </a:lvl9pPr>
   </p:notesStyle>
 </p:notesMaster>
+</file>
+
+<file path=ppt/notesSlides/notesSlide1.xml><?xml version="1.0" encoding="utf-8"?>
+<p:notes xmlns:a="http://schemas.openxmlformats.org/drawingml/2006/main" xmlns:r="http://schemas.openxmlformats.org/officeDocument/2006/relationships" xmlns:p="http://schemas.openxmlformats.org/presentationml/2006/main">
+  <p:cSld>
+    <p:spTree>
+      <p:nvGrpSpPr>
+        <p:cNvPr id="1" name=""/>
+        <p:cNvGrpSpPr/>
+        <p:nvPr/>
+      </p:nvGrpSpPr>
+      <p:grpSpPr>
+        <a:xfrm>
+          <a:off x="0" y="0"/>
+          <a:ext cx="0" cy="0"/>
+          <a:chOff x="0" y="0"/>
+          <a:chExt cx="0" cy="0"/>
+        </a:xfrm>
+      </p:grpSpPr>
+      <p:sp>
+        <p:nvSpPr>
+          <p:cNvPr id="2" name="Slide Image Placeholder 1"/>
+          <p:cNvSpPr>
+            <a:spLocks noGrp="1" noRot="1" noChangeAspect="1"/>
+          </p:cNvSpPr>
+          <p:nvPr>
+            <p:ph type="sldImg"/>
+          </p:nvPr>
+        </p:nvSpPr>
+        <p:spPr/>
+      </p:sp>
+      <p:sp>
+        <p:nvSpPr>
+          <p:cNvPr id="3" name="Notes Placeholder 2"/>
+          <p:cNvSpPr>
+            <a:spLocks noGrp="1"/>
+          </p:cNvSpPr>
+          <p:nvPr>
+            <p:ph type="body" idx="1"/>
+          </p:nvPr>
+        </p:nvSpPr>
+        <p:spPr/>
+        <p:txBody>
+          <a:bodyPr/>
+          <a:lstStyle/>
+          <a:p>
+            <a:endParaRPr lang="en-US" dirty="0"/>
+          </a:p>
+        </p:txBody>
+      </p:sp>
+      <p:sp>
+        <p:nvSpPr>
+          <p:cNvPr id="4" name="Slide Number Placeholder 3"/>
+          <p:cNvSpPr>
+            <a:spLocks noGrp="1"/>
+          </p:cNvSpPr>
+          <p:nvPr>
+            <p:ph type="sldNum" sz="quarter" idx="10"/>
+          </p:nvPr>
+        </p:nvSpPr>
+        <p:spPr/>
+        <p:txBody>
+          <a:bodyPr/>
+          <a:lstStyle/>
+          <a:p>
+            <a:fld id="{F7021451-1387-4CA6-816F-3879F97B5CBC}" type="slidenum">
+              <a:rPr lang="en-US"/>
+              <a:t>1</a:t>
+            </a:fld>
+            <a:endParaRPr lang="en-US"/>
+          </a:p>
+        </p:txBody>
+      </p:sp>
+    </p:spTree>
+    <p:extLst>
+      <p:ext uri="{BB962C8B-B14F-4D97-AF65-F5344CB8AC3E}">
+        <p14:creationId xmlns:p14="http://schemas.microsoft.com/office/powerpoint/2010/main" val="1024086991"/>
+      </p:ext>
+    </p:extLst>
+  </p:cSld>
+  <p:clrMapOvr>
+    <a:masterClrMapping/>
+  </p:clrMapOvr>
+</p:notes>
+</file>
+
+<file path=ppt/notesSlides/notesSlide10.xml><?xml version="1.0" encoding="utf-8"?>
+<p:notes xmlns:a="http://schemas.openxmlformats.org/drawingml/2006/main" xmlns:r="http://schemas.openxmlformats.org/officeDocument/2006/relationships" xmlns:p="http://schemas.openxmlformats.org/presentationml/2006/main">
+  <p:cSld>
+    <p:spTree>
+      <p:nvGrpSpPr>
+        <p:cNvPr id="1" name=""/>
+        <p:cNvGrpSpPr/>
+        <p:nvPr/>
+      </p:nvGrpSpPr>
+      <p:grpSpPr>
+        <a:xfrm>
+          <a:off x="0" y="0"/>
+          <a:ext cx="0" cy="0"/>
+          <a:chOff x="0" y="0"/>
+          <a:chExt cx="0" cy="0"/>
+        </a:xfrm>
+      </p:grpSpPr>
+      <p:sp>
+        <p:nvSpPr>
+          <p:cNvPr id="2" name="Slide Image Placeholder 1"/>
+          <p:cNvSpPr>
+            <a:spLocks noGrp="1" noRot="1" noChangeAspect="1"/>
+          </p:cNvSpPr>
+          <p:nvPr>
+            <p:ph type="sldImg"/>
+          </p:nvPr>
+        </p:nvSpPr>
+        <p:spPr/>
+      </p:sp>
+      <p:sp>
+        <p:nvSpPr>
+          <p:cNvPr id="3" name="Notes Placeholder 2"/>
+          <p:cNvSpPr>
+            <a:spLocks noGrp="1"/>
+          </p:cNvSpPr>
+          <p:nvPr>
+            <p:ph type="body" idx="1"/>
+          </p:nvPr>
+        </p:nvSpPr>
+        <p:spPr/>
+        <p:txBody>
+          <a:bodyPr/>
+          <a:lstStyle/>
+          <a:p>
+            <a:endParaRPr lang="en-US" dirty="0"/>
+          </a:p>
+        </p:txBody>
+      </p:sp>
+      <p:sp>
+        <p:nvSpPr>
+          <p:cNvPr id="4" name="Slide Number Placeholder 3"/>
+          <p:cNvSpPr>
+            <a:spLocks noGrp="1"/>
+          </p:cNvSpPr>
+          <p:nvPr>
+            <p:ph type="sldNum" sz="quarter" idx="10"/>
+          </p:nvPr>
+        </p:nvSpPr>
+        <p:spPr/>
+        <p:txBody>
+          <a:bodyPr/>
+          <a:lstStyle/>
+          <a:p>
+            <a:fld id="{F7021451-1387-4CA6-816F-3879F97B5CBC}" type="slidenum">
+              <a:rPr lang="en-US"/>
+              <a:t>13</a:t>
+            </a:fld>
+            <a:endParaRPr lang="en-US"/>
+          </a:p>
+        </p:txBody>
+      </p:sp>
+    </p:spTree>
+    <p:extLst>
+      <p:ext uri="{BB962C8B-B14F-4D97-AF65-F5344CB8AC3E}">
+        <p14:creationId xmlns:p14="http://schemas.microsoft.com/office/powerpoint/2010/main" val="1024086991"/>
+      </p:ext>
+    </p:extLst>
+  </p:cSld>
+  <p:clrMapOvr>
+    <a:masterClrMapping/>
+  </p:clrMapOvr>
+</p:notes>
+</file>
+
+<file path=ppt/notesSlides/notesSlide2.xml><?xml version="1.0" encoding="utf-8"?>
+<p:notes xmlns:a="http://schemas.openxmlformats.org/drawingml/2006/main" xmlns:r="http://schemas.openxmlformats.org/officeDocument/2006/relationships" xmlns:p="http://schemas.openxmlformats.org/presentationml/2006/main">
+  <p:cSld>
+    <p:spTree>
+      <p:nvGrpSpPr>
+        <p:cNvPr id="1" name=""/>
+        <p:cNvGrpSpPr/>
+        <p:nvPr/>
+      </p:nvGrpSpPr>
+      <p:grpSpPr>
+        <a:xfrm>
+          <a:off x="0" y="0"/>
+          <a:ext cx="0" cy="0"/>
+          <a:chOff x="0" y="0"/>
+          <a:chExt cx="0" cy="0"/>
+        </a:xfrm>
+      </p:grpSpPr>
+      <p:sp>
+        <p:nvSpPr>
+          <p:cNvPr id="2" name="Slide Image Placeholder 1"/>
+          <p:cNvSpPr>
+            <a:spLocks noGrp="1" noRot="1" noChangeAspect="1"/>
+          </p:cNvSpPr>
+          <p:nvPr>
+            <p:ph type="sldImg"/>
+          </p:nvPr>
+        </p:nvSpPr>
+        <p:spPr/>
+      </p:sp>
+      <p:sp>
+        <p:nvSpPr>
+          <p:cNvPr id="3" name="Notes Placeholder 2"/>
+          <p:cNvSpPr>
+            <a:spLocks noGrp="1"/>
+          </p:cNvSpPr>
+          <p:nvPr>
+            <p:ph type="body" idx="1"/>
+          </p:nvPr>
+        </p:nvSpPr>
+        <p:spPr/>
+        <p:txBody>
+          <a:bodyPr/>
+          <a:lstStyle/>
+          <a:p>
+            <a:endParaRPr lang="en-US" dirty="0"/>
+          </a:p>
+        </p:txBody>
+      </p:sp>
+      <p:sp>
+        <p:nvSpPr>
+          <p:cNvPr id="4" name="Slide Number Placeholder 3"/>
+          <p:cNvSpPr>
+            <a:spLocks noGrp="1"/>
+          </p:cNvSpPr>
+          <p:nvPr>
+            <p:ph type="sldNum" sz="quarter" idx="10"/>
+          </p:nvPr>
+        </p:nvSpPr>
+        <p:spPr/>
+        <p:txBody>
+          <a:bodyPr/>
+          <a:lstStyle/>
+          <a:p>
+            <a:fld id="{F7021451-1387-4CA6-816F-3879F97B5CBC}" type="slidenum">
+              <a:rPr lang="en-US"/>
+              <a:t>2</a:t>
+            </a:fld>
+            <a:endParaRPr lang="en-US"/>
+          </a:p>
+        </p:txBody>
+      </p:sp>
+    </p:spTree>
+    <p:extLst>
+      <p:ext uri="{BB962C8B-B14F-4D97-AF65-F5344CB8AC3E}">
+        <p14:creationId xmlns:p14="http://schemas.microsoft.com/office/powerpoint/2010/main" val="1024086991"/>
+      </p:ext>
+    </p:extLst>
+  </p:cSld>
+  <p:clrMapOvr>
+    <a:masterClrMapping/>
+  </p:clrMapOvr>
+</p:notes>
+</file>
+
+<file path=ppt/notesSlides/notesSlide3.xml><?xml version="1.0" encoding="utf-8"?>
+<p:notes xmlns:a="http://schemas.openxmlformats.org/drawingml/2006/main" xmlns:r="http://schemas.openxmlformats.org/officeDocument/2006/relationships" xmlns:p="http://schemas.openxmlformats.org/presentationml/2006/main">
+  <p:cSld>
+    <p:spTree>
+      <p:nvGrpSpPr>
+        <p:cNvPr id="1" name=""/>
+        <p:cNvGrpSpPr/>
+        <p:nvPr/>
+      </p:nvGrpSpPr>
+      <p:grpSpPr>
+        <a:xfrm>
+          <a:off x="0" y="0"/>
+          <a:ext cx="0" cy="0"/>
+          <a:chOff x="0" y="0"/>
+          <a:chExt cx="0" cy="0"/>
+        </a:xfrm>
+      </p:grpSpPr>
+      <p:sp>
+        <p:nvSpPr>
+          <p:cNvPr id="2" name="Slide Image Placeholder 1"/>
+          <p:cNvSpPr>
+            <a:spLocks noGrp="1" noRot="1" noChangeAspect="1"/>
+          </p:cNvSpPr>
+          <p:nvPr>
+            <p:ph type="sldImg"/>
+          </p:nvPr>
+        </p:nvSpPr>
+        <p:spPr/>
+      </p:sp>
+      <p:sp>
+        <p:nvSpPr>
+          <p:cNvPr id="3" name="Notes Placeholder 2"/>
+          <p:cNvSpPr>
+            <a:spLocks noGrp="1"/>
+          </p:cNvSpPr>
+          <p:nvPr>
+            <p:ph type="body" idx="1"/>
+          </p:nvPr>
+        </p:nvSpPr>
+        <p:spPr/>
+        <p:txBody>
+          <a:bodyPr/>
+          <a:lstStyle/>
+          <a:p>
+            <a:endParaRPr lang="en-US" dirty="0"/>
+          </a:p>
+        </p:txBody>
+      </p:sp>
+      <p:sp>
+        <p:nvSpPr>
+          <p:cNvPr id="4" name="Slide Number Placeholder 3"/>
+          <p:cNvSpPr>
+            <a:spLocks noGrp="1"/>
+          </p:cNvSpPr>
+          <p:nvPr>
+            <p:ph type="sldNum" sz="quarter" idx="10"/>
+          </p:nvPr>
+        </p:nvSpPr>
+        <p:spPr/>
+        <p:txBody>
+          <a:bodyPr/>
+          <a:lstStyle/>
+          <a:p>
+            <a:fld id="{F7021451-1387-4CA6-816F-3879F97B5CBC}" type="slidenum">
+              <a:rPr lang="en-US"/>
+              <a:t>4</a:t>
+            </a:fld>
+            <a:endParaRPr lang="en-US"/>
+          </a:p>
+        </p:txBody>
+      </p:sp>
+    </p:spTree>
+    <p:extLst>
+      <p:ext uri="{BB962C8B-B14F-4D97-AF65-F5344CB8AC3E}">
+        <p14:creationId xmlns:p14="http://schemas.microsoft.com/office/powerpoint/2010/main" val="1024086991"/>
+      </p:ext>
+    </p:extLst>
+  </p:cSld>
+  <p:clrMapOvr>
+    <a:masterClrMapping/>
+  </p:clrMapOvr>
+</p:notes>
+</file>
+
+<file path=ppt/notesSlides/notesSlide4.xml><?xml version="1.0" encoding="utf-8"?>
+<p:notes xmlns:a="http://schemas.openxmlformats.org/drawingml/2006/main" xmlns:r="http://schemas.openxmlformats.org/officeDocument/2006/relationships" xmlns:p="http://schemas.openxmlformats.org/presentationml/2006/main">
+  <p:cSld>
+    <p:spTree>
+      <p:nvGrpSpPr>
+        <p:cNvPr id="1" name=""/>
+        <p:cNvGrpSpPr/>
+        <p:nvPr/>
+      </p:nvGrpSpPr>
+      <p:grpSpPr>
+        <a:xfrm>
+          <a:off x="0" y="0"/>
+          <a:ext cx="0" cy="0"/>
+          <a:chOff x="0" y="0"/>
+          <a:chExt cx="0" cy="0"/>
+        </a:xfrm>
+      </p:grpSpPr>
+      <p:sp>
+        <p:nvSpPr>
+          <p:cNvPr id="2" name="Slide Image Placeholder 1"/>
+          <p:cNvSpPr>
+            <a:spLocks noGrp="1" noRot="1" noChangeAspect="1"/>
+          </p:cNvSpPr>
+          <p:nvPr>
+            <p:ph type="sldImg"/>
+          </p:nvPr>
+        </p:nvSpPr>
+        <p:spPr/>
+      </p:sp>
+      <p:sp>
+        <p:nvSpPr>
+          <p:cNvPr id="3" name="Notes Placeholder 2"/>
+          <p:cNvSpPr>
+            <a:spLocks noGrp="1"/>
+          </p:cNvSpPr>
+          <p:nvPr>
+            <p:ph type="body" idx="1"/>
+          </p:nvPr>
+        </p:nvSpPr>
+        <p:spPr/>
+        <p:txBody>
+          <a:bodyPr/>
+          <a:lstStyle/>
+          <a:p>
+            <a:endParaRPr lang="en-US" dirty="0"/>
+          </a:p>
+        </p:txBody>
+      </p:sp>
+      <p:sp>
+        <p:nvSpPr>
+          <p:cNvPr id="4" name="Slide Number Placeholder 3"/>
+          <p:cNvSpPr>
+            <a:spLocks noGrp="1"/>
+          </p:cNvSpPr>
+          <p:nvPr>
+            <p:ph type="sldNum" sz="quarter" idx="10"/>
+          </p:nvPr>
+        </p:nvSpPr>
+        <p:spPr/>
+        <p:txBody>
+          <a:bodyPr/>
+          <a:lstStyle/>
+          <a:p>
+            <a:fld id="{F7021451-1387-4CA6-816F-3879F97B5CBC}" type="slidenum">
+              <a:rPr lang="en-US"/>
+              <a:t>7</a:t>
+            </a:fld>
+            <a:endParaRPr lang="en-US"/>
+          </a:p>
+        </p:txBody>
+      </p:sp>
+    </p:spTree>
+    <p:extLst>
+      <p:ext uri="{BB962C8B-B14F-4D97-AF65-F5344CB8AC3E}">
+        <p14:creationId xmlns:p14="http://schemas.microsoft.com/office/powerpoint/2010/main" val="1024086991"/>
+      </p:ext>
+    </p:extLst>
+  </p:cSld>
+  <p:clrMapOvr>
+    <a:masterClrMapping/>
+  </p:clrMapOvr>
+</p:notes>
+</file>
+
+<file path=ppt/notesSlides/notesSlide5.xml><?xml version="1.0" encoding="utf-8"?>
+<p:notes xmlns:a="http://schemas.openxmlformats.org/drawingml/2006/main" xmlns:r="http://schemas.openxmlformats.org/officeDocument/2006/relationships" xmlns:p="http://schemas.openxmlformats.org/presentationml/2006/main">
+  <p:cSld>
+    <p:spTree>
+      <p:nvGrpSpPr>
+        <p:cNvPr id="1" name=""/>
+        <p:cNvGrpSpPr/>
+        <p:nvPr/>
+      </p:nvGrpSpPr>
+      <p:grpSpPr>
+        <a:xfrm>
+          <a:off x="0" y="0"/>
+          <a:ext cx="0" cy="0"/>
+          <a:chOff x="0" y="0"/>
+          <a:chExt cx="0" cy="0"/>
+        </a:xfrm>
+      </p:grpSpPr>
+      <p:sp>
+        <p:nvSpPr>
+          <p:cNvPr id="2" name="Slide Image Placeholder 1"/>
+          <p:cNvSpPr>
+            <a:spLocks noGrp="1" noRot="1" noChangeAspect="1"/>
+          </p:cNvSpPr>
+          <p:nvPr>
+            <p:ph type="sldImg"/>
+          </p:nvPr>
+        </p:nvSpPr>
+        <p:spPr/>
+      </p:sp>
+      <p:sp>
+        <p:nvSpPr>
+          <p:cNvPr id="3" name="Notes Placeholder 2"/>
+          <p:cNvSpPr>
+            <a:spLocks noGrp="1"/>
+          </p:cNvSpPr>
+          <p:nvPr>
+            <p:ph type="body" idx="1"/>
+          </p:nvPr>
+        </p:nvSpPr>
+        <p:spPr/>
+        <p:txBody>
+          <a:bodyPr/>
+          <a:lstStyle/>
+          <a:p>
+            <a:endParaRPr lang="en-US" dirty="0"/>
+          </a:p>
+        </p:txBody>
+      </p:sp>
+      <p:sp>
+        <p:nvSpPr>
+          <p:cNvPr id="4" name="Slide Number Placeholder 3"/>
+          <p:cNvSpPr>
+            <a:spLocks noGrp="1"/>
+          </p:cNvSpPr>
+          <p:nvPr>
+            <p:ph type="sldNum" sz="quarter" idx="10"/>
+          </p:nvPr>
+        </p:nvSpPr>
+        <p:spPr/>
+        <p:txBody>
+          <a:bodyPr/>
+          <a:lstStyle/>
+          <a:p>
+            <a:fld id="{F7021451-1387-4CA6-816F-3879F97B5CBC}" type="slidenum">
+              <a:rPr lang="en-US"/>
+              <a:t>8</a:t>
+            </a:fld>
+            <a:endParaRPr lang="en-US"/>
+          </a:p>
+        </p:txBody>
+      </p:sp>
+    </p:spTree>
+    <p:extLst>
+      <p:ext uri="{BB962C8B-B14F-4D97-AF65-F5344CB8AC3E}">
+        <p14:creationId xmlns:p14="http://schemas.microsoft.com/office/powerpoint/2010/main" val="1024086991"/>
+      </p:ext>
+    </p:extLst>
+  </p:cSld>
+  <p:clrMapOvr>
+    <a:masterClrMapping/>
+  </p:clrMapOvr>
+</p:notes>
+</file>
+
+<file path=ppt/notesSlides/notesSlide6.xml><?xml version="1.0" encoding="utf-8"?>
+<p:notes xmlns:a="http://schemas.openxmlformats.org/drawingml/2006/main" xmlns:r="http://schemas.openxmlformats.org/officeDocument/2006/relationships" xmlns:p="http://schemas.openxmlformats.org/presentationml/2006/main">
+  <p:cSld>
+    <p:spTree>
+      <p:nvGrpSpPr>
+        <p:cNvPr id="1" name=""/>
+        <p:cNvGrpSpPr/>
+        <p:nvPr/>
+      </p:nvGrpSpPr>
+      <p:grpSpPr>
+        <a:xfrm>
+          <a:off x="0" y="0"/>
+          <a:ext cx="0" cy="0"/>
+          <a:chOff x="0" y="0"/>
+          <a:chExt cx="0" cy="0"/>
+        </a:xfrm>
+      </p:grpSpPr>
+      <p:sp>
+        <p:nvSpPr>
+          <p:cNvPr id="2" name="Slide Image Placeholder 1"/>
+          <p:cNvSpPr>
+            <a:spLocks noGrp="1" noRot="1" noChangeAspect="1"/>
+          </p:cNvSpPr>
+          <p:nvPr>
+            <p:ph type="sldImg"/>
+          </p:nvPr>
+        </p:nvSpPr>
+        <p:spPr/>
+      </p:sp>
+      <p:sp>
+        <p:nvSpPr>
+          <p:cNvPr id="3" name="Notes Placeholder 2"/>
+          <p:cNvSpPr>
+            <a:spLocks noGrp="1"/>
+          </p:cNvSpPr>
+          <p:nvPr>
+            <p:ph type="body" idx="1"/>
+          </p:nvPr>
+        </p:nvSpPr>
+        <p:spPr/>
+        <p:txBody>
+          <a:bodyPr/>
+          <a:lstStyle/>
+          <a:p>
+            <a:endParaRPr lang="en-US" dirty="0"/>
+          </a:p>
+        </p:txBody>
+      </p:sp>
+      <p:sp>
+        <p:nvSpPr>
+          <p:cNvPr id="4" name="Slide Number Placeholder 3"/>
+          <p:cNvSpPr>
+            <a:spLocks noGrp="1"/>
+          </p:cNvSpPr>
+          <p:nvPr>
+            <p:ph type="sldNum" sz="quarter" idx="10"/>
+          </p:nvPr>
+        </p:nvSpPr>
+        <p:spPr/>
+        <p:txBody>
+          <a:bodyPr/>
+          <a:lstStyle/>
+          <a:p>
+            <a:fld id="{F7021451-1387-4CA6-816F-3879F97B5CBC}" type="slidenum">
+              <a:rPr lang="en-US"/>
+              <a:t>9</a:t>
+            </a:fld>
+            <a:endParaRPr lang="en-US"/>
+          </a:p>
+        </p:txBody>
+      </p:sp>
+    </p:spTree>
+    <p:extLst>
+      <p:ext uri="{BB962C8B-B14F-4D97-AF65-F5344CB8AC3E}">
+        <p14:creationId xmlns:p14="http://schemas.microsoft.com/office/powerpoint/2010/main" val="1024086991"/>
+      </p:ext>
+    </p:extLst>
+  </p:cSld>
+  <p:clrMapOvr>
+    <a:masterClrMapping/>
+  </p:clrMapOvr>
+</p:notes>
+</file>
+
+<file path=ppt/notesSlides/notesSlide7.xml><?xml version="1.0" encoding="utf-8"?>
+<p:notes xmlns:a="http://schemas.openxmlformats.org/drawingml/2006/main" xmlns:r="http://schemas.openxmlformats.org/officeDocument/2006/relationships" xmlns:p="http://schemas.openxmlformats.org/presentationml/2006/main">
+  <p:cSld>
+    <p:spTree>
+      <p:nvGrpSpPr>
+        <p:cNvPr id="1" name=""/>
+        <p:cNvGrpSpPr/>
+        <p:nvPr/>
+      </p:nvGrpSpPr>
+      <p:grpSpPr>
+        <a:xfrm>
+          <a:off x="0" y="0"/>
+          <a:ext cx="0" cy="0"/>
+          <a:chOff x="0" y="0"/>
+          <a:chExt cx="0" cy="0"/>
+        </a:xfrm>
+      </p:grpSpPr>
+      <p:sp>
+        <p:nvSpPr>
+          <p:cNvPr id="2" name="Slide Image Placeholder 1"/>
+          <p:cNvSpPr>
+            <a:spLocks noGrp="1" noRot="1" noChangeAspect="1"/>
+          </p:cNvSpPr>
+          <p:nvPr>
+            <p:ph type="sldImg"/>
+          </p:nvPr>
+        </p:nvSpPr>
+        <p:spPr/>
+      </p:sp>
+      <p:sp>
+        <p:nvSpPr>
+          <p:cNvPr id="3" name="Notes Placeholder 2"/>
+          <p:cNvSpPr>
+            <a:spLocks noGrp="1"/>
+          </p:cNvSpPr>
+          <p:nvPr>
+            <p:ph type="body" idx="1"/>
+          </p:nvPr>
+        </p:nvSpPr>
+        <p:spPr/>
+        <p:txBody>
+          <a:bodyPr/>
+          <a:lstStyle/>
+          <a:p>
+            <a:endParaRPr lang="en-US" dirty="0"/>
+          </a:p>
+        </p:txBody>
+      </p:sp>
+      <p:sp>
+        <p:nvSpPr>
+          <p:cNvPr id="4" name="Slide Number Placeholder 3"/>
+          <p:cNvSpPr>
+            <a:spLocks noGrp="1"/>
+          </p:cNvSpPr>
+          <p:nvPr>
+            <p:ph type="sldNum" sz="quarter" idx="10"/>
+          </p:nvPr>
+        </p:nvSpPr>
+        <p:spPr/>
+        <p:txBody>
+          <a:bodyPr/>
+          <a:lstStyle/>
+          <a:p>
+            <a:fld id="{F7021451-1387-4CA6-816F-3879F97B5CBC}" type="slidenum">
+              <a:rPr lang="en-US"/>
+              <a:t>10</a:t>
+            </a:fld>
+            <a:endParaRPr lang="en-US"/>
+          </a:p>
+        </p:txBody>
+      </p:sp>
+    </p:spTree>
+    <p:extLst>
+      <p:ext uri="{BB962C8B-B14F-4D97-AF65-F5344CB8AC3E}">
+        <p14:creationId xmlns:p14="http://schemas.microsoft.com/office/powerpoint/2010/main" val="1024086991"/>
+      </p:ext>
+    </p:extLst>
+  </p:cSld>
+  <p:clrMapOvr>
+    <a:masterClrMapping/>
+  </p:clrMapOvr>
+</p:notes>
+</file>
+
+<file path=ppt/notesSlides/notesSlide8.xml><?xml version="1.0" encoding="utf-8"?>
+<p:notes xmlns:a="http://schemas.openxmlformats.org/drawingml/2006/main" xmlns:r="http://schemas.openxmlformats.org/officeDocument/2006/relationships" xmlns:p="http://schemas.openxmlformats.org/presentationml/2006/main">
+  <p:cSld>
+    <p:spTree>
+      <p:nvGrpSpPr>
+        <p:cNvPr id="1" name=""/>
+        <p:cNvGrpSpPr/>
+        <p:nvPr/>
+      </p:nvGrpSpPr>
+      <p:grpSpPr>
+        <a:xfrm>
+          <a:off x="0" y="0"/>
+          <a:ext cx="0" cy="0"/>
+          <a:chOff x="0" y="0"/>
+          <a:chExt cx="0" cy="0"/>
+        </a:xfrm>
+      </p:grpSpPr>
+      <p:sp>
+        <p:nvSpPr>
+          <p:cNvPr id="2" name="Slide Image Placeholder 1"/>
+          <p:cNvSpPr>
+            <a:spLocks noGrp="1" noRot="1" noChangeAspect="1"/>
+          </p:cNvSpPr>
+          <p:nvPr>
+            <p:ph type="sldImg"/>
+          </p:nvPr>
+        </p:nvSpPr>
+        <p:spPr/>
+      </p:sp>
+      <p:sp>
+        <p:nvSpPr>
+          <p:cNvPr id="3" name="Notes Placeholder 2"/>
+          <p:cNvSpPr>
+            <a:spLocks noGrp="1"/>
+          </p:cNvSpPr>
+          <p:nvPr>
+            <p:ph type="body" idx="1"/>
+          </p:nvPr>
+        </p:nvSpPr>
+        <p:spPr/>
+        <p:txBody>
+          <a:bodyPr/>
+          <a:lstStyle/>
+          <a:p>
+            <a:endParaRPr lang="en-US" dirty="0"/>
+          </a:p>
+        </p:txBody>
+      </p:sp>
+      <p:sp>
+        <p:nvSpPr>
+          <p:cNvPr id="4" name="Slide Number Placeholder 3"/>
+          <p:cNvSpPr>
+            <a:spLocks noGrp="1"/>
+          </p:cNvSpPr>
+          <p:nvPr>
+            <p:ph type="sldNum" sz="quarter" idx="10"/>
+          </p:nvPr>
+        </p:nvSpPr>
+        <p:spPr/>
+        <p:txBody>
+          <a:bodyPr/>
+          <a:lstStyle/>
+          <a:p>
+            <a:fld id="{F7021451-1387-4CA6-816F-3879F97B5CBC}" type="slidenum">
+              <a:rPr lang="en-US"/>
+              <a:t>11</a:t>
+            </a:fld>
+            <a:endParaRPr lang="en-US"/>
+          </a:p>
+        </p:txBody>
+      </p:sp>
+    </p:spTree>
+    <p:extLst>
+      <p:ext uri="{BB962C8B-B14F-4D97-AF65-F5344CB8AC3E}">
+        <p14:creationId xmlns:p14="http://schemas.microsoft.com/office/powerpoint/2010/main" val="1024086991"/>
+      </p:ext>
+    </p:extLst>
+  </p:cSld>
+  <p:clrMapOvr>
+    <a:masterClrMapping/>
+  </p:clrMapOvr>
+</p:notes>
+</file>
+
+<file path=ppt/notesSlides/notesSlide9.xml><?xml version="1.0" encoding="utf-8"?>
+<p:notes xmlns:a="http://schemas.openxmlformats.org/drawingml/2006/main" xmlns:r="http://schemas.openxmlformats.org/officeDocument/2006/relationships" xmlns:p="http://schemas.openxmlformats.org/presentationml/2006/main">
+  <p:cSld>
+    <p:spTree>
+      <p:nvGrpSpPr>
+        <p:cNvPr id="1" name=""/>
+        <p:cNvGrpSpPr/>
+        <p:nvPr/>
+      </p:nvGrpSpPr>
+      <p:grpSpPr>
+        <a:xfrm>
+          <a:off x="0" y="0"/>
+          <a:ext cx="0" cy="0"/>
+          <a:chOff x="0" y="0"/>
+          <a:chExt cx="0" cy="0"/>
+        </a:xfrm>
+      </p:grpSpPr>
+      <p:sp>
+        <p:nvSpPr>
+          <p:cNvPr id="2" name="Slide Image Placeholder 1"/>
+          <p:cNvSpPr>
+            <a:spLocks noGrp="1" noRot="1" noChangeAspect="1"/>
+          </p:cNvSpPr>
+          <p:nvPr>
+            <p:ph type="sldImg"/>
+          </p:nvPr>
+        </p:nvSpPr>
+        <p:spPr/>
+      </p:sp>
+      <p:sp>
+        <p:nvSpPr>
+          <p:cNvPr id="3" name="Notes Placeholder 2"/>
+          <p:cNvSpPr>
+            <a:spLocks noGrp="1"/>
+          </p:cNvSpPr>
+          <p:nvPr>
+            <p:ph type="body" idx="1"/>
+          </p:nvPr>
+        </p:nvSpPr>
+        <p:spPr/>
+        <p:txBody>
+          <a:bodyPr/>
+          <a:lstStyle/>
+          <a:p>
+            <a:endParaRPr lang="en-US" dirty="0"/>
+          </a:p>
+        </p:txBody>
+      </p:sp>
+      <p:sp>
+        <p:nvSpPr>
+          <p:cNvPr id="4" name="Slide Number Placeholder 3"/>
+          <p:cNvSpPr>
+            <a:spLocks noGrp="1"/>
+          </p:cNvSpPr>
+          <p:nvPr>
+            <p:ph type="sldNum" sz="quarter" idx="10"/>
+          </p:nvPr>
+        </p:nvSpPr>
+        <p:spPr/>
+        <p:txBody>
+          <a:bodyPr/>
+          <a:lstStyle/>
+          <a:p>
+            <a:fld id="{F7021451-1387-4CA6-816F-3879F97B5CBC}" type="slidenum">
+              <a:rPr lang="en-US"/>
+              <a:t>12</a:t>
+            </a:fld>
+            <a:endParaRPr lang="en-US"/>
+          </a:p>
+        </p:txBody>
+      </p:sp>
+    </p:spTree>
+    <p:extLst>
+      <p:ext uri="{BB962C8B-B14F-4D97-AF65-F5344CB8AC3E}">
+        <p14:creationId xmlns:p14="http://schemas.microsoft.com/office/powerpoint/2010/main" val="1024086991"/>
+      </p:ext>
+    </p:extLst>
+  </p:cSld>
+  <p:clrMapOvr>
+    <a:masterClrMapping/>
+  </p:clrMapOvr>
+</p:notes>
 </file>
 
 <file path=ppt/slideLayouts/slideLayout1.xml><?xml version="1.0" encoding="utf-8"?>
@@ -544,6 +1399,6848 @@
     </p:otherStyle>
   </p:txStyles>
 </p:sldMaster>
+</file>
+
+<file path=ppt/slides/slide1.xml><?xml version="1.0" encoding="utf-8"?>
+<p:sld xmlns:a="http://schemas.openxmlformats.org/drawingml/2006/main" xmlns:r="http://schemas.openxmlformats.org/officeDocument/2006/relationships" xmlns:p="http://schemas.openxmlformats.org/presentationml/2006/main">
+  <p:cSld name="Slide 1">
+    <p:bg>
+      <p:bgPr>
+        <a:solidFill>
+          <a:srgbClr val="1E2761"/>
+        </a:solidFill>
+        <a:effectLst/>
+      </p:bgPr>
+    </p:bg>
+    <p:spTree>
+      <p:nvGrpSpPr>
+        <p:cNvPr id="1" name=""/>
+        <p:cNvGrpSpPr/>
+        <p:nvPr/>
+      </p:nvGrpSpPr>
+      <p:grpSpPr>
+        <a:xfrm>
+          <a:off x="0" y="0"/>
+          <a:ext cx="0" cy="0"/>
+          <a:chOff x="0" y="0"/>
+          <a:chExt cx="0" cy="0"/>
+        </a:xfrm>
+      </p:grpSpPr>
+      <p:sp>
+        <p:nvSpPr>
+          <p:cNvPr id="2" name="Text 0"/>
+          <p:cNvSpPr/>
+          <p:nvPr/>
+        </p:nvSpPr>
+        <p:spPr>
+          <a:xfrm>
+            <a:off x="640080" y="2331720"/>
+            <a:ext cx="10881360" cy="457200"/>
+          </a:xfrm>
+          <a:prstGeom prst="rect">
+            <a:avLst/>
+          </a:prstGeom>
+          <a:noFill/>
+          <a:ln/>
+        </p:spPr>
+        <p:txBody>
+          <a:bodyPr wrap="square" lIns="0" tIns="0" rIns="0" bIns="0" rtlCol="0" anchor="ctr"/>
+          <a:lstStyle/>
+          <a:p>
+            <a:pPr marL="0" indent="0" algn="ctr">
+              <a:buNone/>
+            </a:pPr>
+            <a:r>
+              <a:rPr lang="en-US" sz="1500" b="1" kern="0" spc="200" dirty="0">
+                <a:solidFill>
+                  <a:srgbClr val="C9A24B"/>
+                </a:solidFill>
+                <a:latin typeface="Calibri" pitchFamily="34" charset="0"/>
+                <a:ea typeface="Calibri" pitchFamily="34" charset="-122"/>
+                <a:cs typeface="Calibri" pitchFamily="34" charset="-120"/>
+              </a:rPr>
+              <a:t>2021 SALARY SURVEY</a:t>
+            </a:r>
+            <a:endParaRPr lang="en-US" sz="1500" dirty="0"/>
+          </a:p>
+        </p:txBody>
+      </p:sp>
+      <p:sp>
+        <p:nvSpPr>
+          <p:cNvPr id="3" name="Text 1"/>
+          <p:cNvSpPr/>
+          <p:nvPr/>
+        </p:nvSpPr>
+        <p:spPr>
+          <a:xfrm>
+            <a:off x="640080" y="2788920"/>
+            <a:ext cx="10881360" cy="914400"/>
+          </a:xfrm>
+          <a:prstGeom prst="rect">
+            <a:avLst/>
+          </a:prstGeom>
+          <a:noFill/>
+          <a:ln/>
+        </p:spPr>
+        <p:txBody>
+          <a:bodyPr wrap="square" lIns="0" tIns="0" rIns="0" bIns="0" rtlCol="0" anchor="ctr"/>
+          <a:lstStyle/>
+          <a:p>
+            <a:pPr marL="0" indent="0" algn="ctr">
+              <a:buNone/>
+            </a:pPr>
+            <a:r>
+              <a:rPr lang="en-US" sz="4200" b="1" dirty="0">
+                <a:solidFill>
+                  <a:srgbClr val="FFFFFF"/>
+                </a:solidFill>
+                <a:latin typeface="Cambria" pitchFamily="34" charset="0"/>
+                <a:ea typeface="Cambria" pitchFamily="34" charset="-122"/>
+                <a:cs typeface="Cambria" pitchFamily="34" charset="-120"/>
+              </a:rPr>
+              <a:t>Data Cleaning &amp; Insight Findings</a:t>
+            </a:r>
+            <a:endParaRPr lang="en-US" sz="4200" dirty="0"/>
+          </a:p>
+        </p:txBody>
+      </p:sp>
+      <p:sp>
+        <p:nvSpPr>
+          <p:cNvPr id="4" name="Shape 2"/>
+          <p:cNvSpPr/>
+          <p:nvPr/>
+        </p:nvSpPr>
+        <p:spPr>
+          <a:xfrm>
+            <a:off x="5394960" y="3794760"/>
+            <a:ext cx="1371600" cy="0"/>
+          </a:xfrm>
+          <a:prstGeom prst="line">
+            <a:avLst/>
+          </a:prstGeom>
+          <a:noFill/>
+          <a:ln w="25400">
+            <a:solidFill>
+              <a:srgbClr val="C9A24B"/>
+            </a:solidFill>
+            <a:prstDash val="solid"/>
+          </a:ln>
+        </p:spPr>
+      </p:sp>
+      <p:sp>
+        <p:nvSpPr>
+          <p:cNvPr id="5" name="Text 3"/>
+          <p:cNvSpPr/>
+          <p:nvPr/>
+        </p:nvSpPr>
+        <p:spPr>
+          <a:xfrm>
+            <a:off x="640080" y="3977640"/>
+            <a:ext cx="10881360" cy="457200"/>
+          </a:xfrm>
+          <a:prstGeom prst="rect">
+            <a:avLst/>
+          </a:prstGeom>
+          <a:noFill/>
+          <a:ln/>
+        </p:spPr>
+        <p:txBody>
+          <a:bodyPr wrap="square" lIns="0" tIns="0" rIns="0" bIns="0" rtlCol="0" anchor="ctr"/>
+          <a:lstStyle/>
+          <a:p>
+            <a:pPr marL="0" indent="0" algn="ctr">
+              <a:buNone/>
+            </a:pPr>
+            <a:r>
+              <a:rPr lang="en-US" sz="1500" dirty="0">
+                <a:solidFill>
+                  <a:srgbClr val="CADCFC"/>
+                </a:solidFill>
+                <a:latin typeface="Calibri" pitchFamily="34" charset="0"/>
+                <a:ea typeface="Calibri" pitchFamily="34" charset="-122"/>
+                <a:cs typeface="Calibri" pitchFamily="34" charset="-120"/>
+              </a:rPr>
+              <a:t>From a messy 28,000+ response survey to reliable insights on pay</a:t>
+            </a:r>
+            <a:endParaRPr lang="en-US" sz="1500" dirty="0"/>
+          </a:p>
+        </p:txBody>
+      </p:sp>
+    </p:spTree>
+  </p:cSld>
+  <p:clrMapOvr>
+    <a:masterClrMapping/>
+  </p:clrMapOvr>
+</p:sld>
+</file>
+
+<file path=ppt/slides/slide10.xml><?xml version="1.0" encoding="utf-8"?>
+<p:sld xmlns:a="http://schemas.openxmlformats.org/drawingml/2006/main" xmlns:r="http://schemas.openxmlformats.org/officeDocument/2006/relationships" xmlns:p="http://schemas.openxmlformats.org/presentationml/2006/main">
+  <p:cSld name="Slide 7">
+    <p:bg>
+      <p:bgPr>
+        <a:solidFill>
+          <a:srgbClr val="FFFFFF"/>
+        </a:solidFill>
+        <a:effectLst/>
+      </p:bgPr>
+    </p:bg>
+    <p:spTree>
+      <p:nvGrpSpPr>
+        <p:cNvPr id="1" name=""/>
+        <p:cNvGrpSpPr/>
+        <p:nvPr/>
+      </p:nvGrpSpPr>
+      <p:grpSpPr>
+        <a:xfrm>
+          <a:off x="0" y="0"/>
+          <a:ext cx="0" cy="0"/>
+          <a:chOff x="0" y="0"/>
+          <a:chExt cx="0" cy="0"/>
+        </a:xfrm>
+      </p:grpSpPr>
+      <p:sp>
+        <p:nvSpPr>
+          <p:cNvPr id="2" name="Shape 0"/>
+          <p:cNvSpPr/>
+          <p:nvPr/>
+        </p:nvSpPr>
+        <p:spPr>
+          <a:xfrm>
+            <a:off x="548640" y="457200"/>
+            <a:ext cx="566928" cy="566928"/>
+          </a:xfrm>
+          <a:prstGeom prst="roundRect">
+            <a:avLst>
+              <a:gd name="adj" fmla="val 80645"/>
+            </a:avLst>
+          </a:prstGeom>
+          <a:solidFill>
+            <a:srgbClr val="1E2761"/>
+          </a:solidFill>
+          <a:ln/>
+        </p:spPr>
+      </p:sp>
+      <p:sp>
+        <p:nvSpPr>
+          <p:cNvPr id="3" name="Text 1"/>
+          <p:cNvSpPr/>
+          <p:nvPr/>
+        </p:nvSpPr>
+        <p:spPr>
+          <a:xfrm>
+            <a:off x="548640" y="457200"/>
+            <a:ext cx="566928" cy="566928"/>
+          </a:xfrm>
+          <a:prstGeom prst="rect">
+            <a:avLst/>
+          </a:prstGeom>
+          <a:noFill/>
+          <a:ln/>
+        </p:spPr>
+        <p:txBody>
+          <a:bodyPr wrap="square" lIns="0" tIns="0" rIns="0" bIns="0" rtlCol="0" anchor="ctr"/>
+          <a:lstStyle/>
+          <a:p>
+            <a:pPr marL="0" indent="0" algn="ctr">
+              <a:buNone/>
+            </a:pPr>
+            <a:r>
+              <a:rPr lang="en-US" sz="2000" b="1" dirty="0">
+                <a:solidFill>
+                  <a:srgbClr val="C9A24B"/>
+                </a:solidFill>
+                <a:latin typeface="Cambria" pitchFamily="34" charset="0"/>
+                <a:ea typeface="Cambria" pitchFamily="34" charset="-122"/>
+                <a:cs typeface="Cambria" pitchFamily="34" charset="-120"/>
+              </a:rPr>
+              <a:t>4</a:t>
+            </a:r>
+            <a:endParaRPr lang="en-US" sz="2000" dirty="0"/>
+          </a:p>
+        </p:txBody>
+      </p:sp>
+      <p:sp>
+        <p:nvSpPr>
+          <p:cNvPr id="4" name="Text 2"/>
+          <p:cNvSpPr/>
+          <p:nvPr/>
+        </p:nvSpPr>
+        <p:spPr>
+          <a:xfrm>
+            <a:off x="1298448" y="411480"/>
+            <a:ext cx="10314432" cy="731520"/>
+          </a:xfrm>
+          <a:prstGeom prst="rect">
+            <a:avLst/>
+          </a:prstGeom>
+          <a:noFill/>
+          <a:ln/>
+        </p:spPr>
+        <p:txBody>
+          <a:bodyPr wrap="square" lIns="0" tIns="0" rIns="0" bIns="0" rtlCol="0" anchor="ctr"/>
+          <a:lstStyle/>
+          <a:p>
+            <a:pPr marL="0" indent="0">
+              <a:buNone/>
+            </a:pPr>
+            <a:r>
+              <a:rPr lang="en-US" sz="2800" b="1" dirty="0">
+                <a:solidFill>
+                  <a:srgbClr val="1E2761"/>
+                </a:solidFill>
+                <a:latin typeface="Cambria" pitchFamily="34" charset="0"/>
+                <a:ea typeface="Cambria" pitchFamily="34" charset="-122"/>
+                <a:cs typeface="Cambria" pitchFamily="34" charset="-120"/>
+              </a:rPr>
+              <a:t>Location → Salary</a:t>
+            </a:r>
+            <a:endParaRPr lang="en-US" sz="2800" dirty="0"/>
+          </a:p>
+        </p:txBody>
+      </p:sp>
+      <p:sp>
+        <p:nvSpPr>
+          <p:cNvPr id="5" name="Text 3"/>
+          <p:cNvSpPr/>
+          <p:nvPr/>
+        </p:nvSpPr>
+        <p:spPr>
+          <a:xfrm>
+            <a:off x="1298448" y="1042416"/>
+            <a:ext cx="10314432" cy="365760"/>
+          </a:xfrm>
+          <a:prstGeom prst="rect">
+            <a:avLst/>
+          </a:prstGeom>
+          <a:noFill/>
+          <a:ln/>
+        </p:spPr>
+        <p:txBody>
+          <a:bodyPr wrap="square" lIns="0" tIns="0" rIns="0" bIns="0" rtlCol="0" anchor="ctr"/>
+          <a:lstStyle/>
+          <a:p>
+            <a:pPr marL="0" indent="0">
+              <a:buNone/>
+            </a:pPr>
+            <a:r>
+              <a:rPr lang="en-US" sz="1300" i="1" dirty="0">
+                <a:solidFill>
+                  <a:srgbClr val="6B7280"/>
+                </a:solidFill>
+                <a:latin typeface="Calibri" pitchFamily="34" charset="0"/>
+                <a:ea typeface="Calibri" pitchFamily="34" charset="-122"/>
+                <a:cs typeface="Calibri" pitchFamily="34" charset="-120"/>
+              </a:rPr>
+              <a:t>Yes — but the comparison comes with caveats.</a:t>
+            </a:r>
+            <a:endParaRPr lang="en-US" sz="1300" dirty="0"/>
+          </a:p>
+        </p:txBody>
+      </p:sp>
+      <p:pic>
+        <p:nvPicPr>
+          <p:cNvPr id="6" name="Image 0" descr="charts/chart4_country.png"/>
+          <p:cNvPicPr>
+            <a:picLocks noChangeAspect="1"/>
+          </p:cNvPicPr>
+          <p:nvPr/>
+        </p:nvPicPr>
+        <p:blipFill>
+          <a:blip r:embed="rId3"/>
+          <a:stretch>
+            <a:fillRect/>
+          </a:stretch>
+        </p:blipFill>
+        <p:spPr>
+          <a:xfrm>
+            <a:off x="548640" y="1600200"/>
+            <a:ext cx="6903720" cy="4297680"/>
+          </a:xfrm>
+          <a:prstGeom prst="rect">
+            <a:avLst/>
+          </a:prstGeom>
+        </p:spPr>
+      </p:pic>
+      <p:sp>
+        <p:nvSpPr>
+          <p:cNvPr id="7" name="Text 4"/>
+          <p:cNvSpPr/>
+          <p:nvPr/>
+        </p:nvSpPr>
+        <p:spPr>
+          <a:xfrm>
+            <a:off x="7772400" y="1737360"/>
+            <a:ext cx="3886200" cy="822960"/>
+          </a:xfrm>
+          <a:prstGeom prst="rect">
+            <a:avLst/>
+          </a:prstGeom>
+          <a:noFill/>
+          <a:ln/>
+        </p:spPr>
+        <p:txBody>
+          <a:bodyPr wrap="square" lIns="0" tIns="0" rIns="0" bIns="0" rtlCol="0" anchor="ctr"/>
+          <a:lstStyle/>
+          <a:p>
+            <a:pPr marL="0" indent="0">
+              <a:lnSpc>
+                <a:spcPts val="1500"/>
+              </a:lnSpc>
+              <a:buNone/>
+            </a:pPr>
+            <a:r>
+              <a:rPr lang="en-US" sz="2200" b="1" dirty="0">
+                <a:solidFill>
+                  <a:srgbClr val="C9A24B"/>
+                </a:solidFill>
+                <a:latin typeface="Cambria" pitchFamily="34" charset="0"/>
+                <a:ea typeface="Cambria" pitchFamily="34" charset="-122"/>
+                <a:cs typeface="Cambria" pitchFamily="34" charset="-120"/>
+              </a:rPr>
+              <a:t>$78,800</a:t>
+            </a:r>
+            <a:endParaRPr lang="en-US" sz="2200" dirty="0"/>
+          </a:p>
+          <a:p>
+            <a:pPr marL="0" indent="0">
+              <a:lnSpc>
+                <a:spcPts val="1500"/>
+              </a:lnSpc>
+              <a:buNone/>
+            </a:pPr>
+            <a:r>
+              <a:rPr lang="en-US" sz="1250" dirty="0">
+                <a:solidFill>
+                  <a:srgbClr val="6B7280"/>
+                </a:solidFill>
+                <a:latin typeface="Cambria" pitchFamily="34" charset="0"/>
+                <a:ea typeface="Cambria" pitchFamily="34" charset="-122"/>
+                <a:cs typeface="Cambria" pitchFamily="34" charset="-120"/>
+              </a:rPr>
+              <a:t>United States — highest approx. median pay</a:t>
+            </a:r>
+            <a:endParaRPr lang="en-US" sz="2200" dirty="0"/>
+          </a:p>
+        </p:txBody>
+      </p:sp>
+      <p:sp>
+        <p:nvSpPr>
+          <p:cNvPr id="8" name="Shape 5"/>
+          <p:cNvSpPr/>
+          <p:nvPr/>
+        </p:nvSpPr>
+        <p:spPr>
+          <a:xfrm>
+            <a:off x="7772400" y="2651760"/>
+            <a:ext cx="3886200" cy="0"/>
+          </a:xfrm>
+          <a:prstGeom prst="line">
+            <a:avLst/>
+          </a:prstGeom>
+          <a:noFill/>
+          <a:ln w="12700">
+            <a:solidFill>
+              <a:srgbClr val="D8DEEC"/>
+            </a:solidFill>
+            <a:prstDash val="solid"/>
+          </a:ln>
+        </p:spPr>
+      </p:sp>
+      <p:sp>
+        <p:nvSpPr>
+          <p:cNvPr id="9" name="Text 6"/>
+          <p:cNvSpPr/>
+          <p:nvPr/>
+        </p:nvSpPr>
+        <p:spPr>
+          <a:xfrm>
+            <a:off x="7772400" y="2788920"/>
+            <a:ext cx="3886200" cy="822960"/>
+          </a:xfrm>
+          <a:prstGeom prst="rect">
+            <a:avLst/>
+          </a:prstGeom>
+          <a:noFill/>
+          <a:ln/>
+        </p:spPr>
+        <p:txBody>
+          <a:bodyPr wrap="square" lIns="0" tIns="0" rIns="0" bIns="0" rtlCol="0" anchor="ctr"/>
+          <a:lstStyle/>
+          <a:p>
+            <a:pPr marL="0" indent="0">
+              <a:lnSpc>
+                <a:spcPts val="1500"/>
+              </a:lnSpc>
+              <a:buNone/>
+            </a:pPr>
+            <a:r>
+              <a:rPr lang="en-US" sz="2200" b="1" dirty="0">
+                <a:solidFill>
+                  <a:srgbClr val="6B7280"/>
+                </a:solidFill>
+                <a:latin typeface="Cambria" pitchFamily="34" charset="0"/>
+                <a:ea typeface="Cambria" pitchFamily="34" charset="-122"/>
+                <a:cs typeface="Cambria" pitchFamily="34" charset="-120"/>
+              </a:rPr>
+              <a:t>$50,760</a:t>
+            </a:r>
+            <a:endParaRPr lang="en-US" sz="2200" dirty="0"/>
+          </a:p>
+          <a:p>
+            <a:pPr marL="0" indent="0">
+              <a:lnSpc>
+                <a:spcPts val="1500"/>
+              </a:lnSpc>
+              <a:buNone/>
+            </a:pPr>
+            <a:r>
+              <a:rPr lang="en-US" sz="1250" dirty="0">
+                <a:solidFill>
+                  <a:srgbClr val="6B7280"/>
+                </a:solidFill>
+                <a:latin typeface="Cambria" pitchFamily="34" charset="0"/>
+                <a:ea typeface="Cambria" pitchFamily="34" charset="-122"/>
+                <a:cs typeface="Cambria" pitchFamily="34" charset="-120"/>
+              </a:rPr>
+              <a:t>France — lowest approx. median pay</a:t>
+            </a:r>
+            <a:endParaRPr lang="en-US" sz="2200" dirty="0"/>
+          </a:p>
+        </p:txBody>
+      </p:sp>
+      <p:sp>
+        <p:nvSpPr>
+          <p:cNvPr id="10" name="Shape 7"/>
+          <p:cNvSpPr/>
+          <p:nvPr/>
+        </p:nvSpPr>
+        <p:spPr>
+          <a:xfrm>
+            <a:off x="7772400" y="4160520"/>
+            <a:ext cx="3886200" cy="2011680"/>
+          </a:xfrm>
+          <a:prstGeom prst="roundRect">
+            <a:avLst>
+              <a:gd name="adj" fmla="val 3182"/>
+            </a:avLst>
+          </a:prstGeom>
+          <a:solidFill>
+            <a:srgbClr val="1E2761"/>
+          </a:solidFill>
+          <a:ln/>
+        </p:spPr>
+      </p:sp>
+      <p:sp>
+        <p:nvSpPr>
+          <p:cNvPr id="11" name="Text 8"/>
+          <p:cNvSpPr/>
+          <p:nvPr/>
+        </p:nvSpPr>
+        <p:spPr>
+          <a:xfrm>
+            <a:off x="8001000" y="4288536"/>
+            <a:ext cx="3429000" cy="274320"/>
+          </a:xfrm>
+          <a:prstGeom prst="rect">
+            <a:avLst/>
+          </a:prstGeom>
+          <a:noFill/>
+          <a:ln/>
+        </p:spPr>
+        <p:txBody>
+          <a:bodyPr wrap="square" lIns="0" tIns="0" rIns="0" bIns="0" rtlCol="0" anchor="ctr"/>
+          <a:lstStyle/>
+          <a:p>
+            <a:pPr marL="0" indent="0">
+              <a:buNone/>
+            </a:pPr>
+            <a:r>
+              <a:rPr lang="en-US" sz="1050" b="1" kern="0" spc="120" dirty="0">
+                <a:solidFill>
+                  <a:srgbClr val="C9A24B"/>
+                </a:solidFill>
+                <a:latin typeface="Calibri" pitchFamily="34" charset="0"/>
+                <a:ea typeface="Calibri" pitchFamily="34" charset="-122"/>
+                <a:cs typeface="Calibri" pitchFamily="34" charset="-120"/>
+              </a:rPr>
+              <a:t>CAVEAT</a:t>
+            </a:r>
+            <a:endParaRPr lang="en-US" sz="1050" dirty="0"/>
+          </a:p>
+        </p:txBody>
+      </p:sp>
+      <p:sp>
+        <p:nvSpPr>
+          <p:cNvPr id="12" name="Text 9"/>
+          <p:cNvSpPr/>
+          <p:nvPr/>
+        </p:nvSpPr>
+        <p:spPr>
+          <a:xfrm>
+            <a:off x="8001000" y="4572000"/>
+            <a:ext cx="3429000" cy="1508760"/>
+          </a:xfrm>
+          <a:prstGeom prst="rect">
+            <a:avLst/>
+          </a:prstGeom>
+          <a:noFill/>
+          <a:ln/>
+        </p:spPr>
+        <p:txBody>
+          <a:bodyPr wrap="square" lIns="0" tIns="0" rIns="0" bIns="0" rtlCol="0" anchor="ctr"/>
+          <a:lstStyle/>
+          <a:p>
+            <a:pPr marL="0" indent="0">
+              <a:lnSpc>
+                <a:spcPts val="1600"/>
+              </a:lnSpc>
+              <a:buNone/>
+            </a:pPr>
+            <a:r>
+              <a:rPr lang="en-US" sz="1250" dirty="0">
+                <a:solidFill>
+                  <a:srgbClr val="FFFFFF"/>
+                </a:solidFill>
+                <a:latin typeface="Calibri" pitchFamily="34" charset="0"/>
+                <a:ea typeface="Calibri" pitchFamily="34" charset="-122"/>
+                <a:cs typeface="Calibri" pitchFamily="34" charset="-120"/>
+              </a:rPr>
+              <a:t>83% of all responses are from the US, so non-US medians rest on much smaller samples. Currency conversion used fixed, approximate rates — not adjusted for cost of living.</a:t>
+            </a:r>
+            <a:endParaRPr lang="en-US" sz="1250" dirty="0"/>
+          </a:p>
+        </p:txBody>
+      </p:sp>
+      <p:sp>
+        <p:nvSpPr>
+          <p:cNvPr id="13" name="Text 10"/>
+          <p:cNvSpPr/>
+          <p:nvPr/>
+        </p:nvSpPr>
+        <p:spPr>
+          <a:xfrm>
+            <a:off x="548640" y="6528816"/>
+            <a:ext cx="7315200" cy="274320"/>
+          </a:xfrm>
+          <a:prstGeom prst="rect">
+            <a:avLst/>
+          </a:prstGeom>
+          <a:noFill/>
+          <a:ln/>
+        </p:spPr>
+        <p:txBody>
+          <a:bodyPr wrap="square" lIns="0" tIns="0" rIns="0" bIns="0" rtlCol="0" anchor="ctr"/>
+          <a:lstStyle/>
+          <a:p>
+            <a:pPr marL="0" indent="0">
+              <a:buNone/>
+            </a:pPr>
+            <a:r>
+              <a:rPr lang="en-US" sz="900" dirty="0">
+                <a:solidFill>
+                  <a:srgbClr val="6B7280"/>
+                </a:solidFill>
+                <a:latin typeface="Calibri" pitchFamily="34" charset="0"/>
+                <a:ea typeface="Calibri" pitchFamily="34" charset="-122"/>
+                <a:cs typeface="Calibri" pitchFamily="34" charset="-120"/>
+              </a:rPr>
+              <a:t>2021 Salary Survey — Key Points</a:t>
+            </a:r>
+            <a:endParaRPr lang="en-US" sz="900" dirty="0"/>
+          </a:p>
+        </p:txBody>
+      </p:sp>
+      <p:sp>
+        <p:nvSpPr>
+          <p:cNvPr id="14" name="Text 11"/>
+          <p:cNvSpPr/>
+          <p:nvPr/>
+        </p:nvSpPr>
+        <p:spPr>
+          <a:xfrm>
+            <a:off x="11338560" y="6528816"/>
+            <a:ext cx="365760" cy="274320"/>
+          </a:xfrm>
+          <a:prstGeom prst="rect">
+            <a:avLst/>
+          </a:prstGeom>
+          <a:noFill/>
+          <a:ln/>
+        </p:spPr>
+        <p:txBody>
+          <a:bodyPr wrap="square" lIns="0" tIns="0" rIns="0" bIns="0" rtlCol="0" anchor="ctr"/>
+          <a:lstStyle/>
+          <a:p>
+            <a:pPr marL="0" indent="0" algn="r">
+              <a:buNone/>
+            </a:pPr>
+            <a:r>
+              <a:rPr lang="en-US" sz="900" dirty="0">
+                <a:solidFill>
+                  <a:srgbClr val="6B7280"/>
+                </a:solidFill>
+                <a:latin typeface="Calibri" pitchFamily="34" charset="0"/>
+                <a:ea typeface="Calibri" pitchFamily="34" charset="-122"/>
+                <a:cs typeface="Calibri" pitchFamily="34" charset="-120"/>
+              </a:rPr>
+              <a:t>7</a:t>
+            </a:r>
+            <a:endParaRPr lang="en-US" sz="900" dirty="0"/>
+          </a:p>
+        </p:txBody>
+      </p:sp>
+    </p:spTree>
+  </p:cSld>
+  <p:clrMapOvr>
+    <a:masterClrMapping/>
+  </p:clrMapOvr>
+</p:sld>
+</file>
+
+<file path=ppt/slides/slide11.xml><?xml version="1.0" encoding="utf-8"?>
+<p:sld xmlns:a="http://schemas.openxmlformats.org/drawingml/2006/main" xmlns:r="http://schemas.openxmlformats.org/officeDocument/2006/relationships" xmlns:p="http://schemas.openxmlformats.org/presentationml/2006/main">
+  <p:cSld name="Slide 8">
+    <p:bg>
+      <p:bgPr>
+        <a:solidFill>
+          <a:srgbClr val="FFFFFF"/>
+        </a:solidFill>
+        <a:effectLst/>
+      </p:bgPr>
+    </p:bg>
+    <p:spTree>
+      <p:nvGrpSpPr>
+        <p:cNvPr id="1" name=""/>
+        <p:cNvGrpSpPr/>
+        <p:nvPr/>
+      </p:nvGrpSpPr>
+      <p:grpSpPr>
+        <a:xfrm>
+          <a:off x="0" y="0"/>
+          <a:ext cx="0" cy="0"/>
+          <a:chOff x="0" y="0"/>
+          <a:chExt cx="0" cy="0"/>
+        </a:xfrm>
+      </p:grpSpPr>
+      <p:sp>
+        <p:nvSpPr>
+          <p:cNvPr id="2" name="Shape 0"/>
+          <p:cNvSpPr/>
+          <p:nvPr/>
+        </p:nvSpPr>
+        <p:spPr>
+          <a:xfrm>
+            <a:off x="548640" y="457200"/>
+            <a:ext cx="566928" cy="566928"/>
+          </a:xfrm>
+          <a:prstGeom prst="roundRect">
+            <a:avLst>
+              <a:gd name="adj" fmla="val 80645"/>
+            </a:avLst>
+          </a:prstGeom>
+          <a:solidFill>
+            <a:srgbClr val="1E2761"/>
+          </a:solidFill>
+          <a:ln/>
+        </p:spPr>
+      </p:sp>
+      <p:sp>
+        <p:nvSpPr>
+          <p:cNvPr id="3" name="Text 1"/>
+          <p:cNvSpPr/>
+          <p:nvPr/>
+        </p:nvSpPr>
+        <p:spPr>
+          <a:xfrm>
+            <a:off x="548640" y="457200"/>
+            <a:ext cx="566928" cy="566928"/>
+          </a:xfrm>
+          <a:prstGeom prst="rect">
+            <a:avLst/>
+          </a:prstGeom>
+          <a:noFill/>
+          <a:ln/>
+        </p:spPr>
+        <p:txBody>
+          <a:bodyPr wrap="square" lIns="0" tIns="0" rIns="0" bIns="0" rtlCol="0" anchor="ctr"/>
+          <a:lstStyle/>
+          <a:p>
+            <a:pPr marL="0" indent="0" algn="ctr">
+              <a:buNone/>
+            </a:pPr>
+            <a:r>
+              <a:rPr lang="en-US" sz="2000" b="1" dirty="0">
+                <a:solidFill>
+                  <a:srgbClr val="C9A24B"/>
+                </a:solidFill>
+                <a:latin typeface="Cambria" pitchFamily="34" charset="0"/>
+                <a:ea typeface="Cambria" pitchFamily="34" charset="-122"/>
+                <a:cs typeface="Cambria" pitchFamily="34" charset="-120"/>
+              </a:rPr>
+              <a:t>5</a:t>
+            </a:r>
+            <a:endParaRPr lang="en-US" sz="2000" dirty="0"/>
+          </a:p>
+        </p:txBody>
+      </p:sp>
+      <p:sp>
+        <p:nvSpPr>
+          <p:cNvPr id="4" name="Text 2"/>
+          <p:cNvSpPr/>
+          <p:nvPr/>
+        </p:nvSpPr>
+        <p:spPr>
+          <a:xfrm>
+            <a:off x="1298448" y="411480"/>
+            <a:ext cx="10314432" cy="731520"/>
+          </a:xfrm>
+          <a:prstGeom prst="rect">
+            <a:avLst/>
+          </a:prstGeom>
+          <a:noFill/>
+          <a:ln/>
+        </p:spPr>
+        <p:txBody>
+          <a:bodyPr wrap="square" lIns="0" tIns="0" rIns="0" bIns="0" rtlCol="0" anchor="ctr"/>
+          <a:lstStyle/>
+          <a:p>
+            <a:pPr marL="0" indent="0">
+              <a:buNone/>
+            </a:pPr>
+            <a:r>
+              <a:rPr lang="en-US" sz="2800" b="1" dirty="0">
+                <a:solidFill>
+                  <a:srgbClr val="1E2761"/>
+                </a:solidFill>
+                <a:latin typeface="Cambria" pitchFamily="34" charset="0"/>
+                <a:ea typeface="Cambria" pitchFamily="34" charset="-122"/>
+                <a:cs typeface="Cambria" pitchFamily="34" charset="-120"/>
+              </a:rPr>
+              <a:t>Job Title → Pay Level vs. Consistency</a:t>
+            </a:r>
+            <a:endParaRPr lang="en-US" sz="2800" dirty="0"/>
+          </a:p>
+        </p:txBody>
+      </p:sp>
+      <p:sp>
+        <p:nvSpPr>
+          <p:cNvPr id="5" name="Text 3"/>
+          <p:cNvSpPr/>
+          <p:nvPr/>
+        </p:nvSpPr>
+        <p:spPr>
+          <a:xfrm>
+            <a:off x="1298448" y="1042416"/>
+            <a:ext cx="10314432" cy="365760"/>
+          </a:xfrm>
+          <a:prstGeom prst="rect">
+            <a:avLst/>
+          </a:prstGeom>
+          <a:noFill/>
+          <a:ln/>
+        </p:spPr>
+        <p:txBody>
+          <a:bodyPr wrap="square" lIns="0" tIns="0" rIns="0" bIns="0" rtlCol="0" anchor="ctr"/>
+          <a:lstStyle/>
+          <a:p>
+            <a:pPr marL="0" indent="0">
+              <a:buNone/>
+            </a:pPr>
+            <a:r>
+              <a:rPr lang="en-US" sz="1300" i="1" dirty="0">
+                <a:solidFill>
+                  <a:srgbClr val="6B7280"/>
+                </a:solidFill>
+                <a:latin typeface="Calibri" pitchFamily="34" charset="0"/>
+                <a:ea typeface="Calibri" pitchFamily="34" charset="-122"/>
+                <a:cs typeface="Calibri" pitchFamily="34" charset="-120"/>
+              </a:rPr>
+              <a:t>Title indicates the ballpark, not the exact number.</a:t>
+            </a:r>
+            <a:endParaRPr lang="en-US" sz="1300" dirty="0"/>
+          </a:p>
+        </p:txBody>
+      </p:sp>
+      <p:sp>
+        <p:nvSpPr>
+          <p:cNvPr id="7" name="Text 4"/>
+          <p:cNvSpPr/>
+          <p:nvPr/>
+        </p:nvSpPr>
+        <p:spPr>
+          <a:xfrm>
+            <a:off x="7772400" y="1737360"/>
+            <a:ext cx="3886200" cy="274320"/>
+          </a:xfrm>
+          <a:prstGeom prst="rect">
+            <a:avLst/>
+          </a:prstGeom>
+          <a:noFill/>
+          <a:ln/>
+        </p:spPr>
+        <p:txBody>
+          <a:bodyPr wrap="square" lIns="0" tIns="0" rIns="0" bIns="0" rtlCol="0" anchor="ctr"/>
+          <a:lstStyle/>
+          <a:p>
+            <a:pPr marL="0" indent="0">
+              <a:buNone/>
+            </a:pPr>
+            <a:r>
+              <a:rPr lang="en-US" sz="1100" b="1" kern="0" spc="100" dirty="0">
+                <a:solidFill>
+                  <a:srgbClr val="C9A24B"/>
+                </a:solidFill>
+                <a:latin typeface="Calibri" pitchFamily="34" charset="0"/>
+                <a:ea typeface="Calibri" pitchFamily="34" charset="-122"/>
+                <a:cs typeface="Calibri" pitchFamily="34" charset="-120"/>
+              </a:rPr>
+              <a:t>HIGHEST MEDIAN PAY</a:t>
+            </a:r>
+            <a:endParaRPr lang="en-US" sz="1100" dirty="0"/>
+          </a:p>
+        </p:txBody>
+      </p:sp>
+      <p:sp>
+        <p:nvSpPr>
+          <p:cNvPr id="8" name="Text 5"/>
+          <p:cNvSpPr/>
+          <p:nvPr/>
+        </p:nvSpPr>
+        <p:spPr>
+          <a:xfrm>
+            <a:off x="7772400" y="2011680"/>
+            <a:ext cx="3886200" cy="777240"/>
+          </a:xfrm>
+          <a:prstGeom prst="rect">
+            <a:avLst/>
+          </a:prstGeom>
+          <a:noFill/>
+          <a:ln/>
+        </p:spPr>
+        <p:txBody>
+          <a:bodyPr wrap="square" lIns="0" tIns="0" rIns="0" bIns="0" rtlCol="0" anchor="ctr"/>
+          <a:lstStyle/>
+          <a:p>
+            <a:pPr marL="0" indent="0">
+              <a:lnSpc>
+                <a:spcPts val="1600"/>
+              </a:lnSpc>
+              <a:buNone/>
+            </a:pPr>
+            <a:r>
+              <a:rPr lang="en-US" sz="1250" dirty="0">
+                <a:solidFill>
+                  <a:srgbClr val="262A3F"/>
+                </a:solidFill>
+                <a:latin typeface="Calibri" pitchFamily="34" charset="0"/>
+                <a:ea typeface="Calibri" pitchFamily="34" charset="-122"/>
+                <a:cs typeface="Calibri" pitchFamily="34" charset="-120"/>
+              </a:rPr>
+              <a:t>VP/Senior Leadership ($152,000), Software Engineer ($135,600), Executive C-Suite ($135,000)</a:t>
+            </a:r>
+            <a:endParaRPr lang="en-US" sz="1250" dirty="0"/>
+          </a:p>
+        </p:txBody>
+      </p:sp>
+      <p:sp>
+        <p:nvSpPr>
+          <p:cNvPr id="9" name="Text 6"/>
+          <p:cNvSpPr/>
+          <p:nvPr/>
+        </p:nvSpPr>
+        <p:spPr>
+          <a:xfrm>
+            <a:off x="7772400" y="2926080"/>
+            <a:ext cx="3886200" cy="274320"/>
+          </a:xfrm>
+          <a:prstGeom prst="rect">
+            <a:avLst/>
+          </a:prstGeom>
+          <a:noFill/>
+          <a:ln/>
+        </p:spPr>
+        <p:txBody>
+          <a:bodyPr wrap="square" lIns="0" tIns="0" rIns="0" bIns="0" rtlCol="0" anchor="ctr"/>
+          <a:lstStyle/>
+          <a:p>
+            <a:pPr marL="0" indent="0">
+              <a:buNone/>
+            </a:pPr>
+            <a:r>
+              <a:rPr lang="en-US" sz="1100" b="1" kern="0" spc="100" dirty="0">
+                <a:solidFill>
+                  <a:srgbClr val="C9A24B"/>
+                </a:solidFill>
+                <a:latin typeface="Calibri" pitchFamily="34" charset="0"/>
+                <a:ea typeface="Calibri" pitchFamily="34" charset="-122"/>
+                <a:cs typeface="Calibri" pitchFamily="34" charset="-120"/>
+              </a:rPr>
+              <a:t>MOST CONSISTENT (NARROW SPREAD)</a:t>
+            </a:r>
+            <a:endParaRPr lang="en-US" sz="1100" dirty="0"/>
+          </a:p>
+        </p:txBody>
+      </p:sp>
+      <p:sp>
+        <p:nvSpPr>
+          <p:cNvPr id="10" name="Text 7"/>
+          <p:cNvSpPr/>
+          <p:nvPr/>
+        </p:nvSpPr>
+        <p:spPr>
+          <a:xfrm>
+            <a:off x="7772400" y="3200400"/>
+            <a:ext cx="3886200" cy="777240"/>
+          </a:xfrm>
+          <a:prstGeom prst="rect">
+            <a:avLst/>
+          </a:prstGeom>
+          <a:noFill/>
+          <a:ln/>
+        </p:spPr>
+        <p:txBody>
+          <a:bodyPr wrap="square" lIns="0" tIns="0" rIns="0" bIns="0" rtlCol="0" anchor="ctr"/>
+          <a:lstStyle/>
+          <a:p>
+            <a:pPr marL="0" indent="0">
+              <a:lnSpc>
+                <a:spcPts val="1600"/>
+              </a:lnSpc>
+              <a:buNone/>
+            </a:pPr>
+            <a:r>
+              <a:rPr lang="en-US" sz="1250" dirty="0">
+                <a:solidFill>
+                  <a:srgbClr val="262A3F"/>
+                </a:solidFill>
+                <a:latin typeface="Calibri" pitchFamily="34" charset="0"/>
+                <a:ea typeface="Calibri" pitchFamily="34" charset="-122"/>
+                <a:cs typeface="Calibri" pitchFamily="34" charset="-120"/>
+              </a:rPr>
+              <a:t>Administrative Assistant, Customer Service, Coordinator — lower pay, but tightly clustered.</a:t>
+            </a:r>
+            <a:endParaRPr lang="en-US" sz="1250" dirty="0"/>
+          </a:p>
+        </p:txBody>
+      </p:sp>
+      <p:sp>
+        <p:nvSpPr>
+          <p:cNvPr id="11" name="Text 8"/>
+          <p:cNvSpPr/>
+          <p:nvPr/>
+        </p:nvSpPr>
+        <p:spPr>
+          <a:xfrm>
+            <a:off x="7772400" y="4114800"/>
+            <a:ext cx="3886200" cy="274320"/>
+          </a:xfrm>
+          <a:prstGeom prst="rect">
+            <a:avLst/>
+          </a:prstGeom>
+          <a:noFill/>
+          <a:ln/>
+        </p:spPr>
+        <p:txBody>
+          <a:bodyPr wrap="square" lIns="0" tIns="0" rIns="0" bIns="0" rtlCol="0" anchor="ctr"/>
+          <a:lstStyle/>
+          <a:p>
+            <a:pPr marL="0" indent="0">
+              <a:buNone/>
+            </a:pPr>
+            <a:r>
+              <a:rPr lang="en-US" sz="1100" b="1" kern="0" spc="100" dirty="0">
+                <a:solidFill>
+                  <a:srgbClr val="C9A24B"/>
+                </a:solidFill>
+                <a:latin typeface="Calibri" pitchFamily="34" charset="0"/>
+                <a:ea typeface="Calibri" pitchFamily="34" charset="-122"/>
+                <a:cs typeface="Calibri" pitchFamily="34" charset="-120"/>
+              </a:rPr>
+              <a:t>LEAST CONSISTENT (WIDE SPREAD)</a:t>
+            </a:r>
+            <a:endParaRPr lang="en-US" sz="1100" dirty="0"/>
+          </a:p>
+        </p:txBody>
+      </p:sp>
+      <p:sp>
+        <p:nvSpPr>
+          <p:cNvPr id="12" name="Text 9"/>
+          <p:cNvSpPr/>
+          <p:nvPr/>
+        </p:nvSpPr>
+        <p:spPr>
+          <a:xfrm>
+            <a:off x="7772400" y="4389120"/>
+            <a:ext cx="3886200" cy="777240"/>
+          </a:xfrm>
+          <a:prstGeom prst="rect">
+            <a:avLst/>
+          </a:prstGeom>
+          <a:noFill/>
+          <a:ln/>
+        </p:spPr>
+        <p:txBody>
+          <a:bodyPr wrap="square" lIns="0" tIns="0" rIns="0" bIns="0" rtlCol="0" anchor="ctr"/>
+          <a:lstStyle/>
+          <a:p>
+            <a:pPr marL="0" indent="0">
+              <a:lnSpc>
+                <a:spcPts val="1600"/>
+              </a:lnSpc>
+              <a:buNone/>
+            </a:pPr>
+            <a:r>
+              <a:rPr lang="en-US" sz="1250" dirty="0">
+                <a:solidFill>
+                  <a:srgbClr val="262A3F"/>
+                </a:solidFill>
+                <a:latin typeface="Calibri" pitchFamily="34" charset="0"/>
+                <a:ea typeface="Calibri" pitchFamily="34" charset="-122"/>
+                <a:cs typeface="Calibri" pitchFamily="34" charset="-120"/>
+              </a:rPr>
+              <a:t>Executive (C-Suite), VP/Senior Leadership — high pay on average, but wide person-to-person variation.</a:t>
+            </a:r>
+            <a:endParaRPr lang="en-US" sz="1250" dirty="0"/>
+          </a:p>
+        </p:txBody>
+      </p:sp>
+      <p:sp>
+        <p:nvSpPr>
+          <p:cNvPr id="13" name="Shape 10"/>
+          <p:cNvSpPr/>
+          <p:nvPr/>
+        </p:nvSpPr>
+        <p:spPr>
+          <a:xfrm>
+            <a:off x="7772400" y="5349240"/>
+            <a:ext cx="3886200" cy="822960"/>
+          </a:xfrm>
+          <a:prstGeom prst="roundRect">
+            <a:avLst>
+              <a:gd name="adj" fmla="val 7778"/>
+            </a:avLst>
+          </a:prstGeom>
+          <a:solidFill>
+            <a:srgbClr val="1E2761"/>
+          </a:solidFill>
+          <a:ln/>
+        </p:spPr>
+      </p:sp>
+      <p:sp>
+        <p:nvSpPr>
+          <p:cNvPr id="14" name="Text 11"/>
+          <p:cNvSpPr/>
+          <p:nvPr/>
+        </p:nvSpPr>
+        <p:spPr>
+          <a:xfrm>
+            <a:off x="8001000" y="5477256"/>
+            <a:ext cx="3429000" cy="274320"/>
+          </a:xfrm>
+          <a:prstGeom prst="rect">
+            <a:avLst/>
+          </a:prstGeom>
+          <a:noFill/>
+          <a:ln/>
+        </p:spPr>
+        <p:txBody>
+          <a:bodyPr wrap="square" lIns="0" tIns="0" rIns="0" bIns="0" rtlCol="0" anchor="ctr"/>
+          <a:lstStyle/>
+          <a:p>
+            <a:pPr marL="0" indent="0">
+              <a:buNone/>
+            </a:pPr>
+            <a:r>
+              <a:rPr lang="en-US" sz="1050" b="1" kern="0" spc="120" dirty="0">
+                <a:solidFill>
+                  <a:srgbClr val="C9A24B"/>
+                </a:solidFill>
+                <a:latin typeface="Calibri" pitchFamily="34" charset="0"/>
+                <a:ea typeface="Calibri" pitchFamily="34" charset="-122"/>
+                <a:cs typeface="Calibri" pitchFamily="34" charset="-120"/>
+              </a:rPr>
+              <a:t>TAKEAWAY</a:t>
+            </a:r>
+            <a:endParaRPr lang="en-US" sz="1050" dirty="0"/>
+          </a:p>
+        </p:txBody>
+      </p:sp>
+      <p:sp>
+        <p:nvSpPr>
+          <p:cNvPr id="15" name="Text 12"/>
+          <p:cNvSpPr/>
+          <p:nvPr/>
+        </p:nvSpPr>
+        <p:spPr>
+          <a:xfrm>
+            <a:off x="8001000" y="5760720"/>
+            <a:ext cx="3429000" cy="320040"/>
+          </a:xfrm>
+          <a:prstGeom prst="rect">
+            <a:avLst/>
+          </a:prstGeom>
+          <a:noFill/>
+          <a:ln/>
+        </p:spPr>
+        <p:txBody>
+          <a:bodyPr wrap="square" lIns="0" tIns="0" rIns="0" bIns="0" rtlCol="0" anchor="ctr"/>
+          <a:lstStyle/>
+          <a:p>
+            <a:pPr marL="0" indent="0">
+              <a:lnSpc>
+                <a:spcPts val="1600"/>
+              </a:lnSpc>
+              <a:buNone/>
+            </a:pPr>
+            <a:r>
+              <a:rPr lang="en-US" sz="1250" dirty="0">
+                <a:solidFill>
+                  <a:srgbClr val="FFFFFF"/>
+                </a:solidFill>
+                <a:latin typeface="Calibri" pitchFamily="34" charset="0"/>
+                <a:ea typeface="Calibri" pitchFamily="34" charset="-122"/>
+                <a:cs typeface="Calibri" pitchFamily="34" charset="-120"/>
+              </a:rPr>
+              <a:t>Job title indicates the ballpark, not the exact number — especially at senior levels.</a:t>
+            </a:r>
+            <a:endParaRPr lang="en-US" sz="1250" dirty="0"/>
+          </a:p>
+        </p:txBody>
+      </p:sp>
+      <p:sp>
+        <p:nvSpPr>
+          <p:cNvPr id="16" name="Text 13"/>
+          <p:cNvSpPr/>
+          <p:nvPr/>
+        </p:nvSpPr>
+        <p:spPr>
+          <a:xfrm>
+            <a:off x="548640" y="6528816"/>
+            <a:ext cx="7315200" cy="274320"/>
+          </a:xfrm>
+          <a:prstGeom prst="rect">
+            <a:avLst/>
+          </a:prstGeom>
+          <a:noFill/>
+          <a:ln/>
+        </p:spPr>
+        <p:txBody>
+          <a:bodyPr wrap="square" lIns="0" tIns="0" rIns="0" bIns="0" rtlCol="0" anchor="ctr"/>
+          <a:lstStyle/>
+          <a:p>
+            <a:pPr marL="0" indent="0">
+              <a:buNone/>
+            </a:pPr>
+            <a:r>
+              <a:rPr lang="en-US" sz="900" dirty="0">
+                <a:solidFill>
+                  <a:srgbClr val="6B7280"/>
+                </a:solidFill>
+                <a:latin typeface="Calibri" pitchFamily="34" charset="0"/>
+                <a:ea typeface="Calibri" pitchFamily="34" charset="-122"/>
+                <a:cs typeface="Calibri" pitchFamily="34" charset="-120"/>
+              </a:rPr>
+              <a:t>2021 Salary Survey — Key Points</a:t>
+            </a:r>
+            <a:endParaRPr lang="en-US" sz="900" dirty="0"/>
+          </a:p>
+        </p:txBody>
+      </p:sp>
+      <p:sp>
+        <p:nvSpPr>
+          <p:cNvPr id="17" name="Text 14"/>
+          <p:cNvSpPr/>
+          <p:nvPr/>
+        </p:nvSpPr>
+        <p:spPr>
+          <a:xfrm>
+            <a:off x="11338560" y="6528816"/>
+            <a:ext cx="365760" cy="274320"/>
+          </a:xfrm>
+          <a:prstGeom prst="rect">
+            <a:avLst/>
+          </a:prstGeom>
+          <a:noFill/>
+          <a:ln/>
+        </p:spPr>
+        <p:txBody>
+          <a:bodyPr wrap="square" lIns="0" tIns="0" rIns="0" bIns="0" rtlCol="0" anchor="ctr"/>
+          <a:lstStyle/>
+          <a:p>
+            <a:pPr marL="0" indent="0" algn="r">
+              <a:buNone/>
+            </a:pPr>
+            <a:r>
+              <a:rPr lang="en-US" sz="900" dirty="0">
+                <a:solidFill>
+                  <a:srgbClr val="6B7280"/>
+                </a:solidFill>
+                <a:latin typeface="Calibri" pitchFamily="34" charset="0"/>
+                <a:ea typeface="Calibri" pitchFamily="34" charset="-122"/>
+                <a:cs typeface="Calibri" pitchFamily="34" charset="-120"/>
+              </a:rPr>
+              <a:t>8</a:t>
+            </a:r>
+            <a:endParaRPr lang="en-US" sz="900" dirty="0"/>
+          </a:p>
+        </p:txBody>
+      </p:sp>
+      <p:pic>
+        <p:nvPicPr>
+          <p:cNvPr id="18" name="Picture 17">
+            <a:extLst>
+              <a:ext uri="{FF2B5EF4-FFF2-40B4-BE49-F238E27FC236}">
+                <a16:creationId xmlns:a16="http://schemas.microsoft.com/office/drawing/2014/main" id="{78C67C93-4B76-FD07-3AE5-914E9D5F72E8}"/>
+              </a:ext>
+            </a:extLst>
+          </p:cNvPr>
+          <p:cNvPicPr>
+            <a:picLocks noChangeAspect="1"/>
+          </p:cNvPicPr>
+          <p:nvPr/>
+        </p:nvPicPr>
+        <p:blipFill>
+          <a:blip r:embed="rId3"/>
+          <a:stretch>
+            <a:fillRect/>
+          </a:stretch>
+        </p:blipFill>
+        <p:spPr>
+          <a:xfrm>
+            <a:off x="487680" y="1429882"/>
+            <a:ext cx="6708608" cy="5217806"/>
+          </a:xfrm>
+          <a:prstGeom prst="rect">
+            <a:avLst/>
+          </a:prstGeom>
+        </p:spPr>
+      </p:pic>
+    </p:spTree>
+  </p:cSld>
+  <p:clrMapOvr>
+    <a:masterClrMapping/>
+  </p:clrMapOvr>
+</p:sld>
+</file>
+
+<file path=ppt/slides/slide12.xml><?xml version="1.0" encoding="utf-8"?>
+<p:sld xmlns:a="http://schemas.openxmlformats.org/drawingml/2006/main" xmlns:r="http://schemas.openxmlformats.org/officeDocument/2006/relationships" xmlns:p="http://schemas.openxmlformats.org/presentationml/2006/main">
+  <p:cSld name="Slide 9">
+    <p:bg>
+      <p:bgPr>
+        <a:solidFill>
+          <a:srgbClr val="1E2761"/>
+        </a:solidFill>
+        <a:effectLst/>
+      </p:bgPr>
+    </p:bg>
+    <p:spTree>
+      <p:nvGrpSpPr>
+        <p:cNvPr id="1" name=""/>
+        <p:cNvGrpSpPr/>
+        <p:nvPr/>
+      </p:nvGrpSpPr>
+      <p:grpSpPr>
+        <a:xfrm>
+          <a:off x="0" y="0"/>
+          <a:ext cx="0" cy="0"/>
+          <a:chOff x="0" y="0"/>
+          <a:chExt cx="0" cy="0"/>
+        </a:xfrm>
+      </p:grpSpPr>
+      <p:sp>
+        <p:nvSpPr>
+          <p:cNvPr id="2" name="Text 0"/>
+          <p:cNvSpPr/>
+          <p:nvPr/>
+        </p:nvSpPr>
+        <p:spPr>
+          <a:xfrm>
+            <a:off x="548640" y="457200"/>
+            <a:ext cx="11064240" cy="731520"/>
+          </a:xfrm>
+          <a:prstGeom prst="rect">
+            <a:avLst/>
+          </a:prstGeom>
+          <a:noFill/>
+          <a:ln/>
+        </p:spPr>
+        <p:txBody>
+          <a:bodyPr wrap="square" lIns="0" tIns="0" rIns="0" bIns="0" rtlCol="0" anchor="ctr"/>
+          <a:lstStyle/>
+          <a:p>
+            <a:pPr marL="0" indent="0">
+              <a:buNone/>
+            </a:pPr>
+            <a:r>
+              <a:rPr lang="en-US" sz="3000" b="1" dirty="0">
+                <a:solidFill>
+                  <a:srgbClr val="FFFFFF"/>
+                </a:solidFill>
+                <a:latin typeface="Cambria" pitchFamily="34" charset="0"/>
+                <a:ea typeface="Cambria" pitchFamily="34" charset="-122"/>
+                <a:cs typeface="Cambria" pitchFamily="34" charset="-120"/>
+              </a:rPr>
+              <a:t>Summary of Findings</a:t>
+            </a:r>
+            <a:endParaRPr lang="en-US" sz="3000" dirty="0"/>
+          </a:p>
+        </p:txBody>
+      </p:sp>
+      <p:sp>
+        <p:nvSpPr>
+          <p:cNvPr id="3" name="Shape 1"/>
+          <p:cNvSpPr/>
+          <p:nvPr/>
+        </p:nvSpPr>
+        <p:spPr>
+          <a:xfrm>
+            <a:off x="548640" y="1600200"/>
+            <a:ext cx="11091672" cy="914400"/>
+          </a:xfrm>
+          <a:prstGeom prst="rect">
+            <a:avLst/>
+          </a:prstGeom>
+          <a:solidFill>
+            <a:srgbClr val="141B49"/>
+          </a:solidFill>
+          <a:ln/>
+        </p:spPr>
+      </p:sp>
+      <p:sp>
+        <p:nvSpPr>
+          <p:cNvPr id="4" name="Text 2"/>
+          <p:cNvSpPr/>
+          <p:nvPr/>
+        </p:nvSpPr>
+        <p:spPr>
+          <a:xfrm>
+            <a:off x="822960" y="1600200"/>
+            <a:ext cx="2377440" cy="914400"/>
+          </a:xfrm>
+          <a:prstGeom prst="rect">
+            <a:avLst/>
+          </a:prstGeom>
+          <a:noFill/>
+          <a:ln/>
+        </p:spPr>
+        <p:txBody>
+          <a:bodyPr wrap="square" lIns="0" tIns="0" rIns="0" bIns="0" rtlCol="0" anchor="ctr"/>
+          <a:lstStyle/>
+          <a:p>
+            <a:pPr marL="0" indent="0">
+              <a:buNone/>
+            </a:pPr>
+            <a:r>
+              <a:rPr lang="en-US" sz="1600" b="1" dirty="0">
+                <a:solidFill>
+                  <a:srgbClr val="C9A24B"/>
+                </a:solidFill>
+                <a:latin typeface="Cambria" pitchFamily="34" charset="0"/>
+                <a:ea typeface="Cambria" pitchFamily="34" charset="-122"/>
+                <a:cs typeface="Cambria" pitchFamily="34" charset="-120"/>
+              </a:rPr>
+              <a:t>Experience</a:t>
+            </a:r>
+            <a:endParaRPr lang="en-US" sz="1600" dirty="0"/>
+          </a:p>
+        </p:txBody>
+      </p:sp>
+      <p:sp>
+        <p:nvSpPr>
+          <p:cNvPr id="5" name="Text 3"/>
+          <p:cNvSpPr/>
+          <p:nvPr/>
+        </p:nvSpPr>
+        <p:spPr>
+          <a:xfrm>
+            <a:off x="3383280" y="1600200"/>
+            <a:ext cx="8001000" cy="914400"/>
+          </a:xfrm>
+          <a:prstGeom prst="rect">
+            <a:avLst/>
+          </a:prstGeom>
+          <a:noFill/>
+          <a:ln/>
+        </p:spPr>
+        <p:txBody>
+          <a:bodyPr wrap="square" lIns="0" tIns="0" rIns="0" bIns="0" rtlCol="0" anchor="ctr"/>
+          <a:lstStyle/>
+          <a:p>
+            <a:pPr marL="0" indent="0">
+              <a:lnSpc>
+                <a:spcPts val="1700"/>
+              </a:lnSpc>
+              <a:buNone/>
+            </a:pPr>
+            <a:r>
+              <a:rPr lang="en-US" sz="1400" dirty="0">
+                <a:solidFill>
+                  <a:srgbClr val="FFFFFF"/>
+                </a:solidFill>
+                <a:latin typeface="Calibri" pitchFamily="34" charset="0"/>
+                <a:ea typeface="Calibri" pitchFamily="34" charset="-122"/>
+                <a:cs typeface="Calibri" pitchFamily="34" charset="-120"/>
+              </a:rPr>
+              <a:t>Steady growth, plateaus after ~20 years.</a:t>
+            </a:r>
+            <a:endParaRPr lang="en-US" sz="1400" dirty="0"/>
+          </a:p>
+        </p:txBody>
+      </p:sp>
+      <p:sp>
+        <p:nvSpPr>
+          <p:cNvPr id="6" name="Shape 4"/>
+          <p:cNvSpPr/>
+          <p:nvPr/>
+        </p:nvSpPr>
+        <p:spPr>
+          <a:xfrm>
+            <a:off x="548640" y="2514600"/>
+            <a:ext cx="11091672" cy="914400"/>
+          </a:xfrm>
+          <a:prstGeom prst="rect">
+            <a:avLst/>
+          </a:prstGeom>
+          <a:solidFill>
+            <a:srgbClr val="1E2761"/>
+          </a:solidFill>
+          <a:ln/>
+        </p:spPr>
+      </p:sp>
+      <p:sp>
+        <p:nvSpPr>
+          <p:cNvPr id="7" name="Text 5"/>
+          <p:cNvSpPr/>
+          <p:nvPr/>
+        </p:nvSpPr>
+        <p:spPr>
+          <a:xfrm>
+            <a:off x="822960" y="2514600"/>
+            <a:ext cx="2377440" cy="914400"/>
+          </a:xfrm>
+          <a:prstGeom prst="rect">
+            <a:avLst/>
+          </a:prstGeom>
+          <a:noFill/>
+          <a:ln/>
+        </p:spPr>
+        <p:txBody>
+          <a:bodyPr wrap="square" lIns="0" tIns="0" rIns="0" bIns="0" rtlCol="0" anchor="ctr"/>
+          <a:lstStyle/>
+          <a:p>
+            <a:pPr marL="0" indent="0">
+              <a:buNone/>
+            </a:pPr>
+            <a:r>
+              <a:rPr lang="en-US" sz="1600" b="1" dirty="0">
+                <a:solidFill>
+                  <a:srgbClr val="C9A24B"/>
+                </a:solidFill>
+                <a:latin typeface="Cambria" pitchFamily="34" charset="0"/>
+                <a:ea typeface="Cambria" pitchFamily="34" charset="-122"/>
+                <a:cs typeface="Cambria" pitchFamily="34" charset="-120"/>
+              </a:rPr>
+              <a:t>Education</a:t>
+            </a:r>
+            <a:endParaRPr lang="en-US" sz="1600" dirty="0"/>
+          </a:p>
+        </p:txBody>
+      </p:sp>
+      <p:sp>
+        <p:nvSpPr>
+          <p:cNvPr id="8" name="Text 6"/>
+          <p:cNvSpPr/>
+          <p:nvPr/>
+        </p:nvSpPr>
+        <p:spPr>
+          <a:xfrm>
+            <a:off x="3383280" y="2514600"/>
+            <a:ext cx="8001000" cy="914400"/>
+          </a:xfrm>
+          <a:prstGeom prst="rect">
+            <a:avLst/>
+          </a:prstGeom>
+          <a:noFill/>
+          <a:ln/>
+        </p:spPr>
+        <p:txBody>
+          <a:bodyPr wrap="square" lIns="0" tIns="0" rIns="0" bIns="0" rtlCol="0" anchor="ctr"/>
+          <a:lstStyle/>
+          <a:p>
+            <a:pPr marL="0" indent="0">
+              <a:lnSpc>
+                <a:spcPts val="1700"/>
+              </a:lnSpc>
+              <a:buNone/>
+            </a:pPr>
+            <a:r>
+              <a:rPr lang="en-US" sz="1400" dirty="0">
+                <a:solidFill>
+                  <a:srgbClr val="FFFFFF"/>
+                </a:solidFill>
+                <a:latin typeface="Calibri" pitchFamily="34" charset="0"/>
+                <a:ea typeface="Calibri" pitchFamily="34" charset="-122"/>
+                <a:cs typeface="Calibri" pitchFamily="34" charset="-120"/>
+              </a:rPr>
+              <a:t>Master's/PhD pays more, but overlap between levels is significant.</a:t>
+            </a:r>
+            <a:endParaRPr lang="en-US" sz="1400" dirty="0"/>
+          </a:p>
+        </p:txBody>
+      </p:sp>
+      <p:sp>
+        <p:nvSpPr>
+          <p:cNvPr id="9" name="Shape 7"/>
+          <p:cNvSpPr/>
+          <p:nvPr/>
+        </p:nvSpPr>
+        <p:spPr>
+          <a:xfrm>
+            <a:off x="548640" y="3429000"/>
+            <a:ext cx="11091672" cy="914400"/>
+          </a:xfrm>
+          <a:prstGeom prst="rect">
+            <a:avLst/>
+          </a:prstGeom>
+          <a:solidFill>
+            <a:srgbClr val="141B49"/>
+          </a:solidFill>
+          <a:ln/>
+        </p:spPr>
+      </p:sp>
+      <p:sp>
+        <p:nvSpPr>
+          <p:cNvPr id="10" name="Text 8"/>
+          <p:cNvSpPr/>
+          <p:nvPr/>
+        </p:nvSpPr>
+        <p:spPr>
+          <a:xfrm>
+            <a:off x="822960" y="3429000"/>
+            <a:ext cx="2377440" cy="914400"/>
+          </a:xfrm>
+          <a:prstGeom prst="rect">
+            <a:avLst/>
+          </a:prstGeom>
+          <a:noFill/>
+          <a:ln/>
+        </p:spPr>
+        <p:txBody>
+          <a:bodyPr wrap="square" lIns="0" tIns="0" rIns="0" bIns="0" rtlCol="0" anchor="ctr"/>
+          <a:lstStyle/>
+          <a:p>
+            <a:pPr marL="0" indent="0">
+              <a:buNone/>
+            </a:pPr>
+            <a:r>
+              <a:rPr lang="en-US" sz="1600" b="1" dirty="0">
+                <a:solidFill>
+                  <a:srgbClr val="C9A24B"/>
+                </a:solidFill>
+                <a:latin typeface="Cambria" pitchFamily="34" charset="0"/>
+                <a:ea typeface="Cambria" pitchFamily="34" charset="-122"/>
+                <a:cs typeface="Cambria" pitchFamily="34" charset="-120"/>
+              </a:rPr>
+              <a:t>Industry</a:t>
+            </a:r>
+            <a:endParaRPr lang="en-US" sz="1600" dirty="0"/>
+          </a:p>
+        </p:txBody>
+      </p:sp>
+      <p:sp>
+        <p:nvSpPr>
+          <p:cNvPr id="11" name="Text 9"/>
+          <p:cNvSpPr/>
+          <p:nvPr/>
+        </p:nvSpPr>
+        <p:spPr>
+          <a:xfrm>
+            <a:off x="3383280" y="3429000"/>
+            <a:ext cx="8001000" cy="914400"/>
+          </a:xfrm>
+          <a:prstGeom prst="rect">
+            <a:avLst/>
+          </a:prstGeom>
+          <a:noFill/>
+          <a:ln/>
+        </p:spPr>
+        <p:txBody>
+          <a:bodyPr wrap="square" lIns="0" tIns="0" rIns="0" bIns="0" rtlCol="0" anchor="ctr"/>
+          <a:lstStyle/>
+          <a:p>
+            <a:pPr marL="0" indent="0">
+              <a:lnSpc>
+                <a:spcPts val="1700"/>
+              </a:lnSpc>
+              <a:buNone/>
+            </a:pPr>
+            <a:r>
+              <a:rPr lang="en-US" sz="1400" dirty="0">
+                <a:solidFill>
+                  <a:srgbClr val="FFFFFF"/>
+                </a:solidFill>
+                <a:latin typeface="Calibri" pitchFamily="34" charset="0"/>
+                <a:ea typeface="Calibri" pitchFamily="34" charset="-122"/>
+                <a:cs typeface="Calibri" pitchFamily="34" charset="-120"/>
+              </a:rPr>
+              <a:t>Clear pay gap — IT tops the list, Retail/Sales is lowest.</a:t>
+            </a:r>
+            <a:endParaRPr lang="en-US" sz="1400" dirty="0"/>
+          </a:p>
+        </p:txBody>
+      </p:sp>
+      <p:sp>
+        <p:nvSpPr>
+          <p:cNvPr id="12" name="Shape 10"/>
+          <p:cNvSpPr/>
+          <p:nvPr/>
+        </p:nvSpPr>
+        <p:spPr>
+          <a:xfrm>
+            <a:off x="548640" y="4343400"/>
+            <a:ext cx="11091672" cy="914400"/>
+          </a:xfrm>
+          <a:prstGeom prst="rect">
+            <a:avLst/>
+          </a:prstGeom>
+          <a:solidFill>
+            <a:srgbClr val="1E2761"/>
+          </a:solidFill>
+          <a:ln/>
+        </p:spPr>
+      </p:sp>
+      <p:sp>
+        <p:nvSpPr>
+          <p:cNvPr id="13" name="Text 11"/>
+          <p:cNvSpPr/>
+          <p:nvPr/>
+        </p:nvSpPr>
+        <p:spPr>
+          <a:xfrm>
+            <a:off x="822960" y="4343400"/>
+            <a:ext cx="2377440" cy="914400"/>
+          </a:xfrm>
+          <a:prstGeom prst="rect">
+            <a:avLst/>
+          </a:prstGeom>
+          <a:noFill/>
+          <a:ln/>
+        </p:spPr>
+        <p:txBody>
+          <a:bodyPr wrap="square" lIns="0" tIns="0" rIns="0" bIns="0" rtlCol="0" anchor="ctr"/>
+          <a:lstStyle/>
+          <a:p>
+            <a:pPr marL="0" indent="0">
+              <a:buNone/>
+            </a:pPr>
+            <a:r>
+              <a:rPr lang="en-US" sz="1600" b="1" dirty="0">
+                <a:solidFill>
+                  <a:srgbClr val="C9A24B"/>
+                </a:solidFill>
+                <a:latin typeface="Cambria" pitchFamily="34" charset="0"/>
+                <a:ea typeface="Cambria" pitchFamily="34" charset="-122"/>
+                <a:cs typeface="Cambria" pitchFamily="34" charset="-120"/>
+              </a:rPr>
+              <a:t>Location</a:t>
+            </a:r>
+            <a:endParaRPr lang="en-US" sz="1600" dirty="0"/>
+          </a:p>
+        </p:txBody>
+      </p:sp>
+      <p:sp>
+        <p:nvSpPr>
+          <p:cNvPr id="14" name="Text 12"/>
+          <p:cNvSpPr/>
+          <p:nvPr/>
+        </p:nvSpPr>
+        <p:spPr>
+          <a:xfrm>
+            <a:off x="3383280" y="4343400"/>
+            <a:ext cx="8001000" cy="914400"/>
+          </a:xfrm>
+          <a:prstGeom prst="rect">
+            <a:avLst/>
+          </a:prstGeom>
+          <a:noFill/>
+          <a:ln/>
+        </p:spPr>
+        <p:txBody>
+          <a:bodyPr wrap="square" lIns="0" tIns="0" rIns="0" bIns="0" rtlCol="0" anchor="ctr"/>
+          <a:lstStyle/>
+          <a:p>
+            <a:pPr marL="0" indent="0">
+              <a:lnSpc>
+                <a:spcPts val="1700"/>
+              </a:lnSpc>
+              <a:buNone/>
+            </a:pPr>
+            <a:r>
+              <a:rPr lang="en-US" sz="1400" dirty="0">
+                <a:solidFill>
+                  <a:srgbClr val="FFFFFF"/>
+                </a:solidFill>
+                <a:latin typeface="Calibri" pitchFamily="34" charset="0"/>
+                <a:ea typeface="Calibri" pitchFamily="34" charset="-122"/>
+                <a:cs typeface="Calibri" pitchFamily="34" charset="-120"/>
+              </a:rPr>
+              <a:t>Pay differs by country, but data is US-dominated and not cost-of-living adjusted.</a:t>
+            </a:r>
+            <a:endParaRPr lang="en-US" sz="1400" dirty="0"/>
+          </a:p>
+        </p:txBody>
+      </p:sp>
+      <p:sp>
+        <p:nvSpPr>
+          <p:cNvPr id="15" name="Shape 13"/>
+          <p:cNvSpPr/>
+          <p:nvPr/>
+        </p:nvSpPr>
+        <p:spPr>
+          <a:xfrm>
+            <a:off x="548640" y="5257800"/>
+            <a:ext cx="11091672" cy="914400"/>
+          </a:xfrm>
+          <a:prstGeom prst="rect">
+            <a:avLst/>
+          </a:prstGeom>
+          <a:solidFill>
+            <a:srgbClr val="141B49"/>
+          </a:solidFill>
+          <a:ln/>
+        </p:spPr>
+      </p:sp>
+      <p:sp>
+        <p:nvSpPr>
+          <p:cNvPr id="16" name="Text 14"/>
+          <p:cNvSpPr/>
+          <p:nvPr/>
+        </p:nvSpPr>
+        <p:spPr>
+          <a:xfrm>
+            <a:off x="822960" y="5257800"/>
+            <a:ext cx="2377440" cy="914400"/>
+          </a:xfrm>
+          <a:prstGeom prst="rect">
+            <a:avLst/>
+          </a:prstGeom>
+          <a:noFill/>
+          <a:ln/>
+        </p:spPr>
+        <p:txBody>
+          <a:bodyPr wrap="square" lIns="0" tIns="0" rIns="0" bIns="0" rtlCol="0" anchor="ctr"/>
+          <a:lstStyle/>
+          <a:p>
+            <a:pPr marL="0" indent="0">
+              <a:buNone/>
+            </a:pPr>
+            <a:r>
+              <a:rPr lang="en-US" sz="1600" b="1" dirty="0">
+                <a:solidFill>
+                  <a:srgbClr val="C9A24B"/>
+                </a:solidFill>
+                <a:latin typeface="Cambria" pitchFamily="34" charset="0"/>
+                <a:ea typeface="Cambria" pitchFamily="34" charset="-122"/>
+                <a:cs typeface="Cambria" pitchFamily="34" charset="-120"/>
+              </a:rPr>
+              <a:t>Job Title</a:t>
+            </a:r>
+            <a:endParaRPr lang="en-US" sz="1600" dirty="0"/>
+          </a:p>
+        </p:txBody>
+      </p:sp>
+      <p:sp>
+        <p:nvSpPr>
+          <p:cNvPr id="17" name="Text 15"/>
+          <p:cNvSpPr/>
+          <p:nvPr/>
+        </p:nvSpPr>
+        <p:spPr>
+          <a:xfrm>
+            <a:off x="3383280" y="5257800"/>
+            <a:ext cx="8001000" cy="914400"/>
+          </a:xfrm>
+          <a:prstGeom prst="rect">
+            <a:avLst/>
+          </a:prstGeom>
+          <a:noFill/>
+          <a:ln/>
+        </p:spPr>
+        <p:txBody>
+          <a:bodyPr wrap="square" lIns="0" tIns="0" rIns="0" bIns="0" rtlCol="0" anchor="ctr"/>
+          <a:lstStyle/>
+          <a:p>
+            <a:pPr marL="0" indent="0">
+              <a:lnSpc>
+                <a:spcPts val="1700"/>
+              </a:lnSpc>
+              <a:buNone/>
+            </a:pPr>
+            <a:r>
+              <a:rPr lang="en-US" sz="1400" dirty="0">
+                <a:solidFill>
+                  <a:srgbClr val="FFFFFF"/>
+                </a:solidFill>
+                <a:latin typeface="Calibri" pitchFamily="34" charset="0"/>
+                <a:ea typeface="Calibri" pitchFamily="34" charset="-122"/>
+                <a:cs typeface="Calibri" pitchFamily="34" charset="-120"/>
+              </a:rPr>
+              <a:t>Predicts pay level but not consistency — some titles vary widely.</a:t>
+            </a:r>
+            <a:endParaRPr lang="en-US" sz="1400" dirty="0"/>
+          </a:p>
+        </p:txBody>
+      </p:sp>
+      <p:sp>
+        <p:nvSpPr>
+          <p:cNvPr id="18" name="Text 16"/>
+          <p:cNvSpPr/>
+          <p:nvPr/>
+        </p:nvSpPr>
+        <p:spPr>
+          <a:xfrm>
+            <a:off x="548640" y="6528816"/>
+            <a:ext cx="7315200" cy="274320"/>
+          </a:xfrm>
+          <a:prstGeom prst="rect">
+            <a:avLst/>
+          </a:prstGeom>
+          <a:noFill/>
+          <a:ln/>
+        </p:spPr>
+        <p:txBody>
+          <a:bodyPr wrap="square" lIns="0" tIns="0" rIns="0" bIns="0" rtlCol="0" anchor="ctr"/>
+          <a:lstStyle/>
+          <a:p>
+            <a:pPr marL="0" indent="0">
+              <a:buNone/>
+            </a:pPr>
+            <a:r>
+              <a:rPr lang="en-US" sz="900" dirty="0">
+                <a:solidFill>
+                  <a:srgbClr val="8891B8"/>
+                </a:solidFill>
+                <a:latin typeface="Calibri" pitchFamily="34" charset="0"/>
+                <a:ea typeface="Calibri" pitchFamily="34" charset="-122"/>
+                <a:cs typeface="Calibri" pitchFamily="34" charset="-120"/>
+              </a:rPr>
+              <a:t>2021 Salary Survey — Key Points</a:t>
+            </a:r>
+            <a:endParaRPr lang="en-US" sz="900" dirty="0"/>
+          </a:p>
+        </p:txBody>
+      </p:sp>
+      <p:sp>
+        <p:nvSpPr>
+          <p:cNvPr id="19" name="Text 17"/>
+          <p:cNvSpPr/>
+          <p:nvPr/>
+        </p:nvSpPr>
+        <p:spPr>
+          <a:xfrm>
+            <a:off x="11338560" y="6528816"/>
+            <a:ext cx="365760" cy="274320"/>
+          </a:xfrm>
+          <a:prstGeom prst="rect">
+            <a:avLst/>
+          </a:prstGeom>
+          <a:noFill/>
+          <a:ln/>
+        </p:spPr>
+        <p:txBody>
+          <a:bodyPr wrap="square" lIns="0" tIns="0" rIns="0" bIns="0" rtlCol="0" anchor="ctr"/>
+          <a:lstStyle/>
+          <a:p>
+            <a:pPr marL="0" indent="0" algn="r">
+              <a:buNone/>
+            </a:pPr>
+            <a:r>
+              <a:rPr lang="en-US" sz="900" dirty="0">
+                <a:solidFill>
+                  <a:srgbClr val="8891B8"/>
+                </a:solidFill>
+                <a:latin typeface="Calibri" pitchFamily="34" charset="0"/>
+                <a:ea typeface="Calibri" pitchFamily="34" charset="-122"/>
+                <a:cs typeface="Calibri" pitchFamily="34" charset="-120"/>
+              </a:rPr>
+              <a:t>9</a:t>
+            </a:r>
+            <a:endParaRPr lang="en-US" sz="900" dirty="0"/>
+          </a:p>
+        </p:txBody>
+      </p:sp>
+    </p:spTree>
+  </p:cSld>
+  <p:clrMapOvr>
+    <a:masterClrMapping/>
+  </p:clrMapOvr>
+</p:sld>
+</file>
+
+<file path=ppt/slides/slide13.xml><?xml version="1.0" encoding="utf-8"?>
+<p:sld xmlns:a="http://schemas.openxmlformats.org/drawingml/2006/main" xmlns:r="http://schemas.openxmlformats.org/officeDocument/2006/relationships" xmlns:p="http://schemas.openxmlformats.org/presentationml/2006/main">
+  <p:cSld name="Slide 10">
+    <p:bg>
+      <p:bgPr>
+        <a:solidFill>
+          <a:srgbClr val="FFFFFF"/>
+        </a:solidFill>
+        <a:effectLst/>
+      </p:bgPr>
+    </p:bg>
+    <p:spTree>
+      <p:nvGrpSpPr>
+        <p:cNvPr id="1" name=""/>
+        <p:cNvGrpSpPr/>
+        <p:nvPr/>
+      </p:nvGrpSpPr>
+      <p:grpSpPr>
+        <a:xfrm>
+          <a:off x="0" y="0"/>
+          <a:ext cx="0" cy="0"/>
+          <a:chOff x="0" y="0"/>
+          <a:chExt cx="0" cy="0"/>
+        </a:xfrm>
+      </p:grpSpPr>
+      <p:sp>
+        <p:nvSpPr>
+          <p:cNvPr id="2" name="Text 0"/>
+          <p:cNvSpPr/>
+          <p:nvPr/>
+        </p:nvSpPr>
+        <p:spPr>
+          <a:xfrm>
+            <a:off x="548640" y="457200"/>
+            <a:ext cx="11064240" cy="731520"/>
+          </a:xfrm>
+          <a:prstGeom prst="rect">
+            <a:avLst/>
+          </a:prstGeom>
+          <a:noFill/>
+          <a:ln/>
+        </p:spPr>
+        <p:txBody>
+          <a:bodyPr wrap="square" lIns="0" tIns="0" rIns="0" bIns="0" rtlCol="0" anchor="ctr"/>
+          <a:lstStyle/>
+          <a:p>
+            <a:pPr marL="0" indent="0">
+              <a:buNone/>
+            </a:pPr>
+            <a:r>
+              <a:rPr lang="en-US" sz="3000" b="1" dirty="0">
+                <a:solidFill>
+                  <a:srgbClr val="1E2761"/>
+                </a:solidFill>
+                <a:latin typeface="Cambria" pitchFamily="34" charset="0"/>
+                <a:ea typeface="Cambria" pitchFamily="34" charset="-122"/>
+                <a:cs typeface="Cambria" pitchFamily="34" charset="-120"/>
+              </a:rPr>
+              <a:t>Limitations to Mention</a:t>
+            </a:r>
+            <a:endParaRPr lang="en-US" sz="3000" dirty="0"/>
+          </a:p>
+        </p:txBody>
+      </p:sp>
+      <p:sp>
+        <p:nvSpPr>
+          <p:cNvPr id="3" name="Shape 1"/>
+          <p:cNvSpPr/>
+          <p:nvPr/>
+        </p:nvSpPr>
+        <p:spPr>
+          <a:xfrm>
+            <a:off x="548640" y="1737360"/>
+            <a:ext cx="11091672" cy="960120"/>
+          </a:xfrm>
+          <a:prstGeom prst="roundRect">
+            <a:avLst>
+              <a:gd name="adj" fmla="val 6667"/>
+            </a:avLst>
+          </a:prstGeom>
+          <a:solidFill>
+            <a:srgbClr val="F4F6FB"/>
+          </a:solidFill>
+          <a:ln w="12700">
+            <a:solidFill>
+              <a:srgbClr val="D8DEEC"/>
+            </a:solidFill>
+            <a:prstDash val="solid"/>
+          </a:ln>
+        </p:spPr>
+      </p:sp>
+      <p:sp>
+        <p:nvSpPr>
+          <p:cNvPr id="4" name="Shape 2"/>
+          <p:cNvSpPr/>
+          <p:nvPr/>
+        </p:nvSpPr>
+        <p:spPr>
+          <a:xfrm>
+            <a:off x="822960" y="1993392"/>
+            <a:ext cx="457200" cy="457200"/>
+          </a:xfrm>
+          <a:prstGeom prst="ellipse">
+            <a:avLst/>
+          </a:prstGeom>
+          <a:solidFill>
+            <a:srgbClr val="1E2761"/>
+          </a:solidFill>
+          <a:ln/>
+        </p:spPr>
+      </p:sp>
+      <p:sp>
+        <p:nvSpPr>
+          <p:cNvPr id="5" name="Text 3"/>
+          <p:cNvSpPr/>
+          <p:nvPr/>
+        </p:nvSpPr>
+        <p:spPr>
+          <a:xfrm>
+            <a:off x="822960" y="1993392"/>
+            <a:ext cx="457200" cy="457200"/>
+          </a:xfrm>
+          <a:prstGeom prst="rect">
+            <a:avLst/>
+          </a:prstGeom>
+          <a:noFill/>
+          <a:ln/>
+        </p:spPr>
+        <p:txBody>
+          <a:bodyPr wrap="square" lIns="0" tIns="0" rIns="0" bIns="0" rtlCol="0" anchor="ctr"/>
+          <a:lstStyle/>
+          <a:p>
+            <a:pPr marL="0" indent="0" algn="ctr">
+              <a:buNone/>
+            </a:pPr>
+            <a:r>
+              <a:rPr lang="en-US" sz="1800" b="1" dirty="0">
+                <a:solidFill>
+                  <a:srgbClr val="C9A24B"/>
+                </a:solidFill>
+                <a:latin typeface="Cambria" pitchFamily="34" charset="0"/>
+                <a:ea typeface="Cambria" pitchFamily="34" charset="-122"/>
+                <a:cs typeface="Cambria" pitchFamily="34" charset="-120"/>
+              </a:rPr>
+              <a:t>!</a:t>
+            </a:r>
+            <a:endParaRPr lang="en-US" sz="1800" dirty="0"/>
+          </a:p>
+        </p:txBody>
+      </p:sp>
+      <p:sp>
+        <p:nvSpPr>
+          <p:cNvPr id="6" name="Text 4"/>
+          <p:cNvSpPr/>
+          <p:nvPr/>
+        </p:nvSpPr>
+        <p:spPr>
+          <a:xfrm>
+            <a:off x="1508760" y="1737360"/>
+            <a:ext cx="9875520" cy="960120"/>
+          </a:xfrm>
+          <a:prstGeom prst="rect">
+            <a:avLst/>
+          </a:prstGeom>
+          <a:noFill/>
+          <a:ln/>
+        </p:spPr>
+        <p:txBody>
+          <a:bodyPr wrap="square" lIns="0" tIns="0" rIns="0" bIns="0" rtlCol="0" anchor="ctr"/>
+          <a:lstStyle/>
+          <a:p>
+            <a:pPr marL="0" indent="0">
+              <a:lnSpc>
+                <a:spcPts val="1800"/>
+              </a:lnSpc>
+              <a:buNone/>
+            </a:pPr>
+            <a:r>
+              <a:rPr lang="en-US" sz="1450" dirty="0">
+                <a:solidFill>
+                  <a:srgbClr val="262A3F"/>
+                </a:solidFill>
+                <a:latin typeface="Calibri" pitchFamily="34" charset="0"/>
+                <a:ea typeface="Calibri" pitchFamily="34" charset="-122"/>
+                <a:cs typeface="Calibri" pitchFamily="34" charset="-120"/>
+              </a:rPr>
+              <a:t>Self-reported survey data — no way to verify accuracy.</a:t>
+            </a:r>
+            <a:endParaRPr lang="en-US" sz="1450" dirty="0"/>
+          </a:p>
+        </p:txBody>
+      </p:sp>
+      <p:sp>
+        <p:nvSpPr>
+          <p:cNvPr id="7" name="Shape 5"/>
+          <p:cNvSpPr/>
+          <p:nvPr/>
+        </p:nvSpPr>
+        <p:spPr>
+          <a:xfrm>
+            <a:off x="548640" y="2880360"/>
+            <a:ext cx="11091672" cy="960120"/>
+          </a:xfrm>
+          <a:prstGeom prst="roundRect">
+            <a:avLst>
+              <a:gd name="adj" fmla="val 6667"/>
+            </a:avLst>
+          </a:prstGeom>
+          <a:solidFill>
+            <a:srgbClr val="F4F6FB"/>
+          </a:solidFill>
+          <a:ln w="12700">
+            <a:solidFill>
+              <a:srgbClr val="D8DEEC"/>
+            </a:solidFill>
+            <a:prstDash val="solid"/>
+          </a:ln>
+        </p:spPr>
+      </p:sp>
+      <p:sp>
+        <p:nvSpPr>
+          <p:cNvPr id="8" name="Shape 6"/>
+          <p:cNvSpPr/>
+          <p:nvPr/>
+        </p:nvSpPr>
+        <p:spPr>
+          <a:xfrm>
+            <a:off x="822960" y="3136392"/>
+            <a:ext cx="457200" cy="457200"/>
+          </a:xfrm>
+          <a:prstGeom prst="ellipse">
+            <a:avLst/>
+          </a:prstGeom>
+          <a:solidFill>
+            <a:srgbClr val="1E2761"/>
+          </a:solidFill>
+          <a:ln/>
+        </p:spPr>
+      </p:sp>
+      <p:sp>
+        <p:nvSpPr>
+          <p:cNvPr id="9" name="Text 7"/>
+          <p:cNvSpPr/>
+          <p:nvPr/>
+        </p:nvSpPr>
+        <p:spPr>
+          <a:xfrm>
+            <a:off x="822960" y="3136392"/>
+            <a:ext cx="457200" cy="457200"/>
+          </a:xfrm>
+          <a:prstGeom prst="rect">
+            <a:avLst/>
+          </a:prstGeom>
+          <a:noFill/>
+          <a:ln/>
+        </p:spPr>
+        <p:txBody>
+          <a:bodyPr wrap="square" lIns="0" tIns="0" rIns="0" bIns="0" rtlCol="0" anchor="ctr"/>
+          <a:lstStyle/>
+          <a:p>
+            <a:pPr marL="0" indent="0" algn="ctr">
+              <a:buNone/>
+            </a:pPr>
+            <a:r>
+              <a:rPr lang="en-US" sz="1800" b="1" dirty="0">
+                <a:solidFill>
+                  <a:srgbClr val="C9A24B"/>
+                </a:solidFill>
+                <a:latin typeface="Cambria" pitchFamily="34" charset="0"/>
+                <a:ea typeface="Cambria" pitchFamily="34" charset="-122"/>
+                <a:cs typeface="Cambria" pitchFamily="34" charset="-120"/>
+              </a:rPr>
+              <a:t>!</a:t>
+            </a:r>
+            <a:endParaRPr lang="en-US" sz="1800" dirty="0"/>
+          </a:p>
+        </p:txBody>
+      </p:sp>
+      <p:sp>
+        <p:nvSpPr>
+          <p:cNvPr id="10" name="Text 8"/>
+          <p:cNvSpPr/>
+          <p:nvPr/>
+        </p:nvSpPr>
+        <p:spPr>
+          <a:xfrm>
+            <a:off x="1508760" y="2880360"/>
+            <a:ext cx="9875520" cy="960120"/>
+          </a:xfrm>
+          <a:prstGeom prst="rect">
+            <a:avLst/>
+          </a:prstGeom>
+          <a:noFill/>
+          <a:ln/>
+        </p:spPr>
+        <p:txBody>
+          <a:bodyPr wrap="square" lIns="0" tIns="0" rIns="0" bIns="0" rtlCol="0" anchor="ctr"/>
+          <a:lstStyle/>
+          <a:p>
+            <a:pPr marL="0" indent="0">
+              <a:lnSpc>
+                <a:spcPts val="1800"/>
+              </a:lnSpc>
+              <a:buNone/>
+            </a:pPr>
+            <a:r>
+              <a:rPr lang="en-US" sz="1450" dirty="0">
+                <a:solidFill>
+                  <a:srgbClr val="262A3F"/>
+                </a:solidFill>
+                <a:latin typeface="Calibri" pitchFamily="34" charset="0"/>
+                <a:ea typeface="Calibri" pitchFamily="34" charset="-122"/>
+                <a:cs typeface="Calibri" pitchFamily="34" charset="-120"/>
+              </a:rPr>
+              <a:t>Heavily US-skewed sample (~83% of responses).</a:t>
+            </a:r>
+            <a:endParaRPr lang="en-US" sz="1450" dirty="0"/>
+          </a:p>
+        </p:txBody>
+      </p:sp>
+      <p:sp>
+        <p:nvSpPr>
+          <p:cNvPr id="11" name="Shape 9"/>
+          <p:cNvSpPr/>
+          <p:nvPr/>
+        </p:nvSpPr>
+        <p:spPr>
+          <a:xfrm>
+            <a:off x="548640" y="4023360"/>
+            <a:ext cx="11091672" cy="960120"/>
+          </a:xfrm>
+          <a:prstGeom prst="roundRect">
+            <a:avLst>
+              <a:gd name="adj" fmla="val 6667"/>
+            </a:avLst>
+          </a:prstGeom>
+          <a:solidFill>
+            <a:srgbClr val="F4F6FB"/>
+          </a:solidFill>
+          <a:ln w="12700">
+            <a:solidFill>
+              <a:srgbClr val="D8DEEC"/>
+            </a:solidFill>
+            <a:prstDash val="solid"/>
+          </a:ln>
+        </p:spPr>
+      </p:sp>
+      <p:sp>
+        <p:nvSpPr>
+          <p:cNvPr id="12" name="Shape 10"/>
+          <p:cNvSpPr/>
+          <p:nvPr/>
+        </p:nvSpPr>
+        <p:spPr>
+          <a:xfrm>
+            <a:off x="822960" y="4279392"/>
+            <a:ext cx="457200" cy="457200"/>
+          </a:xfrm>
+          <a:prstGeom prst="ellipse">
+            <a:avLst/>
+          </a:prstGeom>
+          <a:solidFill>
+            <a:srgbClr val="1E2761"/>
+          </a:solidFill>
+          <a:ln/>
+        </p:spPr>
+      </p:sp>
+      <p:sp>
+        <p:nvSpPr>
+          <p:cNvPr id="13" name="Text 11"/>
+          <p:cNvSpPr/>
+          <p:nvPr/>
+        </p:nvSpPr>
+        <p:spPr>
+          <a:xfrm>
+            <a:off x="822960" y="4279392"/>
+            <a:ext cx="457200" cy="457200"/>
+          </a:xfrm>
+          <a:prstGeom prst="rect">
+            <a:avLst/>
+          </a:prstGeom>
+          <a:noFill/>
+          <a:ln/>
+        </p:spPr>
+        <p:txBody>
+          <a:bodyPr wrap="square" lIns="0" tIns="0" rIns="0" bIns="0" rtlCol="0" anchor="ctr"/>
+          <a:lstStyle/>
+          <a:p>
+            <a:pPr marL="0" indent="0" algn="ctr">
+              <a:buNone/>
+            </a:pPr>
+            <a:r>
+              <a:rPr lang="en-US" sz="1800" b="1" dirty="0">
+                <a:solidFill>
+                  <a:srgbClr val="C9A24B"/>
+                </a:solidFill>
+                <a:latin typeface="Cambria" pitchFamily="34" charset="0"/>
+                <a:ea typeface="Cambria" pitchFamily="34" charset="-122"/>
+                <a:cs typeface="Cambria" pitchFamily="34" charset="-120"/>
+              </a:rPr>
+              <a:t>!</a:t>
+            </a:r>
+            <a:endParaRPr lang="en-US" sz="1800" dirty="0"/>
+          </a:p>
+        </p:txBody>
+      </p:sp>
+      <p:sp>
+        <p:nvSpPr>
+          <p:cNvPr id="14" name="Text 12"/>
+          <p:cNvSpPr/>
+          <p:nvPr/>
+        </p:nvSpPr>
+        <p:spPr>
+          <a:xfrm>
+            <a:off x="1508760" y="4023360"/>
+            <a:ext cx="9875520" cy="960120"/>
+          </a:xfrm>
+          <a:prstGeom prst="rect">
+            <a:avLst/>
+          </a:prstGeom>
+          <a:noFill/>
+          <a:ln/>
+        </p:spPr>
+        <p:txBody>
+          <a:bodyPr wrap="square" lIns="0" tIns="0" rIns="0" bIns="0" rtlCol="0" anchor="ctr"/>
+          <a:lstStyle/>
+          <a:p>
+            <a:pPr marL="0" indent="0">
+              <a:lnSpc>
+                <a:spcPts val="1800"/>
+              </a:lnSpc>
+              <a:buNone/>
+            </a:pPr>
+            <a:r>
+              <a:rPr lang="en-US" sz="1450" dirty="0">
+                <a:solidFill>
+                  <a:srgbClr val="262A3F"/>
+                </a:solidFill>
+                <a:latin typeface="Calibri" pitchFamily="34" charset="0"/>
+                <a:ea typeface="Calibri" pitchFamily="34" charset="-122"/>
+                <a:cs typeface="Calibri" pitchFamily="34" charset="-120"/>
+              </a:rPr>
+              <a:t>Currency conversion for country comparison is approximate, not cost-of-living adjusted.</a:t>
+            </a:r>
+            <a:endParaRPr lang="en-US" sz="1450" dirty="0"/>
+          </a:p>
+        </p:txBody>
+      </p:sp>
+      <p:sp>
+        <p:nvSpPr>
+          <p:cNvPr id="15" name="Shape 13"/>
+          <p:cNvSpPr/>
+          <p:nvPr/>
+        </p:nvSpPr>
+        <p:spPr>
+          <a:xfrm>
+            <a:off x="548640" y="5166360"/>
+            <a:ext cx="11091672" cy="960120"/>
+          </a:xfrm>
+          <a:prstGeom prst="roundRect">
+            <a:avLst>
+              <a:gd name="adj" fmla="val 6667"/>
+            </a:avLst>
+          </a:prstGeom>
+          <a:solidFill>
+            <a:srgbClr val="F4F6FB"/>
+          </a:solidFill>
+          <a:ln w="12700">
+            <a:solidFill>
+              <a:srgbClr val="D8DEEC"/>
+            </a:solidFill>
+            <a:prstDash val="solid"/>
+          </a:ln>
+        </p:spPr>
+      </p:sp>
+      <p:sp>
+        <p:nvSpPr>
+          <p:cNvPr id="16" name="Shape 14"/>
+          <p:cNvSpPr/>
+          <p:nvPr/>
+        </p:nvSpPr>
+        <p:spPr>
+          <a:xfrm>
+            <a:off x="822960" y="5422392"/>
+            <a:ext cx="457200" cy="457200"/>
+          </a:xfrm>
+          <a:prstGeom prst="ellipse">
+            <a:avLst/>
+          </a:prstGeom>
+          <a:solidFill>
+            <a:srgbClr val="1E2761"/>
+          </a:solidFill>
+          <a:ln/>
+        </p:spPr>
+      </p:sp>
+      <p:sp>
+        <p:nvSpPr>
+          <p:cNvPr id="17" name="Text 15"/>
+          <p:cNvSpPr/>
+          <p:nvPr/>
+        </p:nvSpPr>
+        <p:spPr>
+          <a:xfrm>
+            <a:off x="822960" y="5422392"/>
+            <a:ext cx="457200" cy="457200"/>
+          </a:xfrm>
+          <a:prstGeom prst="rect">
+            <a:avLst/>
+          </a:prstGeom>
+          <a:noFill/>
+          <a:ln/>
+        </p:spPr>
+        <p:txBody>
+          <a:bodyPr wrap="square" lIns="0" tIns="0" rIns="0" bIns="0" rtlCol="0" anchor="ctr"/>
+          <a:lstStyle/>
+          <a:p>
+            <a:pPr marL="0" indent="0" algn="ctr">
+              <a:buNone/>
+            </a:pPr>
+            <a:r>
+              <a:rPr lang="en-US" sz="1800" b="1" dirty="0">
+                <a:solidFill>
+                  <a:srgbClr val="C9A24B"/>
+                </a:solidFill>
+                <a:latin typeface="Cambria" pitchFamily="34" charset="0"/>
+                <a:ea typeface="Cambria" pitchFamily="34" charset="-122"/>
+                <a:cs typeface="Cambria" pitchFamily="34" charset="-120"/>
+              </a:rPr>
+              <a:t>!</a:t>
+            </a:r>
+            <a:endParaRPr lang="en-US" sz="1800" dirty="0"/>
+          </a:p>
+        </p:txBody>
+      </p:sp>
+      <p:sp>
+        <p:nvSpPr>
+          <p:cNvPr id="18" name="Text 16"/>
+          <p:cNvSpPr/>
+          <p:nvPr/>
+        </p:nvSpPr>
+        <p:spPr>
+          <a:xfrm>
+            <a:off x="1508760" y="5166360"/>
+            <a:ext cx="9875520" cy="960120"/>
+          </a:xfrm>
+          <a:prstGeom prst="rect">
+            <a:avLst/>
+          </a:prstGeom>
+          <a:noFill/>
+          <a:ln/>
+        </p:spPr>
+        <p:txBody>
+          <a:bodyPr wrap="square" lIns="0" tIns="0" rIns="0" bIns="0" rtlCol="0" anchor="ctr"/>
+          <a:lstStyle/>
+          <a:p>
+            <a:pPr marL="0" indent="0">
+              <a:lnSpc>
+                <a:spcPts val="1800"/>
+              </a:lnSpc>
+              <a:buNone/>
+            </a:pPr>
+            <a:r>
+              <a:rPr lang="en-US" sz="1450" dirty="0">
+                <a:solidFill>
+                  <a:srgbClr val="262A3F"/>
+                </a:solidFill>
+                <a:latin typeface="Calibri" pitchFamily="34" charset="0"/>
+                <a:ea typeface="Calibri" pitchFamily="34" charset="-122"/>
+                <a:cs typeface="Calibri" pitchFamily="34" charset="-120"/>
+              </a:rPr>
+              <a:t>Free-text fields (industry, job title, country) required keyword-based categorization, which may misclassify edge cases.</a:t>
+            </a:r>
+            <a:endParaRPr lang="en-US" sz="1450" dirty="0"/>
+          </a:p>
+        </p:txBody>
+      </p:sp>
+      <p:sp>
+        <p:nvSpPr>
+          <p:cNvPr id="19" name="Text 17"/>
+          <p:cNvSpPr/>
+          <p:nvPr/>
+        </p:nvSpPr>
+        <p:spPr>
+          <a:xfrm>
+            <a:off x="548640" y="6528816"/>
+            <a:ext cx="7315200" cy="274320"/>
+          </a:xfrm>
+          <a:prstGeom prst="rect">
+            <a:avLst/>
+          </a:prstGeom>
+          <a:noFill/>
+          <a:ln/>
+        </p:spPr>
+        <p:txBody>
+          <a:bodyPr wrap="square" lIns="0" tIns="0" rIns="0" bIns="0" rtlCol="0" anchor="ctr"/>
+          <a:lstStyle/>
+          <a:p>
+            <a:pPr marL="0" indent="0">
+              <a:buNone/>
+            </a:pPr>
+            <a:r>
+              <a:rPr lang="en-US" sz="900" dirty="0">
+                <a:solidFill>
+                  <a:srgbClr val="6B7280"/>
+                </a:solidFill>
+                <a:latin typeface="Calibri" pitchFamily="34" charset="0"/>
+                <a:ea typeface="Calibri" pitchFamily="34" charset="-122"/>
+                <a:cs typeface="Calibri" pitchFamily="34" charset="-120"/>
+              </a:rPr>
+              <a:t>2021 Salary Survey — Key Points</a:t>
+            </a:r>
+            <a:endParaRPr lang="en-US" sz="900" dirty="0"/>
+          </a:p>
+        </p:txBody>
+      </p:sp>
+      <p:sp>
+        <p:nvSpPr>
+          <p:cNvPr id="20" name="Text 18"/>
+          <p:cNvSpPr/>
+          <p:nvPr/>
+        </p:nvSpPr>
+        <p:spPr>
+          <a:xfrm>
+            <a:off x="11338560" y="6528816"/>
+            <a:ext cx="365760" cy="274320"/>
+          </a:xfrm>
+          <a:prstGeom prst="rect">
+            <a:avLst/>
+          </a:prstGeom>
+          <a:noFill/>
+          <a:ln/>
+        </p:spPr>
+        <p:txBody>
+          <a:bodyPr wrap="square" lIns="0" tIns="0" rIns="0" bIns="0" rtlCol="0" anchor="ctr"/>
+          <a:lstStyle/>
+          <a:p>
+            <a:pPr marL="0" indent="0" algn="r">
+              <a:buNone/>
+            </a:pPr>
+            <a:r>
+              <a:rPr lang="en-US" sz="900" dirty="0">
+                <a:solidFill>
+                  <a:srgbClr val="6B7280"/>
+                </a:solidFill>
+                <a:latin typeface="Calibri" pitchFamily="34" charset="0"/>
+                <a:ea typeface="Calibri" pitchFamily="34" charset="-122"/>
+                <a:cs typeface="Calibri" pitchFamily="34" charset="-120"/>
+              </a:rPr>
+              <a:t>10</a:t>
+            </a:r>
+            <a:endParaRPr lang="en-US" sz="900" dirty="0"/>
+          </a:p>
+        </p:txBody>
+      </p:sp>
+    </p:spTree>
+  </p:cSld>
+  <p:clrMapOvr>
+    <a:masterClrMapping/>
+  </p:clrMapOvr>
+</p:sld>
+</file>
+
+<file path=ppt/slides/slide2.xml><?xml version="1.0" encoding="utf-8"?>
+<p:sld xmlns:a="http://schemas.openxmlformats.org/drawingml/2006/main" xmlns:r="http://schemas.openxmlformats.org/officeDocument/2006/relationships" xmlns:p="http://schemas.openxmlformats.org/presentationml/2006/main">
+  <p:cSld name="Slide 2">
+    <p:bg>
+      <p:bgPr>
+        <a:solidFill>
+          <a:srgbClr val="FFFFFF"/>
+        </a:solidFill>
+        <a:effectLst/>
+      </p:bgPr>
+    </p:bg>
+    <p:spTree>
+      <p:nvGrpSpPr>
+        <p:cNvPr id="1" name=""/>
+        <p:cNvGrpSpPr/>
+        <p:nvPr/>
+      </p:nvGrpSpPr>
+      <p:grpSpPr>
+        <a:xfrm>
+          <a:off x="0" y="0"/>
+          <a:ext cx="0" cy="0"/>
+          <a:chOff x="0" y="0"/>
+          <a:chExt cx="0" cy="0"/>
+        </a:xfrm>
+      </p:grpSpPr>
+      <p:sp>
+        <p:nvSpPr>
+          <p:cNvPr id="2" name="Text 0"/>
+          <p:cNvSpPr/>
+          <p:nvPr/>
+        </p:nvSpPr>
+        <p:spPr>
+          <a:xfrm>
+            <a:off x="548640" y="411480"/>
+            <a:ext cx="11064240" cy="731520"/>
+          </a:xfrm>
+          <a:prstGeom prst="rect">
+            <a:avLst/>
+          </a:prstGeom>
+          <a:noFill/>
+          <a:ln/>
+        </p:spPr>
+        <p:txBody>
+          <a:bodyPr wrap="square" lIns="0" tIns="0" rIns="0" bIns="0" rtlCol="0" anchor="ctr"/>
+          <a:lstStyle/>
+          <a:p>
+            <a:pPr marL="0" indent="0">
+              <a:buNone/>
+            </a:pPr>
+            <a:r>
+              <a:rPr lang="en-US" sz="3000" b="1" dirty="0">
+                <a:solidFill>
+                  <a:srgbClr val="1E2761"/>
+                </a:solidFill>
+                <a:latin typeface="Cambria" pitchFamily="34" charset="0"/>
+                <a:ea typeface="Cambria" pitchFamily="34" charset="-122"/>
+                <a:cs typeface="Cambria" pitchFamily="34" charset="-120"/>
+              </a:rPr>
+              <a:t>Project Overview</a:t>
+            </a:r>
+            <a:endParaRPr lang="en-US" sz="3000" dirty="0"/>
+          </a:p>
+        </p:txBody>
+      </p:sp>
+      <p:sp>
+        <p:nvSpPr>
+          <p:cNvPr id="3" name="Text 1"/>
+          <p:cNvSpPr/>
+          <p:nvPr/>
+        </p:nvSpPr>
+        <p:spPr>
+          <a:xfrm>
+            <a:off x="548640" y="1600200"/>
+            <a:ext cx="5303520" cy="320040"/>
+          </a:xfrm>
+          <a:prstGeom prst="rect">
+            <a:avLst/>
+          </a:prstGeom>
+          <a:noFill/>
+          <a:ln/>
+        </p:spPr>
+        <p:txBody>
+          <a:bodyPr wrap="square" lIns="0" tIns="0" rIns="0" bIns="0" rtlCol="0" anchor="ctr"/>
+          <a:lstStyle/>
+          <a:p>
+            <a:pPr marL="0" indent="0">
+              <a:buNone/>
+            </a:pPr>
+            <a:r>
+              <a:rPr lang="en-US" sz="1600" b="1" dirty="0">
+                <a:solidFill>
+                  <a:srgbClr val="1E2761"/>
+                </a:solidFill>
+                <a:latin typeface="Cambria" pitchFamily="34" charset="0"/>
+                <a:ea typeface="Cambria" pitchFamily="34" charset="-122"/>
+                <a:cs typeface="Cambria" pitchFamily="34" charset="-120"/>
+              </a:rPr>
+              <a:t>Goal</a:t>
+            </a:r>
+            <a:endParaRPr lang="en-US" sz="1600" dirty="0"/>
+          </a:p>
+        </p:txBody>
+      </p:sp>
+      <p:sp>
+        <p:nvSpPr>
+          <p:cNvPr id="4" name="Text 2"/>
+          <p:cNvSpPr/>
+          <p:nvPr/>
+        </p:nvSpPr>
+        <p:spPr>
+          <a:xfrm>
+            <a:off x="548640" y="1965960"/>
+            <a:ext cx="5303520" cy="822960"/>
+          </a:xfrm>
+          <a:prstGeom prst="rect">
+            <a:avLst/>
+          </a:prstGeom>
+          <a:noFill/>
+          <a:ln/>
+        </p:spPr>
+        <p:txBody>
+          <a:bodyPr wrap="square" lIns="0" tIns="0" rIns="0" bIns="0" rtlCol="0" anchor="ctr"/>
+          <a:lstStyle/>
+          <a:p>
+            <a:pPr marL="0" indent="0">
+              <a:lnSpc>
+                <a:spcPts val="1800"/>
+              </a:lnSpc>
+              <a:buNone/>
+            </a:pPr>
+            <a:r>
+              <a:rPr lang="en-US" sz="1350" dirty="0">
+                <a:solidFill>
+                  <a:srgbClr val="262A3F"/>
+                </a:solidFill>
+                <a:latin typeface="Calibri" pitchFamily="34" charset="0"/>
+                <a:ea typeface="Calibri" pitchFamily="34" charset="-122"/>
+                <a:cs typeface="Calibri" pitchFamily="34" charset="-120"/>
+              </a:rPr>
+              <a:t>Clean a messy, real-world salary survey dataset and turn it into reliable insights through exploratory data analysis and visualization.</a:t>
+            </a:r>
+            <a:endParaRPr lang="en-US" sz="1350" dirty="0"/>
+          </a:p>
+        </p:txBody>
+      </p:sp>
+      <p:sp>
+        <p:nvSpPr>
+          <p:cNvPr id="5" name="Text 3"/>
+          <p:cNvSpPr/>
+          <p:nvPr/>
+        </p:nvSpPr>
+        <p:spPr>
+          <a:xfrm>
+            <a:off x="457200" y="2990088"/>
+            <a:ext cx="5303520" cy="320040"/>
+          </a:xfrm>
+          <a:prstGeom prst="rect">
+            <a:avLst/>
+          </a:prstGeom>
+          <a:noFill/>
+          <a:ln/>
+        </p:spPr>
+        <p:txBody>
+          <a:bodyPr wrap="square" lIns="0" tIns="0" rIns="0" bIns="0" rtlCol="0" anchor="ctr"/>
+          <a:lstStyle/>
+          <a:p>
+            <a:pPr marL="0" indent="0">
+              <a:buNone/>
+            </a:pPr>
+            <a:r>
+              <a:rPr lang="en-US" sz="1600" b="1" dirty="0">
+                <a:solidFill>
+                  <a:srgbClr val="1E2761"/>
+                </a:solidFill>
+                <a:latin typeface="Cambria" pitchFamily="34" charset="0"/>
+                <a:ea typeface="Cambria" pitchFamily="34" charset="-122"/>
+                <a:cs typeface="Cambria" pitchFamily="34" charset="-120"/>
+              </a:rPr>
+              <a:t>Dataset</a:t>
+            </a:r>
+            <a:endParaRPr lang="en-US" sz="1600" dirty="0"/>
+          </a:p>
+        </p:txBody>
+      </p:sp>
+      <p:sp>
+        <p:nvSpPr>
+          <p:cNvPr id="6" name="Text 4"/>
+          <p:cNvSpPr/>
+          <p:nvPr/>
+        </p:nvSpPr>
+        <p:spPr>
+          <a:xfrm>
+            <a:off x="457200" y="3355848"/>
+            <a:ext cx="5303520" cy="640080"/>
+          </a:xfrm>
+          <a:prstGeom prst="rect">
+            <a:avLst/>
+          </a:prstGeom>
+          <a:noFill/>
+          <a:ln/>
+        </p:spPr>
+        <p:txBody>
+          <a:bodyPr wrap="square" lIns="0" tIns="0" rIns="0" bIns="0" rtlCol="0" anchor="ctr"/>
+          <a:lstStyle/>
+          <a:p>
+            <a:pPr marL="0" indent="0">
+              <a:lnSpc>
+                <a:spcPts val="1800"/>
+              </a:lnSpc>
+              <a:buNone/>
+            </a:pPr>
+            <a:r>
+              <a:rPr lang="en-US" sz="1350" b="1" dirty="0">
+                <a:solidFill>
+                  <a:srgbClr val="262A3F"/>
+                </a:solidFill>
+                <a:latin typeface="Calibri" pitchFamily="34" charset="0"/>
+                <a:ea typeface="Calibri" pitchFamily="34" charset="-122"/>
+                <a:cs typeface="Calibri" pitchFamily="34" charset="-120"/>
+              </a:rPr>
+              <a:t>28,225 raw survey responses </a:t>
+            </a:r>
+            <a:r>
+              <a:rPr lang="en-US" sz="1350" dirty="0">
+                <a:solidFill>
+                  <a:srgbClr val="262A3F"/>
+                </a:solidFill>
+                <a:latin typeface="Calibri" pitchFamily="34" charset="0"/>
+                <a:ea typeface="Calibri" pitchFamily="34" charset="-122"/>
+                <a:cs typeface="Calibri" pitchFamily="34" charset="-120"/>
+              </a:rPr>
+              <a:t>(AskAManager.org, 2021), </a:t>
+            </a:r>
+            <a:r>
+              <a:rPr lang="en-US" sz="1350" b="1" dirty="0">
+                <a:solidFill>
+                  <a:srgbClr val="262A3F"/>
+                </a:solidFill>
+                <a:latin typeface="Calibri" pitchFamily="34" charset="0"/>
+                <a:ea typeface="Calibri" pitchFamily="34" charset="-122"/>
+                <a:cs typeface="Calibri" pitchFamily="34" charset="-120"/>
+              </a:rPr>
+              <a:t>18 original columns</a:t>
+            </a:r>
+            <a:r>
+              <a:rPr lang="en-US" sz="1350" dirty="0">
+                <a:solidFill>
+                  <a:srgbClr val="262A3F"/>
+                </a:solidFill>
+                <a:latin typeface="Calibri" pitchFamily="34" charset="0"/>
+                <a:ea typeface="Calibri" pitchFamily="34" charset="-122"/>
+                <a:cs typeface="Calibri" pitchFamily="34" charset="-120"/>
+              </a:rPr>
+              <a:t> — mostly long Google Form question text.</a:t>
+            </a:r>
+            <a:endParaRPr lang="en-US" sz="1350" dirty="0"/>
+          </a:p>
+        </p:txBody>
+      </p:sp>
+      <p:sp>
+        <p:nvSpPr>
+          <p:cNvPr id="11" name="Shape 9"/>
+          <p:cNvSpPr/>
+          <p:nvPr/>
+        </p:nvSpPr>
+        <p:spPr>
+          <a:xfrm>
+            <a:off x="6172200" y="1600200"/>
+            <a:ext cx="5468112" cy="4846320"/>
+          </a:xfrm>
+          <a:prstGeom prst="roundRect">
+            <a:avLst>
+              <a:gd name="adj" fmla="val 1509"/>
+            </a:avLst>
+          </a:prstGeom>
+          <a:solidFill>
+            <a:srgbClr val="1E2761"/>
+          </a:solidFill>
+          <a:ln/>
+        </p:spPr>
+      </p:sp>
+      <p:sp>
+        <p:nvSpPr>
+          <p:cNvPr id="12" name="Text 10"/>
+          <p:cNvSpPr/>
+          <p:nvPr/>
+        </p:nvSpPr>
+        <p:spPr>
+          <a:xfrm>
+            <a:off x="6492240" y="1810512"/>
+            <a:ext cx="4846320" cy="320040"/>
+          </a:xfrm>
+          <a:prstGeom prst="rect">
+            <a:avLst/>
+          </a:prstGeom>
+          <a:noFill/>
+          <a:ln/>
+        </p:spPr>
+        <p:txBody>
+          <a:bodyPr wrap="square" lIns="0" tIns="0" rIns="0" bIns="0" rtlCol="0" anchor="ctr"/>
+          <a:lstStyle/>
+          <a:p>
+            <a:pPr marL="0" indent="0">
+              <a:buNone/>
+            </a:pPr>
+            <a:r>
+              <a:rPr lang="en-US" sz="1200" b="1" kern="0" spc="150" dirty="0">
+                <a:solidFill>
+                  <a:srgbClr val="C9A24B"/>
+                </a:solidFill>
+                <a:latin typeface="Calibri" pitchFamily="34" charset="0"/>
+                <a:ea typeface="Calibri" pitchFamily="34" charset="-122"/>
+                <a:cs typeface="Calibri" pitchFamily="34" charset="-120"/>
+              </a:rPr>
+              <a:t>RESEARCH QUESTIONS ANSWERED</a:t>
+            </a:r>
+            <a:endParaRPr lang="en-US" sz="1200" dirty="0"/>
+          </a:p>
+        </p:txBody>
+      </p:sp>
+      <p:sp>
+        <p:nvSpPr>
+          <p:cNvPr id="13" name="Text 11"/>
+          <p:cNvSpPr/>
+          <p:nvPr/>
+        </p:nvSpPr>
+        <p:spPr>
+          <a:xfrm>
+            <a:off x="6492240" y="2286000"/>
+            <a:ext cx="457200" cy="457200"/>
+          </a:xfrm>
+          <a:prstGeom prst="rect">
+            <a:avLst/>
+          </a:prstGeom>
+          <a:noFill/>
+          <a:ln/>
+        </p:spPr>
+        <p:txBody>
+          <a:bodyPr wrap="square" lIns="0" tIns="0" rIns="0" bIns="0" rtlCol="0" anchor="ctr"/>
+          <a:lstStyle/>
+          <a:p>
+            <a:pPr marL="0" indent="0">
+              <a:buNone/>
+            </a:pPr>
+            <a:r>
+              <a:rPr lang="en-US" sz="2000" b="1" dirty="0">
+                <a:solidFill>
+                  <a:srgbClr val="C9A24B"/>
+                </a:solidFill>
+                <a:latin typeface="Cambria" pitchFamily="34" charset="0"/>
+                <a:ea typeface="Cambria" pitchFamily="34" charset="-122"/>
+                <a:cs typeface="Cambria" pitchFamily="34" charset="-120"/>
+              </a:rPr>
+              <a:t>1</a:t>
+            </a:r>
+            <a:endParaRPr lang="en-US" sz="2000" dirty="0"/>
+          </a:p>
+        </p:txBody>
+      </p:sp>
+      <p:sp>
+        <p:nvSpPr>
+          <p:cNvPr id="14" name="Text 12"/>
+          <p:cNvSpPr/>
+          <p:nvPr/>
+        </p:nvSpPr>
+        <p:spPr>
+          <a:xfrm>
+            <a:off x="6995160" y="2304288"/>
+            <a:ext cx="4572000" cy="685800"/>
+          </a:xfrm>
+          <a:prstGeom prst="rect">
+            <a:avLst/>
+          </a:prstGeom>
+          <a:noFill/>
+          <a:ln/>
+        </p:spPr>
+        <p:txBody>
+          <a:bodyPr wrap="square" lIns="0" tIns="0" rIns="0" bIns="0" rtlCol="0" anchor="ctr"/>
+          <a:lstStyle/>
+          <a:p>
+            <a:pPr marL="0" indent="0">
+              <a:lnSpc>
+                <a:spcPts val="1600"/>
+              </a:lnSpc>
+              <a:buNone/>
+            </a:pPr>
+            <a:r>
+              <a:rPr lang="en-US" sz="1300" dirty="0">
+                <a:solidFill>
+                  <a:srgbClr val="FFFFFF"/>
+                </a:solidFill>
+                <a:latin typeface="Calibri" pitchFamily="34" charset="0"/>
+                <a:ea typeface="Calibri" pitchFamily="34" charset="-122"/>
+                <a:cs typeface="Calibri" pitchFamily="34" charset="-120"/>
+              </a:rPr>
+              <a:t>Does more experience mean more money, and by how much per year?</a:t>
+            </a:r>
+            <a:endParaRPr lang="en-US" sz="1300" dirty="0"/>
+          </a:p>
+        </p:txBody>
+      </p:sp>
+      <p:sp>
+        <p:nvSpPr>
+          <p:cNvPr id="15" name="Text 13"/>
+          <p:cNvSpPr/>
+          <p:nvPr/>
+        </p:nvSpPr>
+        <p:spPr>
+          <a:xfrm>
+            <a:off x="6492240" y="3127248"/>
+            <a:ext cx="457200" cy="457200"/>
+          </a:xfrm>
+          <a:prstGeom prst="rect">
+            <a:avLst/>
+          </a:prstGeom>
+          <a:noFill/>
+          <a:ln/>
+        </p:spPr>
+        <p:txBody>
+          <a:bodyPr wrap="square" lIns="0" tIns="0" rIns="0" bIns="0" rtlCol="0" anchor="ctr"/>
+          <a:lstStyle/>
+          <a:p>
+            <a:pPr marL="0" indent="0">
+              <a:buNone/>
+            </a:pPr>
+            <a:r>
+              <a:rPr lang="en-US" sz="2000" b="1" dirty="0">
+                <a:solidFill>
+                  <a:srgbClr val="C9A24B"/>
+                </a:solidFill>
+                <a:latin typeface="Cambria" pitchFamily="34" charset="0"/>
+                <a:ea typeface="Cambria" pitchFamily="34" charset="-122"/>
+                <a:cs typeface="Cambria" pitchFamily="34" charset="-120"/>
+              </a:rPr>
+              <a:t>2</a:t>
+            </a:r>
+            <a:endParaRPr lang="en-US" sz="2000" dirty="0"/>
+          </a:p>
+        </p:txBody>
+      </p:sp>
+      <p:sp>
+        <p:nvSpPr>
+          <p:cNvPr id="16" name="Text 14"/>
+          <p:cNvSpPr/>
+          <p:nvPr/>
+        </p:nvSpPr>
+        <p:spPr>
+          <a:xfrm>
+            <a:off x="6995160" y="3145536"/>
+            <a:ext cx="4572000" cy="685800"/>
+          </a:xfrm>
+          <a:prstGeom prst="rect">
+            <a:avLst/>
+          </a:prstGeom>
+          <a:noFill/>
+          <a:ln/>
+        </p:spPr>
+        <p:txBody>
+          <a:bodyPr wrap="square" lIns="0" tIns="0" rIns="0" bIns="0" rtlCol="0" anchor="ctr"/>
+          <a:lstStyle/>
+          <a:p>
+            <a:pPr marL="0" indent="0">
+              <a:lnSpc>
+                <a:spcPts val="1600"/>
+              </a:lnSpc>
+              <a:buNone/>
+            </a:pPr>
+            <a:r>
+              <a:rPr lang="en-US" sz="1300" dirty="0">
+                <a:solidFill>
+                  <a:srgbClr val="FFFFFF"/>
+                </a:solidFill>
+                <a:latin typeface="Calibri" pitchFamily="34" charset="0"/>
+                <a:ea typeface="Calibri" pitchFamily="34" charset="-122"/>
+                <a:cs typeface="Calibri" pitchFamily="34" charset="-120"/>
+              </a:rPr>
+              <a:t>Is a Master's/PhD worth it in dollar terms?</a:t>
+            </a:r>
+            <a:endParaRPr lang="en-US" sz="1300" dirty="0"/>
+          </a:p>
+        </p:txBody>
+      </p:sp>
+      <p:sp>
+        <p:nvSpPr>
+          <p:cNvPr id="17" name="Text 15"/>
+          <p:cNvSpPr/>
+          <p:nvPr/>
+        </p:nvSpPr>
+        <p:spPr>
+          <a:xfrm>
+            <a:off x="6492240" y="3968496"/>
+            <a:ext cx="457200" cy="457200"/>
+          </a:xfrm>
+          <a:prstGeom prst="rect">
+            <a:avLst/>
+          </a:prstGeom>
+          <a:noFill/>
+          <a:ln/>
+        </p:spPr>
+        <p:txBody>
+          <a:bodyPr wrap="square" lIns="0" tIns="0" rIns="0" bIns="0" rtlCol="0" anchor="ctr"/>
+          <a:lstStyle/>
+          <a:p>
+            <a:pPr marL="0" indent="0">
+              <a:buNone/>
+            </a:pPr>
+            <a:r>
+              <a:rPr lang="en-US" sz="2000" b="1" dirty="0">
+                <a:solidFill>
+                  <a:srgbClr val="C9A24B"/>
+                </a:solidFill>
+                <a:latin typeface="Cambria" pitchFamily="34" charset="0"/>
+                <a:ea typeface="Cambria" pitchFamily="34" charset="-122"/>
+                <a:cs typeface="Cambria" pitchFamily="34" charset="-120"/>
+              </a:rPr>
+              <a:t>3</a:t>
+            </a:r>
+            <a:endParaRPr lang="en-US" sz="2000" dirty="0"/>
+          </a:p>
+        </p:txBody>
+      </p:sp>
+      <p:sp>
+        <p:nvSpPr>
+          <p:cNvPr id="18" name="Text 16"/>
+          <p:cNvSpPr/>
+          <p:nvPr/>
+        </p:nvSpPr>
+        <p:spPr>
+          <a:xfrm>
+            <a:off x="6995160" y="3986784"/>
+            <a:ext cx="4572000" cy="685800"/>
+          </a:xfrm>
+          <a:prstGeom prst="rect">
+            <a:avLst/>
+          </a:prstGeom>
+          <a:noFill/>
+          <a:ln/>
+        </p:spPr>
+        <p:txBody>
+          <a:bodyPr wrap="square" lIns="0" tIns="0" rIns="0" bIns="0" rtlCol="0" anchor="ctr"/>
+          <a:lstStyle/>
+          <a:p>
+            <a:pPr marL="0" indent="0">
+              <a:lnSpc>
+                <a:spcPts val="1600"/>
+              </a:lnSpc>
+              <a:buNone/>
+            </a:pPr>
+            <a:r>
+              <a:rPr lang="en-US" sz="1300" dirty="0">
+                <a:solidFill>
+                  <a:srgbClr val="FFFFFF"/>
+                </a:solidFill>
+                <a:latin typeface="Calibri" pitchFamily="34" charset="0"/>
+                <a:ea typeface="Calibri" pitchFamily="34" charset="-122"/>
+                <a:cs typeface="Calibri" pitchFamily="34" charset="-120"/>
+              </a:rPr>
+              <a:t>Which industries pay the best?</a:t>
+            </a:r>
+            <a:endParaRPr lang="en-US" sz="1300" dirty="0"/>
+          </a:p>
+        </p:txBody>
+      </p:sp>
+      <p:sp>
+        <p:nvSpPr>
+          <p:cNvPr id="19" name="Text 17"/>
+          <p:cNvSpPr/>
+          <p:nvPr/>
+        </p:nvSpPr>
+        <p:spPr>
+          <a:xfrm>
+            <a:off x="6492240" y="4809744"/>
+            <a:ext cx="457200" cy="457200"/>
+          </a:xfrm>
+          <a:prstGeom prst="rect">
+            <a:avLst/>
+          </a:prstGeom>
+          <a:noFill/>
+          <a:ln/>
+        </p:spPr>
+        <p:txBody>
+          <a:bodyPr wrap="square" lIns="0" tIns="0" rIns="0" bIns="0" rtlCol="0" anchor="ctr"/>
+          <a:lstStyle/>
+          <a:p>
+            <a:pPr marL="0" indent="0">
+              <a:buNone/>
+            </a:pPr>
+            <a:r>
+              <a:rPr lang="en-US" sz="2000" b="1" dirty="0">
+                <a:solidFill>
+                  <a:srgbClr val="C9A24B"/>
+                </a:solidFill>
+                <a:latin typeface="Cambria" pitchFamily="34" charset="0"/>
+                <a:ea typeface="Cambria" pitchFamily="34" charset="-122"/>
+                <a:cs typeface="Cambria" pitchFamily="34" charset="-120"/>
+              </a:rPr>
+              <a:t>4</a:t>
+            </a:r>
+            <a:endParaRPr lang="en-US" sz="2000" dirty="0"/>
+          </a:p>
+        </p:txBody>
+      </p:sp>
+      <p:sp>
+        <p:nvSpPr>
+          <p:cNvPr id="20" name="Text 18"/>
+          <p:cNvSpPr/>
+          <p:nvPr/>
+        </p:nvSpPr>
+        <p:spPr>
+          <a:xfrm>
+            <a:off x="6995160" y="4828032"/>
+            <a:ext cx="4572000" cy="685800"/>
+          </a:xfrm>
+          <a:prstGeom prst="rect">
+            <a:avLst/>
+          </a:prstGeom>
+          <a:noFill/>
+          <a:ln/>
+        </p:spPr>
+        <p:txBody>
+          <a:bodyPr wrap="square" lIns="0" tIns="0" rIns="0" bIns="0" rtlCol="0" anchor="ctr"/>
+          <a:lstStyle/>
+          <a:p>
+            <a:pPr marL="0" indent="0">
+              <a:lnSpc>
+                <a:spcPts val="1600"/>
+              </a:lnSpc>
+              <a:buNone/>
+            </a:pPr>
+            <a:r>
+              <a:rPr lang="en-US" sz="1300" dirty="0">
+                <a:solidFill>
+                  <a:srgbClr val="FFFFFF"/>
+                </a:solidFill>
+                <a:latin typeface="Calibri" pitchFamily="34" charset="0"/>
+                <a:ea typeface="Calibri" pitchFamily="34" charset="-122"/>
+                <a:cs typeface="Calibri" pitchFamily="34" charset="-120"/>
+              </a:rPr>
+              <a:t>Does location change what you get paid?</a:t>
+            </a:r>
+            <a:endParaRPr lang="en-US" sz="1300" dirty="0"/>
+          </a:p>
+        </p:txBody>
+      </p:sp>
+      <p:sp>
+        <p:nvSpPr>
+          <p:cNvPr id="21" name="Text 19"/>
+          <p:cNvSpPr/>
+          <p:nvPr/>
+        </p:nvSpPr>
+        <p:spPr>
+          <a:xfrm>
+            <a:off x="6492240" y="5650992"/>
+            <a:ext cx="457200" cy="457200"/>
+          </a:xfrm>
+          <a:prstGeom prst="rect">
+            <a:avLst/>
+          </a:prstGeom>
+          <a:noFill/>
+          <a:ln/>
+        </p:spPr>
+        <p:txBody>
+          <a:bodyPr wrap="square" lIns="0" tIns="0" rIns="0" bIns="0" rtlCol="0" anchor="ctr"/>
+          <a:lstStyle/>
+          <a:p>
+            <a:pPr marL="0" indent="0">
+              <a:buNone/>
+            </a:pPr>
+            <a:r>
+              <a:rPr lang="en-US" sz="2000" b="1" dirty="0">
+                <a:solidFill>
+                  <a:srgbClr val="C9A24B"/>
+                </a:solidFill>
+                <a:latin typeface="Cambria" pitchFamily="34" charset="0"/>
+                <a:ea typeface="Cambria" pitchFamily="34" charset="-122"/>
+                <a:cs typeface="Cambria" pitchFamily="34" charset="-120"/>
+              </a:rPr>
+              <a:t>5</a:t>
+            </a:r>
+            <a:endParaRPr lang="en-US" sz="2000" dirty="0"/>
+          </a:p>
+        </p:txBody>
+      </p:sp>
+      <p:sp>
+        <p:nvSpPr>
+          <p:cNvPr id="22" name="Text 20"/>
+          <p:cNvSpPr/>
+          <p:nvPr/>
+        </p:nvSpPr>
+        <p:spPr>
+          <a:xfrm>
+            <a:off x="6995160" y="5669280"/>
+            <a:ext cx="4572000" cy="685800"/>
+          </a:xfrm>
+          <a:prstGeom prst="rect">
+            <a:avLst/>
+          </a:prstGeom>
+          <a:noFill/>
+          <a:ln/>
+        </p:spPr>
+        <p:txBody>
+          <a:bodyPr wrap="square" lIns="0" tIns="0" rIns="0" bIns="0" rtlCol="0" anchor="ctr"/>
+          <a:lstStyle/>
+          <a:p>
+            <a:pPr marL="0" indent="0">
+              <a:lnSpc>
+                <a:spcPts val="1600"/>
+              </a:lnSpc>
+              <a:buNone/>
+            </a:pPr>
+            <a:r>
+              <a:rPr lang="en-US" sz="1300" dirty="0">
+                <a:solidFill>
+                  <a:srgbClr val="FFFFFF"/>
+                </a:solidFill>
+                <a:latin typeface="Calibri" pitchFamily="34" charset="0"/>
+                <a:ea typeface="Calibri" pitchFamily="34" charset="-122"/>
+                <a:cs typeface="Calibri" pitchFamily="34" charset="-120"/>
+              </a:rPr>
+              <a:t>Which job titles pay the most, and how consistent is pay within a title?</a:t>
+            </a:r>
+            <a:endParaRPr lang="en-US" sz="1300" dirty="0"/>
+          </a:p>
+        </p:txBody>
+      </p:sp>
+      <p:sp>
+        <p:nvSpPr>
+          <p:cNvPr id="23" name="Text 21"/>
+          <p:cNvSpPr/>
+          <p:nvPr/>
+        </p:nvSpPr>
+        <p:spPr>
+          <a:xfrm>
+            <a:off x="548640" y="6528816"/>
+            <a:ext cx="7315200" cy="274320"/>
+          </a:xfrm>
+          <a:prstGeom prst="rect">
+            <a:avLst/>
+          </a:prstGeom>
+          <a:noFill/>
+          <a:ln/>
+        </p:spPr>
+        <p:txBody>
+          <a:bodyPr wrap="square" lIns="0" tIns="0" rIns="0" bIns="0" rtlCol="0" anchor="ctr"/>
+          <a:lstStyle/>
+          <a:p>
+            <a:pPr marL="0" indent="0">
+              <a:buNone/>
+            </a:pPr>
+            <a:r>
+              <a:rPr lang="en-US" sz="900" dirty="0">
+                <a:solidFill>
+                  <a:srgbClr val="6B7280"/>
+                </a:solidFill>
+                <a:latin typeface="Calibri" pitchFamily="34" charset="0"/>
+                <a:ea typeface="Calibri" pitchFamily="34" charset="-122"/>
+                <a:cs typeface="Calibri" pitchFamily="34" charset="-120"/>
+              </a:rPr>
+              <a:t>2021 Salary Survey — Key Points</a:t>
+            </a:r>
+            <a:endParaRPr lang="en-US" sz="900" dirty="0"/>
+          </a:p>
+        </p:txBody>
+      </p:sp>
+      <p:sp>
+        <p:nvSpPr>
+          <p:cNvPr id="24" name="Text 22"/>
+          <p:cNvSpPr/>
+          <p:nvPr/>
+        </p:nvSpPr>
+        <p:spPr>
+          <a:xfrm>
+            <a:off x="11338560" y="6528816"/>
+            <a:ext cx="365760" cy="274320"/>
+          </a:xfrm>
+          <a:prstGeom prst="rect">
+            <a:avLst/>
+          </a:prstGeom>
+          <a:noFill/>
+          <a:ln/>
+        </p:spPr>
+        <p:txBody>
+          <a:bodyPr wrap="square" lIns="0" tIns="0" rIns="0" bIns="0" rtlCol="0" anchor="ctr"/>
+          <a:lstStyle/>
+          <a:p>
+            <a:pPr marL="0" indent="0" algn="r">
+              <a:buNone/>
+            </a:pPr>
+            <a:r>
+              <a:rPr lang="en-US" sz="900" dirty="0">
+                <a:solidFill>
+                  <a:srgbClr val="6B7280"/>
+                </a:solidFill>
+                <a:latin typeface="Calibri" pitchFamily="34" charset="0"/>
+                <a:ea typeface="Calibri" pitchFamily="34" charset="-122"/>
+                <a:cs typeface="Calibri" pitchFamily="34" charset="-120"/>
+              </a:rPr>
+              <a:t>2</a:t>
+            </a:r>
+            <a:endParaRPr lang="en-US" sz="900" dirty="0"/>
+          </a:p>
+        </p:txBody>
+      </p:sp>
+    </p:spTree>
+  </p:cSld>
+  <p:clrMapOvr>
+    <a:masterClrMapping/>
+  </p:clrMapOvr>
+</p:sld>
+</file>
+
+<file path=ppt/slides/slide3.xml><?xml version="1.0" encoding="utf-8"?>
+<p:sld xmlns:a="http://schemas.openxmlformats.org/drawingml/2006/main" xmlns:r="http://schemas.openxmlformats.org/officeDocument/2006/relationships" xmlns:p="http://schemas.openxmlformats.org/presentationml/2006/main">
+  <p:cSld>
+    <p:spTree>
+      <p:nvGrpSpPr>
+        <p:cNvPr id="1" name=""/>
+        <p:cNvGrpSpPr/>
+        <p:nvPr/>
+      </p:nvGrpSpPr>
+      <p:grpSpPr>
+        <a:xfrm>
+          <a:off x="0" y="0"/>
+          <a:ext cx="0" cy="0"/>
+          <a:chOff x="0" y="0"/>
+          <a:chExt cx="0" cy="0"/>
+        </a:xfrm>
+      </p:grpSpPr>
+      <p:pic>
+        <p:nvPicPr>
+          <p:cNvPr id="3" name="Picture 2">
+            <a:extLst>
+              <a:ext uri="{FF2B5EF4-FFF2-40B4-BE49-F238E27FC236}">
+                <a16:creationId xmlns:a16="http://schemas.microsoft.com/office/drawing/2014/main" id="{A7BE58E8-738A-DA0F-2BDE-8A19927B2007}"/>
+              </a:ext>
+            </a:extLst>
+          </p:cNvPr>
+          <p:cNvPicPr>
+            <a:picLocks noChangeAspect="1"/>
+          </p:cNvPicPr>
+          <p:nvPr/>
+        </p:nvPicPr>
+        <p:blipFill>
+          <a:blip r:embed="rId2"/>
+          <a:stretch>
+            <a:fillRect/>
+          </a:stretch>
+        </p:blipFill>
+        <p:spPr>
+          <a:xfrm>
+            <a:off x="167748" y="1143000"/>
+            <a:ext cx="11687367" cy="4468146"/>
+          </a:xfrm>
+          <a:prstGeom prst="rect">
+            <a:avLst/>
+          </a:prstGeom>
+        </p:spPr>
+      </p:pic>
+      <p:sp>
+        <p:nvSpPr>
+          <p:cNvPr id="5" name="Text 0">
+            <a:extLst>
+              <a:ext uri="{FF2B5EF4-FFF2-40B4-BE49-F238E27FC236}">
+                <a16:creationId xmlns:a16="http://schemas.microsoft.com/office/drawing/2014/main" id="{7C3AB2A3-4257-6331-1C16-8A4C456DDA25}"/>
+              </a:ext>
+            </a:extLst>
+          </p:cNvPr>
+          <p:cNvSpPr/>
+          <p:nvPr/>
+        </p:nvSpPr>
+        <p:spPr>
+          <a:xfrm>
+            <a:off x="299987" y="323248"/>
+            <a:ext cx="11064240" cy="731520"/>
+          </a:xfrm>
+          <a:prstGeom prst="rect">
+            <a:avLst/>
+          </a:prstGeom>
+          <a:noFill/>
+          <a:ln/>
+        </p:spPr>
+        <p:txBody>
+          <a:bodyPr wrap="square" lIns="0" tIns="0" rIns="0" bIns="0" rtlCol="0" anchor="ctr"/>
+          <a:lstStyle/>
+          <a:p>
+            <a:pPr marL="0" indent="0">
+              <a:buNone/>
+            </a:pPr>
+            <a:r>
+              <a:rPr lang="en-US" sz="3000" b="1" dirty="0">
+                <a:solidFill>
+                  <a:srgbClr val="1E2761"/>
+                </a:solidFill>
+                <a:latin typeface="Cambria" pitchFamily="34" charset="0"/>
+                <a:ea typeface="Cambria" pitchFamily="34" charset="-122"/>
+                <a:cs typeface="Cambria" pitchFamily="34" charset="-120"/>
+              </a:rPr>
+              <a:t>Raw Dataset Overview</a:t>
+            </a:r>
+            <a:endParaRPr lang="en-US" sz="3000" dirty="0"/>
+          </a:p>
+        </p:txBody>
+      </p:sp>
+    </p:spTree>
+    <p:extLst>
+      <p:ext uri="{BB962C8B-B14F-4D97-AF65-F5344CB8AC3E}">
+        <p14:creationId xmlns:p14="http://schemas.microsoft.com/office/powerpoint/2010/main" val="3344915982"/>
+      </p:ext>
+    </p:extLst>
+  </p:cSld>
+  <p:clrMapOvr>
+    <a:masterClrMapping/>
+  </p:clrMapOvr>
+</p:sld>
+</file>
+
+<file path=ppt/slides/slide4.xml><?xml version="1.0" encoding="utf-8"?>
+<p:sld xmlns:a="http://schemas.openxmlformats.org/drawingml/2006/main" xmlns:r="http://schemas.openxmlformats.org/officeDocument/2006/relationships" xmlns:p="http://schemas.openxmlformats.org/presentationml/2006/main">
+  <p:cSld name="Slide 3">
+    <p:bg>
+      <p:bgPr>
+        <a:solidFill>
+          <a:srgbClr val="FFFFFF"/>
+        </a:solidFill>
+        <a:effectLst/>
+      </p:bgPr>
+    </p:bg>
+    <p:spTree>
+      <p:nvGrpSpPr>
+        <p:cNvPr id="1" name=""/>
+        <p:cNvGrpSpPr/>
+        <p:nvPr/>
+      </p:nvGrpSpPr>
+      <p:grpSpPr>
+        <a:xfrm>
+          <a:off x="0" y="0"/>
+          <a:ext cx="0" cy="0"/>
+          <a:chOff x="0" y="0"/>
+          <a:chExt cx="0" cy="0"/>
+        </a:xfrm>
+      </p:grpSpPr>
+      <p:sp>
+        <p:nvSpPr>
+          <p:cNvPr id="2" name="Text 0"/>
+          <p:cNvSpPr/>
+          <p:nvPr/>
+        </p:nvSpPr>
+        <p:spPr>
+          <a:xfrm>
+            <a:off x="548640" y="411480"/>
+            <a:ext cx="11064240" cy="731520"/>
+          </a:xfrm>
+          <a:prstGeom prst="rect">
+            <a:avLst/>
+          </a:prstGeom>
+          <a:noFill/>
+          <a:ln/>
+        </p:spPr>
+        <p:txBody>
+          <a:bodyPr wrap="square" lIns="0" tIns="0" rIns="0" bIns="0" rtlCol="0" anchor="ctr"/>
+          <a:lstStyle/>
+          <a:p>
+            <a:pPr marL="0" indent="0">
+              <a:buNone/>
+            </a:pPr>
+            <a:r>
+              <a:rPr lang="en-US" sz="3000" b="1" dirty="0">
+                <a:solidFill>
+                  <a:srgbClr val="1E2761"/>
+                </a:solidFill>
+                <a:latin typeface="Cambria" pitchFamily="34" charset="0"/>
+                <a:ea typeface="Cambria" pitchFamily="34" charset="-122"/>
+                <a:cs typeface="Cambria" pitchFamily="34" charset="-120"/>
+              </a:rPr>
+              <a:t>Data Cleaning Highlights</a:t>
+            </a:r>
+            <a:endParaRPr lang="en-US" sz="3000" dirty="0"/>
+          </a:p>
+        </p:txBody>
+      </p:sp>
+      <p:sp>
+        <p:nvSpPr>
+          <p:cNvPr id="3" name="Text 1"/>
+          <p:cNvSpPr/>
+          <p:nvPr/>
+        </p:nvSpPr>
+        <p:spPr>
+          <a:xfrm>
+            <a:off x="548640" y="1554480"/>
+            <a:ext cx="5486400" cy="1371600"/>
+          </a:xfrm>
+          <a:prstGeom prst="rect">
+            <a:avLst/>
+          </a:prstGeom>
+          <a:noFill/>
+          <a:ln/>
+        </p:spPr>
+        <p:txBody>
+          <a:bodyPr wrap="square" lIns="0" tIns="0" rIns="0" bIns="0" rtlCol="0" anchor="ctr"/>
+          <a:lstStyle/>
+          <a:p>
+            <a:pPr marL="0" indent="0">
+              <a:lnSpc>
+                <a:spcPts val="1700"/>
+              </a:lnSpc>
+              <a:buNone/>
+            </a:pPr>
+            <a:r>
+              <a:rPr lang="en-US" sz="1400" b="1" dirty="0">
+                <a:solidFill>
+                  <a:srgbClr val="1E2761"/>
+                </a:solidFill>
+                <a:latin typeface="Calibri" pitchFamily="34" charset="0"/>
+                <a:ea typeface="Calibri" pitchFamily="34" charset="-122"/>
+                <a:cs typeface="Calibri" pitchFamily="34" charset="-120"/>
+              </a:rPr>
+              <a:t>Columns: </a:t>
+            </a:r>
+            <a:endParaRPr lang="en-US" sz="1400" dirty="0"/>
+          </a:p>
+          <a:p>
+            <a:pPr marL="0" indent="0">
+              <a:lnSpc>
+                <a:spcPts val="1700"/>
+              </a:lnSpc>
+              <a:buNone/>
+            </a:pPr>
+            <a:r>
+              <a:rPr lang="en-US" sz="1300" dirty="0">
+                <a:solidFill>
+                  <a:srgbClr val="262A3F"/>
+                </a:solidFill>
+                <a:latin typeface="Calibri" pitchFamily="34" charset="0"/>
+                <a:ea typeface="Calibri" pitchFamily="34" charset="-122"/>
+                <a:cs typeface="Calibri" pitchFamily="34" charset="-120"/>
+              </a:rPr>
+              <a:t>9 of 18 raw columns removed (metadata, redundant, or out-of-scope free text); the 9 kept were renamed from long question text to short field names.
+</a:t>
+            </a:r>
+            <a:endParaRPr lang="en-US" sz="1400" dirty="0"/>
+          </a:p>
+          <a:p>
+            <a:pPr marL="0" indent="0">
+              <a:lnSpc>
+                <a:spcPts val="1700"/>
+              </a:lnSpc>
+              <a:buNone/>
+            </a:pPr>
+            <a:r>
+              <a:rPr lang="en-US" sz="1400" b="1" dirty="0">
+                <a:solidFill>
+                  <a:srgbClr val="1E2761"/>
+                </a:solidFill>
+                <a:latin typeface="Calibri" pitchFamily="34" charset="0"/>
+                <a:ea typeface="Calibri" pitchFamily="34" charset="-122"/>
+                <a:cs typeface="Calibri" pitchFamily="34" charset="-120"/>
+              </a:rPr>
+              <a:t>Free-text standardization:</a:t>
+            </a:r>
+            <a:endParaRPr lang="en-US" sz="1400" dirty="0"/>
+          </a:p>
+        </p:txBody>
+      </p:sp>
+      <p:graphicFrame>
+        <p:nvGraphicFramePr>
+          <p:cNvPr id="4" name="Table 0"/>
+          <p:cNvGraphicFramePr>
+            <a:graphicFrameLocks noGrp="1"/>
+          </p:cNvGraphicFramePr>
+          <p:nvPr>
+            <p:extLst>
+              <p:ext uri="{D42A27DB-BD31-4B8C-83A1-F6EECF244321}">
+                <p14:modId xmlns:p14="http://schemas.microsoft.com/office/powerpoint/2010/main" val="1579011935"/>
+              </p:ext>
+            </p:extLst>
+          </p:nvPr>
+        </p:nvGraphicFramePr>
+        <p:xfrm>
+          <a:off x="548640" y="2788920"/>
+          <a:ext cx="5486400" cy="1234440"/>
+        </p:xfrm>
+        <a:graphic>
+          <a:graphicData uri="http://schemas.openxmlformats.org/drawingml/2006/table">
+            <a:tbl>
+              <a:tblPr/>
+              <a:tblGrid>
+                <a:gridCol w="1645920">
+                  <a:extLst>
+                    <a:ext uri="{9D8B030D-6E8A-4147-A177-3AD203B41FA5}">
+                      <a16:colId xmlns:a16="http://schemas.microsoft.com/office/drawing/2014/main" val="20000"/>
+                    </a:ext>
+                  </a:extLst>
+                </a:gridCol>
+                <a:gridCol w="2011680">
+                  <a:extLst>
+                    <a:ext uri="{9D8B030D-6E8A-4147-A177-3AD203B41FA5}">
+                      <a16:colId xmlns:a16="http://schemas.microsoft.com/office/drawing/2014/main" val="20001"/>
+                    </a:ext>
+                  </a:extLst>
+                </a:gridCol>
+                <a:gridCol w="1828800">
+                  <a:extLst>
+                    <a:ext uri="{9D8B030D-6E8A-4147-A177-3AD203B41FA5}">
+                      <a16:colId xmlns:a16="http://schemas.microsoft.com/office/drawing/2014/main" val="20002"/>
+                    </a:ext>
+                  </a:extLst>
+                </a:gridCol>
+              </a:tblGrid>
+              <a:tr h="308610">
+                <a:tc>
+                  <a:txBody>
+                    <a:bodyPr/>
+                    <a:lstStyle/>
+                    <a:p>
+                      <a:pPr marL="0" indent="0">
+                        <a:buNone/>
+                      </a:pPr>
+                      <a:r>
+                        <a:rPr lang="en-US" sz="1200" b="1" dirty="0">
+                          <a:solidFill>
+                            <a:srgbClr val="FFFFFF"/>
+                          </a:solidFill>
+                        </a:rPr>
+                        <a:t>Field</a:t>
+                      </a:r>
+                      <a:endParaRPr lang="en-US" sz="1200" dirty="0"/>
+                    </a:p>
+                  </a:txBody>
+                  <a:tcPr anchor="ctr">
+                    <a:lnL w="9525" cap="flat" cmpd="sng" algn="ctr">
+                      <a:solidFill>
+                        <a:srgbClr val="D8DEEC"/>
+                      </a:solidFill>
+                      <a:prstDash val="solid"/>
+                      <a:round/>
+                      <a:headEnd type="none" w="med" len="med"/>
+                      <a:tailEnd type="none" w="med" len="med"/>
+                    </a:lnL>
+                    <a:lnR w="9525" cap="flat" cmpd="sng" algn="ctr">
+                      <a:solidFill>
+                        <a:srgbClr val="D8DEEC"/>
+                      </a:solidFill>
+                      <a:prstDash val="solid"/>
+                      <a:round/>
+                      <a:headEnd type="none" w="med" len="med"/>
+                      <a:tailEnd type="none" w="med" len="med"/>
+                    </a:lnR>
+                    <a:lnT w="9525" cap="flat" cmpd="sng" algn="ctr">
+                      <a:solidFill>
+                        <a:srgbClr val="D8DEEC"/>
+                      </a:solidFill>
+                      <a:prstDash val="solid"/>
+                      <a:round/>
+                      <a:headEnd type="none" w="med" len="med"/>
+                      <a:tailEnd type="none" w="med" len="med"/>
+                    </a:lnT>
+                    <a:lnB w="9525" cap="flat" cmpd="sng" algn="ctr">
+                      <a:solidFill>
+                        <a:srgbClr val="D8DEEC"/>
+                      </a:solidFill>
+                      <a:prstDash val="solid"/>
+                      <a:round/>
+                      <a:headEnd type="none" w="med" len="med"/>
+                      <a:tailEnd type="none" w="med" len="med"/>
+                    </a:lnB>
+                    <a:solidFill>
+                      <a:srgbClr val="1E2761"/>
+                    </a:solidFill>
+                  </a:tcPr>
+                </a:tc>
+                <a:tc>
+                  <a:txBody>
+                    <a:bodyPr/>
+                    <a:lstStyle/>
+                    <a:p>
+                      <a:pPr marL="0" indent="0">
+                        <a:buNone/>
+                      </a:pPr>
+                      <a:r>
+                        <a:rPr lang="en-US" sz="1200" b="1" dirty="0">
+                          <a:solidFill>
+                            <a:srgbClr val="FFFFFF"/>
+                          </a:solidFill>
+                        </a:rPr>
+                        <a:t>Before</a:t>
+                      </a:r>
+                      <a:endParaRPr lang="en-US" sz="1200" dirty="0"/>
+                    </a:p>
+                  </a:txBody>
+                  <a:tcPr anchor="ctr">
+                    <a:lnL w="9525" cap="flat" cmpd="sng" algn="ctr">
+                      <a:solidFill>
+                        <a:srgbClr val="D8DEEC"/>
+                      </a:solidFill>
+                      <a:prstDash val="solid"/>
+                      <a:round/>
+                      <a:headEnd type="none" w="med" len="med"/>
+                      <a:tailEnd type="none" w="med" len="med"/>
+                    </a:lnL>
+                    <a:lnR w="9525" cap="flat" cmpd="sng" algn="ctr">
+                      <a:solidFill>
+                        <a:srgbClr val="D8DEEC"/>
+                      </a:solidFill>
+                      <a:prstDash val="solid"/>
+                      <a:round/>
+                      <a:headEnd type="none" w="med" len="med"/>
+                      <a:tailEnd type="none" w="med" len="med"/>
+                    </a:lnR>
+                    <a:lnT w="9525" cap="flat" cmpd="sng" algn="ctr">
+                      <a:solidFill>
+                        <a:srgbClr val="D8DEEC"/>
+                      </a:solidFill>
+                      <a:prstDash val="solid"/>
+                      <a:round/>
+                      <a:headEnd type="none" w="med" len="med"/>
+                      <a:tailEnd type="none" w="med" len="med"/>
+                    </a:lnT>
+                    <a:lnB w="9525" cap="flat" cmpd="sng" algn="ctr">
+                      <a:solidFill>
+                        <a:srgbClr val="D8DEEC"/>
+                      </a:solidFill>
+                      <a:prstDash val="solid"/>
+                      <a:round/>
+                      <a:headEnd type="none" w="med" len="med"/>
+                      <a:tailEnd type="none" w="med" len="med"/>
+                    </a:lnB>
+                    <a:solidFill>
+                      <a:srgbClr val="1E2761"/>
+                    </a:solidFill>
+                  </a:tcPr>
+                </a:tc>
+                <a:tc>
+                  <a:txBody>
+                    <a:bodyPr/>
+                    <a:lstStyle/>
+                    <a:p>
+                      <a:pPr marL="0" indent="0">
+                        <a:buNone/>
+                      </a:pPr>
+                      <a:r>
+                        <a:rPr lang="en-US" sz="1200" b="1" dirty="0">
+                          <a:solidFill>
+                            <a:srgbClr val="FFFFFF"/>
+                          </a:solidFill>
+                        </a:rPr>
+                        <a:t>After</a:t>
+                      </a:r>
+                      <a:endParaRPr lang="en-US" sz="1200" dirty="0"/>
+                    </a:p>
+                  </a:txBody>
+                  <a:tcPr anchor="ctr">
+                    <a:lnL w="9525" cap="flat" cmpd="sng" algn="ctr">
+                      <a:solidFill>
+                        <a:srgbClr val="D8DEEC"/>
+                      </a:solidFill>
+                      <a:prstDash val="solid"/>
+                      <a:round/>
+                      <a:headEnd type="none" w="med" len="med"/>
+                      <a:tailEnd type="none" w="med" len="med"/>
+                    </a:lnL>
+                    <a:lnR w="9525" cap="flat" cmpd="sng" algn="ctr">
+                      <a:solidFill>
+                        <a:srgbClr val="D8DEEC"/>
+                      </a:solidFill>
+                      <a:prstDash val="solid"/>
+                      <a:round/>
+                      <a:headEnd type="none" w="med" len="med"/>
+                      <a:tailEnd type="none" w="med" len="med"/>
+                    </a:lnR>
+                    <a:lnT w="9525" cap="flat" cmpd="sng" algn="ctr">
+                      <a:solidFill>
+                        <a:srgbClr val="D8DEEC"/>
+                      </a:solidFill>
+                      <a:prstDash val="solid"/>
+                      <a:round/>
+                      <a:headEnd type="none" w="med" len="med"/>
+                      <a:tailEnd type="none" w="med" len="med"/>
+                    </a:lnT>
+                    <a:lnB w="9525" cap="flat" cmpd="sng" algn="ctr">
+                      <a:solidFill>
+                        <a:srgbClr val="D8DEEC"/>
+                      </a:solidFill>
+                      <a:prstDash val="solid"/>
+                      <a:round/>
+                      <a:headEnd type="none" w="med" len="med"/>
+                      <a:tailEnd type="none" w="med" len="med"/>
+                    </a:lnB>
+                    <a:solidFill>
+                      <a:srgbClr val="1E2761"/>
+                    </a:solidFill>
+                  </a:tcPr>
+                </a:tc>
+                <a:extLst>
+                  <a:ext uri="{0D108BD9-81ED-4DB2-BD59-A6C34878D82A}">
+                    <a16:rowId xmlns:a16="http://schemas.microsoft.com/office/drawing/2014/main" val="10000"/>
+                  </a:ext>
+                </a:extLst>
+              </a:tr>
+              <a:tr h="308610">
+                <a:tc>
+                  <a:txBody>
+                    <a:bodyPr/>
+                    <a:lstStyle/>
+                    <a:p>
+                      <a:pPr marL="0" indent="0">
+                        <a:buNone/>
+                      </a:pPr>
+                      <a:r>
+                        <a:rPr lang="en-US" sz="1200" b="1" dirty="0">
+                          <a:solidFill>
+                            <a:srgbClr val="1E2761"/>
+                          </a:solidFill>
+                        </a:rPr>
+                        <a:t>industry</a:t>
+                      </a:r>
+                      <a:endParaRPr lang="en-US" sz="1200" dirty="0"/>
+                    </a:p>
+                  </a:txBody>
+                  <a:tcPr anchor="ctr">
+                    <a:lnL w="9525" cap="flat" cmpd="sng" algn="ctr">
+                      <a:solidFill>
+                        <a:srgbClr val="D8DEEC"/>
+                      </a:solidFill>
+                      <a:prstDash val="solid"/>
+                      <a:round/>
+                      <a:headEnd type="none" w="med" len="med"/>
+                      <a:tailEnd type="none" w="med" len="med"/>
+                    </a:lnL>
+                    <a:lnR w="9525" cap="flat" cmpd="sng" algn="ctr">
+                      <a:solidFill>
+                        <a:srgbClr val="D8DEEC"/>
+                      </a:solidFill>
+                      <a:prstDash val="solid"/>
+                      <a:round/>
+                      <a:headEnd type="none" w="med" len="med"/>
+                      <a:tailEnd type="none" w="med" len="med"/>
+                    </a:lnR>
+                    <a:lnT w="9525" cap="flat" cmpd="sng" algn="ctr">
+                      <a:solidFill>
+                        <a:srgbClr val="D8DEEC"/>
+                      </a:solidFill>
+                      <a:prstDash val="solid"/>
+                      <a:round/>
+                      <a:headEnd type="none" w="med" len="med"/>
+                      <a:tailEnd type="none" w="med" len="med"/>
+                    </a:lnT>
+                    <a:lnB w="9525" cap="flat" cmpd="sng" algn="ctr">
+                      <a:solidFill>
+                        <a:srgbClr val="D8DEEC"/>
+                      </a:solidFill>
+                      <a:prstDash val="solid"/>
+                      <a:round/>
+                      <a:headEnd type="none" w="med" len="med"/>
+                      <a:tailEnd type="none" w="med" len="med"/>
+                    </a:lnB>
+                    <a:solidFill>
+                      <a:srgbClr val="FFFFFF"/>
+                    </a:solidFill>
+                  </a:tcPr>
+                </a:tc>
+                <a:tc>
+                  <a:txBody>
+                    <a:bodyPr/>
+                    <a:lstStyle/>
+                    <a:p>
+                      <a:pPr marL="0" indent="0">
+                        <a:buNone/>
+                      </a:pPr>
+                      <a:r>
+                        <a:rPr lang="en-US" sz="1200" dirty="0">
+                          <a:solidFill>
+                            <a:srgbClr val="262A3F"/>
+                          </a:solidFill>
+                        </a:rPr>
+                        <a:t>1,225 unique values</a:t>
+                      </a:r>
+                      <a:endParaRPr lang="en-US" sz="1200" dirty="0"/>
+                    </a:p>
+                  </a:txBody>
+                  <a:tcPr anchor="ctr">
+                    <a:lnL w="9525" cap="flat" cmpd="sng" algn="ctr">
+                      <a:solidFill>
+                        <a:srgbClr val="D8DEEC"/>
+                      </a:solidFill>
+                      <a:prstDash val="solid"/>
+                      <a:round/>
+                      <a:headEnd type="none" w="med" len="med"/>
+                      <a:tailEnd type="none" w="med" len="med"/>
+                    </a:lnL>
+                    <a:lnR w="9525" cap="flat" cmpd="sng" algn="ctr">
+                      <a:solidFill>
+                        <a:srgbClr val="D8DEEC"/>
+                      </a:solidFill>
+                      <a:prstDash val="solid"/>
+                      <a:round/>
+                      <a:headEnd type="none" w="med" len="med"/>
+                      <a:tailEnd type="none" w="med" len="med"/>
+                    </a:lnR>
+                    <a:lnT w="9525" cap="flat" cmpd="sng" algn="ctr">
+                      <a:solidFill>
+                        <a:srgbClr val="D8DEEC"/>
+                      </a:solidFill>
+                      <a:prstDash val="solid"/>
+                      <a:round/>
+                      <a:headEnd type="none" w="med" len="med"/>
+                      <a:tailEnd type="none" w="med" len="med"/>
+                    </a:lnT>
+                    <a:lnB w="9525" cap="flat" cmpd="sng" algn="ctr">
+                      <a:solidFill>
+                        <a:srgbClr val="D8DEEC"/>
+                      </a:solidFill>
+                      <a:prstDash val="solid"/>
+                      <a:round/>
+                      <a:headEnd type="none" w="med" len="med"/>
+                      <a:tailEnd type="none" w="med" len="med"/>
+                    </a:lnB>
+                    <a:solidFill>
+                      <a:srgbClr val="FFFFFF"/>
+                    </a:solidFill>
+                  </a:tcPr>
+                </a:tc>
+                <a:tc>
+                  <a:txBody>
+                    <a:bodyPr/>
+                    <a:lstStyle/>
+                    <a:p>
+                      <a:pPr marL="0" indent="0">
+                        <a:buNone/>
+                      </a:pPr>
+                      <a:r>
+                        <a:rPr lang="en-US" sz="1200" dirty="0">
+                          <a:solidFill>
+                            <a:srgbClr val="262A3F"/>
+                          </a:solidFill>
+                        </a:rPr>
+                        <a:t>24 categories</a:t>
+                      </a:r>
+                      <a:endParaRPr lang="en-US" sz="1200" dirty="0"/>
+                    </a:p>
+                  </a:txBody>
+                  <a:tcPr anchor="ctr">
+                    <a:lnL w="9525" cap="flat" cmpd="sng" algn="ctr">
+                      <a:solidFill>
+                        <a:srgbClr val="D8DEEC"/>
+                      </a:solidFill>
+                      <a:prstDash val="solid"/>
+                      <a:round/>
+                      <a:headEnd type="none" w="med" len="med"/>
+                      <a:tailEnd type="none" w="med" len="med"/>
+                    </a:lnL>
+                    <a:lnR w="9525" cap="flat" cmpd="sng" algn="ctr">
+                      <a:solidFill>
+                        <a:srgbClr val="D8DEEC"/>
+                      </a:solidFill>
+                      <a:prstDash val="solid"/>
+                      <a:round/>
+                      <a:headEnd type="none" w="med" len="med"/>
+                      <a:tailEnd type="none" w="med" len="med"/>
+                    </a:lnR>
+                    <a:lnT w="9525" cap="flat" cmpd="sng" algn="ctr">
+                      <a:solidFill>
+                        <a:srgbClr val="D8DEEC"/>
+                      </a:solidFill>
+                      <a:prstDash val="solid"/>
+                      <a:round/>
+                      <a:headEnd type="none" w="med" len="med"/>
+                      <a:tailEnd type="none" w="med" len="med"/>
+                    </a:lnT>
+                    <a:lnB w="9525" cap="flat" cmpd="sng" algn="ctr">
+                      <a:solidFill>
+                        <a:srgbClr val="D8DEEC"/>
+                      </a:solidFill>
+                      <a:prstDash val="solid"/>
+                      <a:round/>
+                      <a:headEnd type="none" w="med" len="med"/>
+                      <a:tailEnd type="none" w="med" len="med"/>
+                    </a:lnB>
+                    <a:solidFill>
+                      <a:srgbClr val="FFFFFF"/>
+                    </a:solidFill>
+                  </a:tcPr>
+                </a:tc>
+                <a:extLst>
+                  <a:ext uri="{0D108BD9-81ED-4DB2-BD59-A6C34878D82A}">
+                    <a16:rowId xmlns:a16="http://schemas.microsoft.com/office/drawing/2014/main" val="10001"/>
+                  </a:ext>
+                </a:extLst>
+              </a:tr>
+              <a:tr h="308610">
+                <a:tc>
+                  <a:txBody>
+                    <a:bodyPr/>
+                    <a:lstStyle/>
+                    <a:p>
+                      <a:pPr marL="0" indent="0">
+                        <a:buNone/>
+                      </a:pPr>
+                      <a:r>
+                        <a:rPr lang="en-US" sz="1200" b="1" dirty="0">
+                          <a:solidFill>
+                            <a:srgbClr val="1E2761"/>
+                          </a:solidFill>
+                        </a:rPr>
+                        <a:t>job_title</a:t>
+                      </a:r>
+                      <a:endParaRPr lang="en-US" sz="1200" dirty="0"/>
+                    </a:p>
+                  </a:txBody>
+                  <a:tcPr anchor="ctr">
+                    <a:lnL w="9525" cap="flat" cmpd="sng" algn="ctr">
+                      <a:solidFill>
+                        <a:srgbClr val="D8DEEC"/>
+                      </a:solidFill>
+                      <a:prstDash val="solid"/>
+                      <a:round/>
+                      <a:headEnd type="none" w="med" len="med"/>
+                      <a:tailEnd type="none" w="med" len="med"/>
+                    </a:lnL>
+                    <a:lnR w="9525" cap="flat" cmpd="sng" algn="ctr">
+                      <a:solidFill>
+                        <a:srgbClr val="D8DEEC"/>
+                      </a:solidFill>
+                      <a:prstDash val="solid"/>
+                      <a:round/>
+                      <a:headEnd type="none" w="med" len="med"/>
+                      <a:tailEnd type="none" w="med" len="med"/>
+                    </a:lnR>
+                    <a:lnT w="9525" cap="flat" cmpd="sng" algn="ctr">
+                      <a:solidFill>
+                        <a:srgbClr val="D8DEEC"/>
+                      </a:solidFill>
+                      <a:prstDash val="solid"/>
+                      <a:round/>
+                      <a:headEnd type="none" w="med" len="med"/>
+                      <a:tailEnd type="none" w="med" len="med"/>
+                    </a:lnT>
+                    <a:lnB w="9525" cap="flat" cmpd="sng" algn="ctr">
+                      <a:solidFill>
+                        <a:srgbClr val="D8DEEC"/>
+                      </a:solidFill>
+                      <a:prstDash val="solid"/>
+                      <a:round/>
+                      <a:headEnd type="none" w="med" len="med"/>
+                      <a:tailEnd type="none" w="med" len="med"/>
+                    </a:lnB>
+                    <a:solidFill>
+                      <a:srgbClr val="F4F6FB"/>
+                    </a:solidFill>
+                  </a:tcPr>
+                </a:tc>
+                <a:tc>
+                  <a:txBody>
+                    <a:bodyPr/>
+                    <a:lstStyle/>
+                    <a:p>
+                      <a:pPr marL="0" indent="0">
+                        <a:buNone/>
+                      </a:pPr>
+                      <a:r>
+                        <a:rPr lang="en-US" sz="1200" dirty="0">
+                          <a:solidFill>
+                            <a:srgbClr val="262A3F"/>
+                          </a:solidFill>
+                        </a:rPr>
+                        <a:t>14,434 unique values</a:t>
+                      </a:r>
+                      <a:endParaRPr lang="en-US" sz="1200" dirty="0"/>
+                    </a:p>
+                  </a:txBody>
+                  <a:tcPr anchor="ctr">
+                    <a:lnL w="9525" cap="flat" cmpd="sng" algn="ctr">
+                      <a:solidFill>
+                        <a:srgbClr val="D8DEEC"/>
+                      </a:solidFill>
+                      <a:prstDash val="solid"/>
+                      <a:round/>
+                      <a:headEnd type="none" w="med" len="med"/>
+                      <a:tailEnd type="none" w="med" len="med"/>
+                    </a:lnL>
+                    <a:lnR w="9525" cap="flat" cmpd="sng" algn="ctr">
+                      <a:solidFill>
+                        <a:srgbClr val="D8DEEC"/>
+                      </a:solidFill>
+                      <a:prstDash val="solid"/>
+                      <a:round/>
+                      <a:headEnd type="none" w="med" len="med"/>
+                      <a:tailEnd type="none" w="med" len="med"/>
+                    </a:lnR>
+                    <a:lnT w="9525" cap="flat" cmpd="sng" algn="ctr">
+                      <a:solidFill>
+                        <a:srgbClr val="D8DEEC"/>
+                      </a:solidFill>
+                      <a:prstDash val="solid"/>
+                      <a:round/>
+                      <a:headEnd type="none" w="med" len="med"/>
+                      <a:tailEnd type="none" w="med" len="med"/>
+                    </a:lnT>
+                    <a:lnB w="9525" cap="flat" cmpd="sng" algn="ctr">
+                      <a:solidFill>
+                        <a:srgbClr val="D8DEEC"/>
+                      </a:solidFill>
+                      <a:prstDash val="solid"/>
+                      <a:round/>
+                      <a:headEnd type="none" w="med" len="med"/>
+                      <a:tailEnd type="none" w="med" len="med"/>
+                    </a:lnB>
+                    <a:solidFill>
+                      <a:srgbClr val="F4F6FB"/>
+                    </a:solidFill>
+                  </a:tcPr>
+                </a:tc>
+                <a:tc>
+                  <a:txBody>
+                    <a:bodyPr/>
+                    <a:lstStyle/>
+                    <a:p>
+                      <a:pPr marL="0" indent="0">
+                        <a:buNone/>
+                      </a:pPr>
+                      <a:r>
+                        <a:rPr lang="en-US" sz="1200" dirty="0">
+                          <a:solidFill>
+                            <a:srgbClr val="262A3F"/>
+                          </a:solidFill>
+                        </a:rPr>
+                        <a:t>41 categories</a:t>
+                      </a:r>
+                      <a:endParaRPr lang="en-US" sz="1200" dirty="0"/>
+                    </a:p>
+                  </a:txBody>
+                  <a:tcPr anchor="ctr">
+                    <a:lnL w="9525" cap="flat" cmpd="sng" algn="ctr">
+                      <a:solidFill>
+                        <a:srgbClr val="D8DEEC"/>
+                      </a:solidFill>
+                      <a:prstDash val="solid"/>
+                      <a:round/>
+                      <a:headEnd type="none" w="med" len="med"/>
+                      <a:tailEnd type="none" w="med" len="med"/>
+                    </a:lnL>
+                    <a:lnR w="9525" cap="flat" cmpd="sng" algn="ctr">
+                      <a:solidFill>
+                        <a:srgbClr val="D8DEEC"/>
+                      </a:solidFill>
+                      <a:prstDash val="solid"/>
+                      <a:round/>
+                      <a:headEnd type="none" w="med" len="med"/>
+                      <a:tailEnd type="none" w="med" len="med"/>
+                    </a:lnR>
+                    <a:lnT w="9525" cap="flat" cmpd="sng" algn="ctr">
+                      <a:solidFill>
+                        <a:srgbClr val="D8DEEC"/>
+                      </a:solidFill>
+                      <a:prstDash val="solid"/>
+                      <a:round/>
+                      <a:headEnd type="none" w="med" len="med"/>
+                      <a:tailEnd type="none" w="med" len="med"/>
+                    </a:lnT>
+                    <a:lnB w="9525" cap="flat" cmpd="sng" algn="ctr">
+                      <a:solidFill>
+                        <a:srgbClr val="D8DEEC"/>
+                      </a:solidFill>
+                      <a:prstDash val="solid"/>
+                      <a:round/>
+                      <a:headEnd type="none" w="med" len="med"/>
+                      <a:tailEnd type="none" w="med" len="med"/>
+                    </a:lnB>
+                    <a:solidFill>
+                      <a:srgbClr val="F4F6FB"/>
+                    </a:solidFill>
+                  </a:tcPr>
+                </a:tc>
+                <a:extLst>
+                  <a:ext uri="{0D108BD9-81ED-4DB2-BD59-A6C34878D82A}">
+                    <a16:rowId xmlns:a16="http://schemas.microsoft.com/office/drawing/2014/main" val="10002"/>
+                  </a:ext>
+                </a:extLst>
+              </a:tr>
+              <a:tr h="308610">
+                <a:tc>
+                  <a:txBody>
+                    <a:bodyPr/>
+                    <a:lstStyle/>
+                    <a:p>
+                      <a:pPr marL="0" indent="0">
+                        <a:buNone/>
+                      </a:pPr>
+                      <a:r>
+                        <a:rPr lang="en-US" sz="1200" b="1" dirty="0">
+                          <a:solidFill>
+                            <a:srgbClr val="1E2761"/>
+                          </a:solidFill>
+                        </a:rPr>
+                        <a:t>country</a:t>
+                      </a:r>
+                      <a:endParaRPr lang="en-US" sz="1200" dirty="0"/>
+                    </a:p>
+                  </a:txBody>
+                  <a:tcPr anchor="ctr">
+                    <a:lnL w="9525" cap="flat" cmpd="sng" algn="ctr">
+                      <a:solidFill>
+                        <a:srgbClr val="D8DEEC"/>
+                      </a:solidFill>
+                      <a:prstDash val="solid"/>
+                      <a:round/>
+                      <a:headEnd type="none" w="med" len="med"/>
+                      <a:tailEnd type="none" w="med" len="med"/>
+                    </a:lnL>
+                    <a:lnR w="9525" cap="flat" cmpd="sng" algn="ctr">
+                      <a:solidFill>
+                        <a:srgbClr val="D8DEEC"/>
+                      </a:solidFill>
+                      <a:prstDash val="solid"/>
+                      <a:round/>
+                      <a:headEnd type="none" w="med" len="med"/>
+                      <a:tailEnd type="none" w="med" len="med"/>
+                    </a:lnR>
+                    <a:lnT w="9525" cap="flat" cmpd="sng" algn="ctr">
+                      <a:solidFill>
+                        <a:srgbClr val="D8DEEC"/>
+                      </a:solidFill>
+                      <a:prstDash val="solid"/>
+                      <a:round/>
+                      <a:headEnd type="none" w="med" len="med"/>
+                      <a:tailEnd type="none" w="med" len="med"/>
+                    </a:lnT>
+                    <a:lnB w="9525" cap="flat" cmpd="sng" algn="ctr">
+                      <a:solidFill>
+                        <a:srgbClr val="D8DEEC"/>
+                      </a:solidFill>
+                      <a:prstDash val="solid"/>
+                      <a:round/>
+                      <a:headEnd type="none" w="med" len="med"/>
+                      <a:tailEnd type="none" w="med" len="med"/>
+                    </a:lnB>
+                    <a:solidFill>
+                      <a:srgbClr val="FFFFFF"/>
+                    </a:solidFill>
+                  </a:tcPr>
+                </a:tc>
+                <a:tc>
+                  <a:txBody>
+                    <a:bodyPr/>
+                    <a:lstStyle/>
+                    <a:p>
+                      <a:pPr marL="0" indent="0">
+                        <a:buNone/>
+                      </a:pPr>
+                      <a:r>
+                        <a:rPr lang="en-US" sz="1200" dirty="0">
+                          <a:solidFill>
+                            <a:srgbClr val="262A3F"/>
+                          </a:solidFill>
+                        </a:rPr>
+                        <a:t>363 unique values</a:t>
+                      </a:r>
+                      <a:endParaRPr lang="en-US" sz="1200" dirty="0"/>
+                    </a:p>
+                  </a:txBody>
+                  <a:tcPr anchor="ctr">
+                    <a:lnL w="9525" cap="flat" cmpd="sng" algn="ctr">
+                      <a:solidFill>
+                        <a:srgbClr val="D8DEEC"/>
+                      </a:solidFill>
+                      <a:prstDash val="solid"/>
+                      <a:round/>
+                      <a:headEnd type="none" w="med" len="med"/>
+                      <a:tailEnd type="none" w="med" len="med"/>
+                    </a:lnL>
+                    <a:lnR w="9525" cap="flat" cmpd="sng" algn="ctr">
+                      <a:solidFill>
+                        <a:srgbClr val="D8DEEC"/>
+                      </a:solidFill>
+                      <a:prstDash val="solid"/>
+                      <a:round/>
+                      <a:headEnd type="none" w="med" len="med"/>
+                      <a:tailEnd type="none" w="med" len="med"/>
+                    </a:lnR>
+                    <a:lnT w="9525" cap="flat" cmpd="sng" algn="ctr">
+                      <a:solidFill>
+                        <a:srgbClr val="D8DEEC"/>
+                      </a:solidFill>
+                      <a:prstDash val="solid"/>
+                      <a:round/>
+                      <a:headEnd type="none" w="med" len="med"/>
+                      <a:tailEnd type="none" w="med" len="med"/>
+                    </a:lnT>
+                    <a:lnB w="9525" cap="flat" cmpd="sng" algn="ctr">
+                      <a:solidFill>
+                        <a:srgbClr val="D8DEEC"/>
+                      </a:solidFill>
+                      <a:prstDash val="solid"/>
+                      <a:round/>
+                      <a:headEnd type="none" w="med" len="med"/>
+                      <a:tailEnd type="none" w="med" len="med"/>
+                    </a:lnB>
+                    <a:solidFill>
+                      <a:srgbClr val="FFFFFF"/>
+                    </a:solidFill>
+                  </a:tcPr>
+                </a:tc>
+                <a:tc>
+                  <a:txBody>
+                    <a:bodyPr/>
+                    <a:lstStyle/>
+                    <a:p>
+                      <a:pPr marL="0" indent="0">
+                        <a:buNone/>
+                      </a:pPr>
+                      <a:r>
+                        <a:rPr lang="en-US" sz="1200" dirty="0">
+                          <a:solidFill>
+                            <a:srgbClr val="262A3F"/>
+                          </a:solidFill>
+                        </a:rPr>
+                        <a:t>11 categories</a:t>
+                      </a:r>
+                      <a:endParaRPr lang="en-US" sz="1200" dirty="0"/>
+                    </a:p>
+                  </a:txBody>
+                  <a:tcPr anchor="ctr">
+                    <a:lnL w="9525" cap="flat" cmpd="sng" algn="ctr">
+                      <a:solidFill>
+                        <a:srgbClr val="D8DEEC"/>
+                      </a:solidFill>
+                      <a:prstDash val="solid"/>
+                      <a:round/>
+                      <a:headEnd type="none" w="med" len="med"/>
+                      <a:tailEnd type="none" w="med" len="med"/>
+                    </a:lnL>
+                    <a:lnR w="9525" cap="flat" cmpd="sng" algn="ctr">
+                      <a:solidFill>
+                        <a:srgbClr val="D8DEEC"/>
+                      </a:solidFill>
+                      <a:prstDash val="solid"/>
+                      <a:round/>
+                      <a:headEnd type="none" w="med" len="med"/>
+                      <a:tailEnd type="none" w="med" len="med"/>
+                    </a:lnR>
+                    <a:lnT w="9525" cap="flat" cmpd="sng" algn="ctr">
+                      <a:solidFill>
+                        <a:srgbClr val="D8DEEC"/>
+                      </a:solidFill>
+                      <a:prstDash val="solid"/>
+                      <a:round/>
+                      <a:headEnd type="none" w="med" len="med"/>
+                      <a:tailEnd type="none" w="med" len="med"/>
+                    </a:lnT>
+                    <a:lnB w="9525" cap="flat" cmpd="sng" algn="ctr">
+                      <a:solidFill>
+                        <a:srgbClr val="D8DEEC"/>
+                      </a:solidFill>
+                      <a:prstDash val="solid"/>
+                      <a:round/>
+                      <a:headEnd type="none" w="med" len="med"/>
+                      <a:tailEnd type="none" w="med" len="med"/>
+                    </a:lnB>
+                    <a:solidFill>
+                      <a:srgbClr val="FFFFFF"/>
+                    </a:solidFill>
+                  </a:tcPr>
+                </a:tc>
+                <a:extLst>
+                  <a:ext uri="{0D108BD9-81ED-4DB2-BD59-A6C34878D82A}">
+                    <a16:rowId xmlns:a16="http://schemas.microsoft.com/office/drawing/2014/main" val="10003"/>
+                  </a:ext>
+                </a:extLst>
+              </a:tr>
+            </a:tbl>
+          </a:graphicData>
+        </a:graphic>
+      </p:graphicFrame>
+      <p:sp>
+        <p:nvSpPr>
+          <p:cNvPr id="5" name="Text 2"/>
+          <p:cNvSpPr/>
+          <p:nvPr/>
+        </p:nvSpPr>
+        <p:spPr>
+          <a:xfrm>
+            <a:off x="548640" y="4160520"/>
+            <a:ext cx="5486400" cy="2011680"/>
+          </a:xfrm>
+          <a:prstGeom prst="rect">
+            <a:avLst/>
+          </a:prstGeom>
+          <a:noFill/>
+          <a:ln/>
+        </p:spPr>
+        <p:txBody>
+          <a:bodyPr wrap="square" lIns="0" tIns="0" rIns="0" bIns="0" rtlCol="0" anchor="ctr"/>
+          <a:lstStyle/>
+          <a:p>
+            <a:pPr marL="228600" indent="-228600">
+              <a:lnSpc>
+                <a:spcPts val="1600"/>
+              </a:lnSpc>
+              <a:spcAft>
+                <a:spcPts val="1000"/>
+              </a:spcAft>
+              <a:buSzPct val="100000"/>
+              <a:buChar char="•"/>
+            </a:pPr>
+            <a:r>
+              <a:rPr lang="en-US" sz="1450" dirty="0">
+                <a:solidFill>
+                  <a:srgbClr val="262A3F"/>
+                </a:solidFill>
+                <a:latin typeface="Calibri" pitchFamily="34" charset="0"/>
+                <a:ea typeface="Calibri" pitchFamily="34" charset="-122"/>
+                <a:cs typeface="Calibri" pitchFamily="34" charset="-120"/>
+              </a:rPr>
+              <a:t>Salary field stored as text with commas (“55,000”) — converted to numeric.</a:t>
+            </a:r>
+            <a:endParaRPr lang="en-US" sz="1450" dirty="0"/>
+          </a:p>
+          <a:p>
+            <a:pPr marL="228600" indent="-228600">
+              <a:lnSpc>
+                <a:spcPts val="1600"/>
+              </a:lnSpc>
+              <a:spcAft>
+                <a:spcPts val="1000"/>
+              </a:spcAft>
+              <a:buSzPct val="100000"/>
+              <a:buChar char="•"/>
+            </a:pPr>
+            <a:r>
+              <a:rPr lang="en-US" sz="1450" dirty="0">
+                <a:solidFill>
+                  <a:srgbClr val="262A3F"/>
+                </a:solidFill>
+                <a:latin typeface="Calibri" pitchFamily="34" charset="0"/>
+                <a:ea typeface="Calibri" pitchFamily="34" charset="-122"/>
+                <a:cs typeface="Calibri" pitchFamily="34" charset="-120"/>
+              </a:rPr>
+              <a:t>Currency: dropped the ~0.6% of rows with Other/unspecified currency — no reliable value to compare.</a:t>
+            </a:r>
+            <a:endParaRPr lang="en-US" sz="1450" dirty="0"/>
+          </a:p>
+          <a:p>
+            <a:pPr marL="228600" indent="-228600">
+              <a:lnSpc>
+                <a:spcPts val="1600"/>
+              </a:lnSpc>
+              <a:spcAft>
+                <a:spcPts val="1000"/>
+              </a:spcAft>
+              <a:buSzPct val="100000"/>
+              <a:buChar char="•"/>
+            </a:pPr>
+            <a:r>
+              <a:rPr lang="en-US" sz="1450" dirty="0">
+                <a:solidFill>
+                  <a:srgbClr val="262A3F"/>
+                </a:solidFill>
+                <a:latin typeface="Calibri" pitchFamily="34" charset="0"/>
+                <a:ea typeface="Calibri" pitchFamily="34" charset="-122"/>
+                <a:cs typeface="Calibri" pitchFamily="34" charset="-120"/>
+              </a:rPr>
+              <a:t>Missing data handled deliberately: education &amp; gender nulls (&lt;1%) labeled “Not Specified,” not imputed — avoids fabricating demographic data.</a:t>
+            </a:r>
+            <a:endParaRPr lang="en-US" sz="1450" dirty="0"/>
+          </a:p>
+        </p:txBody>
+      </p:sp>
+      <p:sp>
+        <p:nvSpPr>
+          <p:cNvPr id="6" name="Shape 3"/>
+          <p:cNvSpPr/>
+          <p:nvPr/>
+        </p:nvSpPr>
+        <p:spPr>
+          <a:xfrm>
+            <a:off x="6419088" y="2290572"/>
+            <a:ext cx="5193792" cy="2011680"/>
+          </a:xfrm>
+          <a:prstGeom prst="roundRect">
+            <a:avLst>
+              <a:gd name="adj" fmla="val 3137"/>
+            </a:avLst>
+          </a:prstGeom>
+          <a:solidFill>
+            <a:srgbClr val="FBF1E7"/>
+          </a:solidFill>
+          <a:ln w="12700">
+            <a:solidFill>
+              <a:srgbClr val="C9A24B"/>
+            </a:solidFill>
+            <a:prstDash val="solid"/>
+          </a:ln>
+        </p:spPr>
+        <p:txBody>
+          <a:bodyPr/>
+          <a:lstStyle/>
+          <a:p>
+            <a:endParaRPr lang="en-PH" dirty="0"/>
+          </a:p>
+        </p:txBody>
+      </p:sp>
+      <p:sp>
+        <p:nvSpPr>
+          <p:cNvPr id="7" name="Text 4"/>
+          <p:cNvSpPr/>
+          <p:nvPr/>
+        </p:nvSpPr>
+        <p:spPr>
+          <a:xfrm>
+            <a:off x="6675120" y="2383446"/>
+            <a:ext cx="4762474" cy="236668"/>
+          </a:xfrm>
+          <a:prstGeom prst="rect">
+            <a:avLst/>
+          </a:prstGeom>
+          <a:noFill/>
+          <a:ln/>
+        </p:spPr>
+        <p:txBody>
+          <a:bodyPr wrap="square" lIns="0" tIns="0" rIns="0" bIns="0" rtlCol="0" anchor="ctr"/>
+          <a:lstStyle/>
+          <a:p>
+            <a:pPr marL="0" indent="0">
+              <a:buNone/>
+            </a:pPr>
+            <a:r>
+              <a:rPr lang="en-US" sz="1150" b="1" kern="0" spc="150" dirty="0">
+                <a:solidFill>
+                  <a:srgbClr val="C9A24B"/>
+                </a:solidFill>
+                <a:latin typeface="Calibri" pitchFamily="34" charset="0"/>
+                <a:ea typeface="Calibri" pitchFamily="34" charset="-122"/>
+                <a:cs typeface="Calibri" pitchFamily="34" charset="-120"/>
+              </a:rPr>
+              <a:t>OUTLIER HANDLING</a:t>
+            </a:r>
+            <a:endParaRPr lang="en-US" sz="1150" dirty="0"/>
+          </a:p>
+        </p:txBody>
+      </p:sp>
+      <p:sp>
+        <p:nvSpPr>
+          <p:cNvPr id="8" name="Text 5"/>
+          <p:cNvSpPr/>
+          <p:nvPr/>
+        </p:nvSpPr>
+        <p:spPr>
+          <a:xfrm>
+            <a:off x="6675120" y="2584076"/>
+            <a:ext cx="4762474" cy="867784"/>
+          </a:xfrm>
+          <a:prstGeom prst="rect">
+            <a:avLst/>
+          </a:prstGeom>
+          <a:noFill/>
+          <a:ln/>
+        </p:spPr>
+        <p:txBody>
+          <a:bodyPr wrap="square" lIns="0" tIns="0" rIns="0" bIns="0" rtlCol="0" anchor="ctr"/>
+          <a:lstStyle/>
+          <a:p>
+            <a:r>
+              <a:rPr lang="en-PH" sz="1400" dirty="0"/>
+              <a:t>Salaries outside the $10,000–$2,000,000 range were flagged using a fixed rule, instead of a statistical one that could misfire on skewed income data.</a:t>
+            </a:r>
+            <a:endParaRPr lang="en-US" sz="1300" dirty="0"/>
+          </a:p>
+        </p:txBody>
+      </p:sp>
+      <p:sp>
+        <p:nvSpPr>
+          <p:cNvPr id="9" name="Text 6"/>
+          <p:cNvSpPr/>
+          <p:nvPr/>
+        </p:nvSpPr>
+        <p:spPr>
+          <a:xfrm>
+            <a:off x="6675120" y="3506634"/>
+            <a:ext cx="4762474" cy="315558"/>
+          </a:xfrm>
+          <a:prstGeom prst="rect">
+            <a:avLst/>
+          </a:prstGeom>
+          <a:noFill/>
+          <a:ln/>
+        </p:spPr>
+        <p:txBody>
+          <a:bodyPr wrap="square" lIns="0" tIns="0" rIns="0" bIns="0" rtlCol="0" anchor="ctr"/>
+          <a:lstStyle/>
+          <a:p>
+            <a:pPr marL="0" indent="0">
+              <a:buNone/>
+            </a:pPr>
+            <a:r>
+              <a:rPr lang="en-US" sz="1500" b="1" dirty="0">
+                <a:solidFill>
+                  <a:srgbClr val="B4483C"/>
+                </a:solidFill>
+                <a:latin typeface="Calibri" pitchFamily="34" charset="0"/>
+                <a:ea typeface="Calibri" pitchFamily="34" charset="-122"/>
+                <a:cs typeface="Calibri" pitchFamily="34" charset="-120"/>
+              </a:rPr>
+              <a:t>208 rows </a:t>
+            </a:r>
+            <a:r>
+              <a:rPr lang="en-US" sz="1300" dirty="0">
+                <a:solidFill>
+                  <a:srgbClr val="6B7280"/>
+                </a:solidFill>
+                <a:latin typeface="Calibri" pitchFamily="34" charset="0"/>
+                <a:ea typeface="Calibri" pitchFamily="34" charset="-122"/>
+                <a:cs typeface="Calibri" pitchFamily="34" charset="-120"/>
+              </a:rPr>
+              <a:t>removed (0.74%)</a:t>
+            </a:r>
+            <a:endParaRPr lang="en-US" sz="1500" dirty="0"/>
+          </a:p>
+        </p:txBody>
+      </p:sp>
+      <p:sp>
+        <p:nvSpPr>
+          <p:cNvPr id="10" name="Shape 7"/>
+          <p:cNvSpPr/>
+          <p:nvPr/>
+        </p:nvSpPr>
+        <p:spPr>
+          <a:xfrm>
+            <a:off x="6419088" y="4389120"/>
+            <a:ext cx="5285232" cy="2103120"/>
+          </a:xfrm>
+          <a:prstGeom prst="roundRect">
+            <a:avLst>
+              <a:gd name="adj" fmla="val 3478"/>
+            </a:avLst>
+          </a:prstGeom>
+          <a:solidFill>
+            <a:srgbClr val="1E2761"/>
+          </a:solidFill>
+          <a:ln/>
+        </p:spPr>
+      </p:sp>
+      <p:sp>
+        <p:nvSpPr>
+          <p:cNvPr id="11" name="Text 8"/>
+          <p:cNvSpPr/>
+          <p:nvPr/>
+        </p:nvSpPr>
+        <p:spPr>
+          <a:xfrm>
+            <a:off x="6647688" y="4553712"/>
+            <a:ext cx="4846320" cy="274320"/>
+          </a:xfrm>
+          <a:prstGeom prst="rect">
+            <a:avLst/>
+          </a:prstGeom>
+          <a:noFill/>
+          <a:ln/>
+        </p:spPr>
+        <p:txBody>
+          <a:bodyPr wrap="square" lIns="0" tIns="0" rIns="0" bIns="0" rtlCol="0" anchor="ctr"/>
+          <a:lstStyle/>
+          <a:p>
+            <a:pPr marL="0" indent="0">
+              <a:buNone/>
+            </a:pPr>
+            <a:r>
+              <a:rPr lang="en-US" sz="1150" b="1" kern="0" spc="150" dirty="0">
+                <a:solidFill>
+                  <a:srgbClr val="C9A24B"/>
+                </a:solidFill>
+                <a:latin typeface="Calibri" pitchFamily="34" charset="0"/>
+                <a:ea typeface="Calibri" pitchFamily="34" charset="-122"/>
+                <a:cs typeface="Calibri" pitchFamily="34" charset="-120"/>
+              </a:rPr>
+              <a:t>FINAL ANALYSIS-READY DATASET</a:t>
+            </a:r>
+            <a:endParaRPr lang="en-US" sz="1150" dirty="0"/>
+          </a:p>
+        </p:txBody>
+      </p:sp>
+      <p:sp>
+        <p:nvSpPr>
+          <p:cNvPr id="12" name="Text 9"/>
+          <p:cNvSpPr/>
+          <p:nvPr/>
+        </p:nvSpPr>
+        <p:spPr>
+          <a:xfrm>
+            <a:off x="6647688" y="4846320"/>
+            <a:ext cx="4846320" cy="502920"/>
+          </a:xfrm>
+          <a:prstGeom prst="rect">
+            <a:avLst/>
+          </a:prstGeom>
+          <a:noFill/>
+          <a:ln/>
+        </p:spPr>
+        <p:txBody>
+          <a:bodyPr wrap="square" lIns="0" tIns="0" rIns="0" bIns="0" rtlCol="0" anchor="ctr"/>
+          <a:lstStyle/>
+          <a:p>
+            <a:pPr marL="0" indent="0">
+              <a:buNone/>
+            </a:pPr>
+            <a:r>
+              <a:rPr lang="en-US" sz="2400" b="1" dirty="0">
+                <a:solidFill>
+                  <a:srgbClr val="FFFFFF"/>
+                </a:solidFill>
+                <a:latin typeface="Cambria" pitchFamily="34" charset="0"/>
+                <a:ea typeface="Cambria" pitchFamily="34" charset="-122"/>
+                <a:cs typeface="Cambria" pitchFamily="34" charset="-120"/>
+              </a:rPr>
+              <a:t>27,841 rows × 9 columns</a:t>
+            </a:r>
+            <a:endParaRPr lang="en-US" sz="2400" dirty="0"/>
+          </a:p>
+        </p:txBody>
+      </p:sp>
+      <p:sp>
+        <p:nvSpPr>
+          <p:cNvPr id="13" name="Text 10"/>
+          <p:cNvSpPr/>
+          <p:nvPr/>
+        </p:nvSpPr>
+        <p:spPr>
+          <a:xfrm>
+            <a:off x="6647688" y="5394960"/>
+            <a:ext cx="4846320" cy="914400"/>
+          </a:xfrm>
+          <a:prstGeom prst="rect">
+            <a:avLst/>
+          </a:prstGeom>
+          <a:noFill/>
+          <a:ln/>
+        </p:spPr>
+        <p:txBody>
+          <a:bodyPr wrap="square" lIns="0" tIns="0" rIns="0" bIns="0" rtlCol="0" anchor="ctr"/>
+          <a:lstStyle/>
+          <a:p>
+            <a:pPr marL="0" indent="0">
+              <a:lnSpc>
+                <a:spcPts val="1700"/>
+              </a:lnSpc>
+              <a:buNone/>
+            </a:pPr>
+            <a:r>
+              <a:rPr lang="en-US" sz="1300" dirty="0">
+                <a:solidFill>
+                  <a:srgbClr val="CADCFC"/>
+                </a:solidFill>
+                <a:latin typeface="Calibri" pitchFamily="34" charset="0"/>
+                <a:ea typeface="Calibri" pitchFamily="34" charset="-122"/>
+                <a:cs typeface="Calibri" pitchFamily="34" charset="-120"/>
+              </a:rPr>
+              <a:t>Fully typed (categoricals, ordered categoricals for age &amp; experience) — zero remaining nulls.</a:t>
+            </a:r>
+            <a:endParaRPr lang="en-US" sz="1300" dirty="0"/>
+          </a:p>
+        </p:txBody>
+      </p:sp>
+      <p:sp>
+        <p:nvSpPr>
+          <p:cNvPr id="14" name="Text 11"/>
+          <p:cNvSpPr/>
+          <p:nvPr/>
+        </p:nvSpPr>
+        <p:spPr>
+          <a:xfrm>
+            <a:off x="548640" y="6528816"/>
+            <a:ext cx="7315200" cy="274320"/>
+          </a:xfrm>
+          <a:prstGeom prst="rect">
+            <a:avLst/>
+          </a:prstGeom>
+          <a:noFill/>
+          <a:ln/>
+        </p:spPr>
+        <p:txBody>
+          <a:bodyPr wrap="square" lIns="0" tIns="0" rIns="0" bIns="0" rtlCol="0" anchor="ctr"/>
+          <a:lstStyle/>
+          <a:p>
+            <a:pPr marL="0" indent="0">
+              <a:buNone/>
+            </a:pPr>
+            <a:r>
+              <a:rPr lang="en-US" sz="900" dirty="0">
+                <a:solidFill>
+                  <a:srgbClr val="6B7280"/>
+                </a:solidFill>
+                <a:latin typeface="Calibri" pitchFamily="34" charset="0"/>
+                <a:ea typeface="Calibri" pitchFamily="34" charset="-122"/>
+                <a:cs typeface="Calibri" pitchFamily="34" charset="-120"/>
+              </a:rPr>
+              <a:t>2021 Salary Survey — Key Points</a:t>
+            </a:r>
+            <a:endParaRPr lang="en-US" sz="900" dirty="0"/>
+          </a:p>
+        </p:txBody>
+      </p:sp>
+      <p:sp>
+        <p:nvSpPr>
+          <p:cNvPr id="15" name="Text 12"/>
+          <p:cNvSpPr/>
+          <p:nvPr/>
+        </p:nvSpPr>
+        <p:spPr>
+          <a:xfrm>
+            <a:off x="11338560" y="6528816"/>
+            <a:ext cx="365760" cy="274320"/>
+          </a:xfrm>
+          <a:prstGeom prst="rect">
+            <a:avLst/>
+          </a:prstGeom>
+          <a:noFill/>
+          <a:ln/>
+        </p:spPr>
+        <p:txBody>
+          <a:bodyPr wrap="square" lIns="0" tIns="0" rIns="0" bIns="0" rtlCol="0" anchor="ctr"/>
+          <a:lstStyle/>
+          <a:p>
+            <a:pPr marL="0" indent="0" algn="r">
+              <a:buNone/>
+            </a:pPr>
+            <a:r>
+              <a:rPr lang="en-US" sz="900" dirty="0">
+                <a:solidFill>
+                  <a:srgbClr val="6B7280"/>
+                </a:solidFill>
+                <a:latin typeface="Calibri" pitchFamily="34" charset="0"/>
+                <a:ea typeface="Calibri" pitchFamily="34" charset="-122"/>
+                <a:cs typeface="Calibri" pitchFamily="34" charset="-120"/>
+              </a:rPr>
+              <a:t>3</a:t>
+            </a:r>
+            <a:endParaRPr lang="en-US" sz="900" dirty="0"/>
+          </a:p>
+        </p:txBody>
+      </p:sp>
+      <p:sp>
+        <p:nvSpPr>
+          <p:cNvPr id="17" name="Text 6">
+            <a:extLst>
+              <a:ext uri="{FF2B5EF4-FFF2-40B4-BE49-F238E27FC236}">
+                <a16:creationId xmlns:a16="http://schemas.microsoft.com/office/drawing/2014/main" id="{E5C54717-F367-4C64-3140-468714DB1779}"/>
+              </a:ext>
+            </a:extLst>
+          </p:cNvPr>
+          <p:cNvSpPr/>
+          <p:nvPr/>
+        </p:nvSpPr>
+        <p:spPr>
+          <a:xfrm>
+            <a:off x="6547104" y="808763"/>
+            <a:ext cx="4937760" cy="274320"/>
+          </a:xfrm>
+          <a:prstGeom prst="rect">
+            <a:avLst/>
+          </a:prstGeom>
+          <a:noFill/>
+          <a:ln/>
+        </p:spPr>
+        <p:txBody>
+          <a:bodyPr wrap="square" lIns="0" tIns="0" rIns="0" bIns="0" rtlCol="0" anchor="ctr"/>
+          <a:lstStyle/>
+          <a:p>
+            <a:pPr marL="0" indent="0">
+              <a:buNone/>
+            </a:pPr>
+            <a:r>
+              <a:rPr lang="en-US" sz="1050" b="1" kern="0" spc="100" dirty="0">
+                <a:solidFill>
+                  <a:srgbClr val="C9A24B"/>
+                </a:solidFill>
+                <a:latin typeface="Calibri" pitchFamily="34" charset="0"/>
+                <a:ea typeface="Calibri" pitchFamily="34" charset="-122"/>
+                <a:cs typeface="Calibri" pitchFamily="34" charset="-120"/>
+              </a:rPr>
+              <a:t>EXAMPLE RAW COLUMN NAME</a:t>
+            </a:r>
+            <a:endParaRPr lang="en-US" sz="1050" dirty="0"/>
+          </a:p>
+        </p:txBody>
+      </p:sp>
+      <p:sp>
+        <p:nvSpPr>
+          <p:cNvPr id="19" name="Text 7">
+            <a:extLst>
+              <a:ext uri="{FF2B5EF4-FFF2-40B4-BE49-F238E27FC236}">
+                <a16:creationId xmlns:a16="http://schemas.microsoft.com/office/drawing/2014/main" id="{9E2730CA-0C13-0291-58EC-81A10F44E50A}"/>
+              </a:ext>
+            </a:extLst>
+          </p:cNvPr>
+          <p:cNvSpPr/>
+          <p:nvPr/>
+        </p:nvSpPr>
+        <p:spPr>
+          <a:xfrm>
+            <a:off x="6556248" y="835874"/>
+            <a:ext cx="4937760" cy="1097280"/>
+          </a:xfrm>
+          <a:prstGeom prst="rect">
+            <a:avLst/>
+          </a:prstGeom>
+          <a:noFill/>
+          <a:ln/>
+        </p:spPr>
+        <p:txBody>
+          <a:bodyPr wrap="square" lIns="0" tIns="0" rIns="0" bIns="0" rtlCol="0" anchor="ctr"/>
+          <a:lstStyle/>
+          <a:p>
+            <a:pPr marL="0" indent="0">
+              <a:lnSpc>
+                <a:spcPts val="1300"/>
+              </a:lnSpc>
+              <a:buNone/>
+            </a:pPr>
+            <a:r>
+              <a:rPr lang="en-US" sz="1050" i="1" dirty="0">
+                <a:solidFill>
+                  <a:srgbClr val="6B7280"/>
+                </a:solidFill>
+                <a:latin typeface="Calibri" pitchFamily="34" charset="0"/>
+                <a:ea typeface="Calibri" pitchFamily="34" charset="-122"/>
+                <a:cs typeface="Calibri" pitchFamily="34" charset="-120"/>
+              </a:rPr>
+              <a:t>“What is your annual salary? (You'll indicate the currency in a later question. If you are part-time or hourly, please enter an annualized equivalent — what you would earn if you worked the job 40 hours a week, 52 weeks a year.)”</a:t>
+            </a:r>
+            <a:endParaRPr lang="en-US" sz="1050" dirty="0"/>
+          </a:p>
+        </p:txBody>
+      </p:sp>
+      <p:sp>
+        <p:nvSpPr>
+          <p:cNvPr id="21" name="Text 8">
+            <a:extLst>
+              <a:ext uri="{FF2B5EF4-FFF2-40B4-BE49-F238E27FC236}">
+                <a16:creationId xmlns:a16="http://schemas.microsoft.com/office/drawing/2014/main" id="{56A83B3B-023B-1465-44B2-2DA23AD66FFB}"/>
+              </a:ext>
+            </a:extLst>
+          </p:cNvPr>
+          <p:cNvSpPr/>
+          <p:nvPr/>
+        </p:nvSpPr>
+        <p:spPr>
+          <a:xfrm>
+            <a:off x="6565392" y="1673513"/>
+            <a:ext cx="4937760" cy="274320"/>
+          </a:xfrm>
+          <a:prstGeom prst="rect">
+            <a:avLst/>
+          </a:prstGeom>
+          <a:noFill/>
+          <a:ln/>
+        </p:spPr>
+        <p:txBody>
+          <a:bodyPr wrap="square" lIns="0" tIns="0" rIns="0" bIns="0" rtlCol="0" anchor="ctr"/>
+          <a:lstStyle/>
+          <a:p>
+            <a:pPr marL="0" indent="0">
+              <a:buNone/>
+            </a:pPr>
+            <a:r>
+              <a:rPr lang="en-US" sz="1100" b="1" dirty="0">
+                <a:solidFill>
+                  <a:srgbClr val="1E2761"/>
+                </a:solidFill>
+                <a:latin typeface="Calibri" pitchFamily="34" charset="0"/>
+                <a:ea typeface="Calibri" pitchFamily="34" charset="-122"/>
+                <a:cs typeface="Calibri" pitchFamily="34" charset="-120"/>
+              </a:rPr>
+              <a:t>→ renamed to: annual_salary</a:t>
+            </a:r>
+            <a:endParaRPr lang="en-US" sz="1100" dirty="0"/>
+          </a:p>
+        </p:txBody>
+      </p:sp>
+    </p:spTree>
+  </p:cSld>
+  <p:clrMapOvr>
+    <a:masterClrMapping/>
+  </p:clrMapOvr>
+</p:sld>
+</file>
+
+<file path=ppt/slides/slide5.xml><?xml version="1.0" encoding="utf-8"?>
+<p:sld xmlns:a="http://schemas.openxmlformats.org/drawingml/2006/main" xmlns:r="http://schemas.openxmlformats.org/officeDocument/2006/relationships" xmlns:p="http://schemas.openxmlformats.org/presentationml/2006/main">
+  <p:cSld>
+    <p:spTree>
+      <p:nvGrpSpPr>
+        <p:cNvPr id="1" name=""/>
+        <p:cNvGrpSpPr/>
+        <p:nvPr/>
+      </p:nvGrpSpPr>
+      <p:grpSpPr>
+        <a:xfrm>
+          <a:off x="0" y="0"/>
+          <a:ext cx="0" cy="0"/>
+          <a:chOff x="0" y="0"/>
+          <a:chExt cx="0" cy="0"/>
+        </a:xfrm>
+      </p:grpSpPr>
+      <p:pic>
+        <p:nvPicPr>
+          <p:cNvPr id="5" name="Picture 4">
+            <a:extLst>
+              <a:ext uri="{FF2B5EF4-FFF2-40B4-BE49-F238E27FC236}">
+                <a16:creationId xmlns:a16="http://schemas.microsoft.com/office/drawing/2014/main" id="{4054B3BB-397F-9BE3-3915-75892DF41D73}"/>
+              </a:ext>
+            </a:extLst>
+          </p:cNvPr>
+          <p:cNvPicPr>
+            <a:picLocks noChangeAspect="1"/>
+          </p:cNvPicPr>
+          <p:nvPr/>
+        </p:nvPicPr>
+        <p:blipFill>
+          <a:blip r:embed="rId2"/>
+          <a:stretch>
+            <a:fillRect/>
+          </a:stretch>
+        </p:blipFill>
+        <p:spPr>
+          <a:xfrm>
+            <a:off x="127448" y="961711"/>
+            <a:ext cx="8885213" cy="3011835"/>
+          </a:xfrm>
+          <a:prstGeom prst="rect">
+            <a:avLst/>
+          </a:prstGeom>
+        </p:spPr>
+      </p:pic>
+      <p:sp>
+        <p:nvSpPr>
+          <p:cNvPr id="7" name="Text 0">
+            <a:extLst>
+              <a:ext uri="{FF2B5EF4-FFF2-40B4-BE49-F238E27FC236}">
+                <a16:creationId xmlns:a16="http://schemas.microsoft.com/office/drawing/2014/main" id="{96AB7257-E155-2CD2-276F-C3E4663E90A2}"/>
+              </a:ext>
+            </a:extLst>
+          </p:cNvPr>
+          <p:cNvSpPr/>
+          <p:nvPr/>
+        </p:nvSpPr>
+        <p:spPr>
+          <a:xfrm>
+            <a:off x="175574" y="323248"/>
+            <a:ext cx="11064240" cy="731520"/>
+          </a:xfrm>
+          <a:prstGeom prst="rect">
+            <a:avLst/>
+          </a:prstGeom>
+          <a:noFill/>
+          <a:ln/>
+        </p:spPr>
+        <p:txBody>
+          <a:bodyPr wrap="square" lIns="0" tIns="0" rIns="0" bIns="0" rtlCol="0" anchor="ctr"/>
+          <a:lstStyle/>
+          <a:p>
+            <a:pPr marL="0" indent="0">
+              <a:buNone/>
+            </a:pPr>
+            <a:r>
+              <a:rPr lang="en-US" sz="3000" b="1" dirty="0">
+                <a:solidFill>
+                  <a:srgbClr val="1E2761"/>
+                </a:solidFill>
+                <a:latin typeface="Cambria" pitchFamily="34" charset="0"/>
+                <a:ea typeface="Cambria" pitchFamily="34" charset="-122"/>
+              </a:rPr>
+              <a:t>Data Raw Columns</a:t>
+            </a:r>
+            <a:endParaRPr lang="en-US" sz="3000" dirty="0"/>
+          </a:p>
+        </p:txBody>
+      </p:sp>
+      <p:pic>
+        <p:nvPicPr>
+          <p:cNvPr id="9" name="Picture 8">
+            <a:extLst>
+              <a:ext uri="{FF2B5EF4-FFF2-40B4-BE49-F238E27FC236}">
+                <a16:creationId xmlns:a16="http://schemas.microsoft.com/office/drawing/2014/main" id="{F2F6A636-BB52-7A48-7906-BDADA8782EEE}"/>
+              </a:ext>
+            </a:extLst>
+          </p:cNvPr>
+          <p:cNvPicPr>
+            <a:picLocks noChangeAspect="1"/>
+          </p:cNvPicPr>
+          <p:nvPr/>
+        </p:nvPicPr>
+        <p:blipFill>
+          <a:blip r:embed="rId3"/>
+          <a:stretch>
+            <a:fillRect/>
+          </a:stretch>
+        </p:blipFill>
+        <p:spPr>
+          <a:xfrm>
+            <a:off x="175574" y="4473246"/>
+            <a:ext cx="2400508" cy="2194750"/>
+          </a:xfrm>
+          <a:prstGeom prst="rect">
+            <a:avLst/>
+          </a:prstGeom>
+        </p:spPr>
+      </p:pic>
+      <p:sp>
+        <p:nvSpPr>
+          <p:cNvPr id="11" name="Text 0">
+            <a:extLst>
+              <a:ext uri="{FF2B5EF4-FFF2-40B4-BE49-F238E27FC236}">
+                <a16:creationId xmlns:a16="http://schemas.microsoft.com/office/drawing/2014/main" id="{6B832414-40B5-3142-17B7-174100E7E342}"/>
+              </a:ext>
+            </a:extLst>
+          </p:cNvPr>
+          <p:cNvSpPr/>
+          <p:nvPr/>
+        </p:nvSpPr>
+        <p:spPr>
+          <a:xfrm>
+            <a:off x="175574" y="3870062"/>
+            <a:ext cx="3743425" cy="731520"/>
+          </a:xfrm>
+          <a:prstGeom prst="rect">
+            <a:avLst/>
+          </a:prstGeom>
+          <a:noFill/>
+          <a:ln/>
+        </p:spPr>
+        <p:txBody>
+          <a:bodyPr wrap="square" lIns="0" tIns="0" rIns="0" bIns="0" rtlCol="0" anchor="ctr"/>
+          <a:lstStyle/>
+          <a:p>
+            <a:pPr marL="0" indent="0">
+              <a:buNone/>
+            </a:pPr>
+            <a:r>
+              <a:rPr lang="en-US" sz="3000" b="1" dirty="0">
+                <a:solidFill>
+                  <a:srgbClr val="1E2761"/>
+                </a:solidFill>
+                <a:latin typeface="Cambria" pitchFamily="34" charset="0"/>
+                <a:ea typeface="Cambria" pitchFamily="34" charset="-122"/>
+              </a:rPr>
+              <a:t>After Data Cleaning</a:t>
+            </a:r>
+            <a:endParaRPr lang="en-US" sz="3000" dirty="0"/>
+          </a:p>
+        </p:txBody>
+      </p:sp>
+    </p:spTree>
+    <p:extLst>
+      <p:ext uri="{BB962C8B-B14F-4D97-AF65-F5344CB8AC3E}">
+        <p14:creationId xmlns:p14="http://schemas.microsoft.com/office/powerpoint/2010/main" val="3388236501"/>
+      </p:ext>
+    </p:extLst>
+  </p:cSld>
+  <p:clrMapOvr>
+    <a:masterClrMapping/>
+  </p:clrMapOvr>
+</p:sld>
+</file>
+
+<file path=ppt/slides/slide6.xml><?xml version="1.0" encoding="utf-8"?>
+<p:sld xmlns:a="http://schemas.openxmlformats.org/drawingml/2006/main" xmlns:r="http://schemas.openxmlformats.org/officeDocument/2006/relationships" xmlns:p="http://schemas.openxmlformats.org/presentationml/2006/main">
+  <p:cSld>
+    <p:spTree>
+      <p:nvGrpSpPr>
+        <p:cNvPr id="1" name=""/>
+        <p:cNvGrpSpPr/>
+        <p:nvPr/>
+      </p:nvGrpSpPr>
+      <p:grpSpPr>
+        <a:xfrm>
+          <a:off x="0" y="0"/>
+          <a:ext cx="0" cy="0"/>
+          <a:chOff x="0" y="0"/>
+          <a:chExt cx="0" cy="0"/>
+        </a:xfrm>
+      </p:grpSpPr>
+      <p:pic>
+        <p:nvPicPr>
+          <p:cNvPr id="3" name="Picture 2">
+            <a:extLst>
+              <a:ext uri="{FF2B5EF4-FFF2-40B4-BE49-F238E27FC236}">
+                <a16:creationId xmlns:a16="http://schemas.microsoft.com/office/drawing/2014/main" id="{46C1D9DA-8940-4E76-3545-6A0D87E60E33}"/>
+              </a:ext>
+            </a:extLst>
+          </p:cNvPr>
+          <p:cNvPicPr>
+            <a:picLocks noChangeAspect="1"/>
+          </p:cNvPicPr>
+          <p:nvPr/>
+        </p:nvPicPr>
+        <p:blipFill>
+          <a:blip r:embed="rId2"/>
+          <a:stretch>
+            <a:fillRect/>
+          </a:stretch>
+        </p:blipFill>
+        <p:spPr>
+          <a:xfrm>
+            <a:off x="651038" y="845596"/>
+            <a:ext cx="10889924" cy="5166808"/>
+          </a:xfrm>
+          <a:prstGeom prst="rect">
+            <a:avLst/>
+          </a:prstGeom>
+        </p:spPr>
+      </p:pic>
+      <p:sp>
+        <p:nvSpPr>
+          <p:cNvPr id="7" name="Text 0">
+            <a:extLst>
+              <a:ext uri="{FF2B5EF4-FFF2-40B4-BE49-F238E27FC236}">
+                <a16:creationId xmlns:a16="http://schemas.microsoft.com/office/drawing/2014/main" id="{64A8F005-E9F9-5DD4-C460-7C792AAA5B13}"/>
+              </a:ext>
+            </a:extLst>
+          </p:cNvPr>
+          <p:cNvSpPr/>
+          <p:nvPr/>
+        </p:nvSpPr>
+        <p:spPr>
+          <a:xfrm>
+            <a:off x="781250" y="148566"/>
+            <a:ext cx="11064240" cy="731520"/>
+          </a:xfrm>
+          <a:prstGeom prst="rect">
+            <a:avLst/>
+          </a:prstGeom>
+          <a:noFill/>
+          <a:ln/>
+        </p:spPr>
+        <p:txBody>
+          <a:bodyPr wrap="square" lIns="0" tIns="0" rIns="0" bIns="0" rtlCol="0" anchor="ctr"/>
+          <a:lstStyle/>
+          <a:p>
+            <a:pPr marL="0" indent="0">
+              <a:buNone/>
+            </a:pPr>
+            <a:r>
+              <a:rPr lang="en-US" sz="3000" b="1" dirty="0">
+                <a:solidFill>
+                  <a:srgbClr val="1E2761"/>
+                </a:solidFill>
+                <a:latin typeface="Cambria" pitchFamily="34" charset="0"/>
+                <a:ea typeface="Cambria" pitchFamily="34" charset="-122"/>
+                <a:cs typeface="Cambria" pitchFamily="34" charset="-120"/>
+              </a:rPr>
+              <a:t>Cleaned Dataset</a:t>
+            </a:r>
+            <a:endParaRPr lang="en-US" sz="3000" dirty="0"/>
+          </a:p>
+        </p:txBody>
+      </p:sp>
+    </p:spTree>
+    <p:extLst>
+      <p:ext uri="{BB962C8B-B14F-4D97-AF65-F5344CB8AC3E}">
+        <p14:creationId xmlns:p14="http://schemas.microsoft.com/office/powerpoint/2010/main" val="1738681957"/>
+      </p:ext>
+    </p:extLst>
+  </p:cSld>
+  <p:clrMapOvr>
+    <a:masterClrMapping/>
+  </p:clrMapOvr>
+</p:sld>
+</file>
+
+<file path=ppt/slides/slide7.xml><?xml version="1.0" encoding="utf-8"?>
+<p:sld xmlns:a="http://schemas.openxmlformats.org/drawingml/2006/main" xmlns:r="http://schemas.openxmlformats.org/officeDocument/2006/relationships" xmlns:p="http://schemas.openxmlformats.org/presentationml/2006/main">
+  <p:cSld name="Slide 4">
+    <p:bg>
+      <p:bgPr>
+        <a:solidFill>
+          <a:srgbClr val="FFFFFF"/>
+        </a:solidFill>
+        <a:effectLst/>
+      </p:bgPr>
+    </p:bg>
+    <p:spTree>
+      <p:nvGrpSpPr>
+        <p:cNvPr id="1" name=""/>
+        <p:cNvGrpSpPr/>
+        <p:nvPr/>
+      </p:nvGrpSpPr>
+      <p:grpSpPr>
+        <a:xfrm>
+          <a:off x="0" y="0"/>
+          <a:ext cx="0" cy="0"/>
+          <a:chOff x="0" y="0"/>
+          <a:chExt cx="0" cy="0"/>
+        </a:xfrm>
+      </p:grpSpPr>
+      <p:sp>
+        <p:nvSpPr>
+          <p:cNvPr id="2" name="Shape 0"/>
+          <p:cNvSpPr/>
+          <p:nvPr/>
+        </p:nvSpPr>
+        <p:spPr>
+          <a:xfrm>
+            <a:off x="548640" y="457200"/>
+            <a:ext cx="566928" cy="566928"/>
+          </a:xfrm>
+          <a:prstGeom prst="roundRect">
+            <a:avLst>
+              <a:gd name="adj" fmla="val 80645"/>
+            </a:avLst>
+          </a:prstGeom>
+          <a:solidFill>
+            <a:srgbClr val="1E2761"/>
+          </a:solidFill>
+          <a:ln/>
+        </p:spPr>
+      </p:sp>
+      <p:sp>
+        <p:nvSpPr>
+          <p:cNvPr id="3" name="Text 1"/>
+          <p:cNvSpPr/>
+          <p:nvPr/>
+        </p:nvSpPr>
+        <p:spPr>
+          <a:xfrm>
+            <a:off x="548640" y="457200"/>
+            <a:ext cx="566928" cy="566928"/>
+          </a:xfrm>
+          <a:prstGeom prst="rect">
+            <a:avLst/>
+          </a:prstGeom>
+          <a:noFill/>
+          <a:ln/>
+        </p:spPr>
+        <p:txBody>
+          <a:bodyPr wrap="square" lIns="0" tIns="0" rIns="0" bIns="0" rtlCol="0" anchor="ctr"/>
+          <a:lstStyle/>
+          <a:p>
+            <a:pPr marL="0" indent="0" algn="ctr">
+              <a:buNone/>
+            </a:pPr>
+            <a:r>
+              <a:rPr lang="en-US" sz="2000" b="1" dirty="0">
+                <a:solidFill>
+                  <a:srgbClr val="C9A24B"/>
+                </a:solidFill>
+                <a:latin typeface="Cambria" pitchFamily="34" charset="0"/>
+                <a:ea typeface="Cambria" pitchFamily="34" charset="-122"/>
+                <a:cs typeface="Cambria" pitchFamily="34" charset="-120"/>
+              </a:rPr>
+              <a:t>1</a:t>
+            </a:r>
+            <a:endParaRPr lang="en-US" sz="2000" dirty="0"/>
+          </a:p>
+        </p:txBody>
+      </p:sp>
+      <p:sp>
+        <p:nvSpPr>
+          <p:cNvPr id="4" name="Text 2"/>
+          <p:cNvSpPr/>
+          <p:nvPr/>
+        </p:nvSpPr>
+        <p:spPr>
+          <a:xfrm>
+            <a:off x="1298448" y="411480"/>
+            <a:ext cx="10314432" cy="731520"/>
+          </a:xfrm>
+          <a:prstGeom prst="rect">
+            <a:avLst/>
+          </a:prstGeom>
+          <a:noFill/>
+          <a:ln/>
+        </p:spPr>
+        <p:txBody>
+          <a:bodyPr wrap="square" lIns="0" tIns="0" rIns="0" bIns="0" rtlCol="0" anchor="ctr"/>
+          <a:lstStyle/>
+          <a:p>
+            <a:pPr marL="0" indent="0">
+              <a:buNone/>
+            </a:pPr>
+            <a:r>
+              <a:rPr lang="en-US" sz="2800" b="1" dirty="0">
+                <a:solidFill>
+                  <a:srgbClr val="1E2761"/>
+                </a:solidFill>
+                <a:latin typeface="Cambria" pitchFamily="34" charset="0"/>
+                <a:ea typeface="Cambria" pitchFamily="34" charset="-122"/>
+                <a:cs typeface="Cambria" pitchFamily="34" charset="-120"/>
+              </a:rPr>
+              <a:t>Experience → Salary</a:t>
+            </a:r>
+            <a:endParaRPr lang="en-US" sz="2800" dirty="0"/>
+          </a:p>
+        </p:txBody>
+      </p:sp>
+      <p:sp>
+        <p:nvSpPr>
+          <p:cNvPr id="5" name="Text 3"/>
+          <p:cNvSpPr/>
+          <p:nvPr/>
+        </p:nvSpPr>
+        <p:spPr>
+          <a:xfrm>
+            <a:off x="1298448" y="1042416"/>
+            <a:ext cx="10314432" cy="365760"/>
+          </a:xfrm>
+          <a:prstGeom prst="rect">
+            <a:avLst/>
+          </a:prstGeom>
+          <a:noFill/>
+          <a:ln/>
+        </p:spPr>
+        <p:txBody>
+          <a:bodyPr wrap="square" lIns="0" tIns="0" rIns="0" bIns="0" rtlCol="0" anchor="ctr"/>
+          <a:lstStyle/>
+          <a:p>
+            <a:pPr marL="0" indent="0">
+              <a:buNone/>
+            </a:pPr>
+            <a:r>
+              <a:rPr lang="en-US" sz="1300" i="1" dirty="0">
+                <a:solidFill>
+                  <a:srgbClr val="6B7280"/>
+                </a:solidFill>
+                <a:latin typeface="Calibri" pitchFamily="34" charset="0"/>
+                <a:ea typeface="Calibri" pitchFamily="34" charset="-122"/>
+                <a:cs typeface="Calibri" pitchFamily="34" charset="-120"/>
+              </a:rPr>
+              <a:t>Yes, more experience means more money.</a:t>
+            </a:r>
+            <a:endParaRPr lang="en-US" sz="1300" dirty="0"/>
+          </a:p>
+        </p:txBody>
+      </p:sp>
+      <p:sp>
+        <p:nvSpPr>
+          <p:cNvPr id="7" name="Text 4"/>
+          <p:cNvSpPr/>
+          <p:nvPr/>
+        </p:nvSpPr>
+        <p:spPr>
+          <a:xfrm>
+            <a:off x="7772400" y="1737360"/>
+            <a:ext cx="3886200" cy="1828800"/>
+          </a:xfrm>
+          <a:prstGeom prst="rect">
+            <a:avLst/>
+          </a:prstGeom>
+          <a:noFill/>
+          <a:ln/>
+        </p:spPr>
+        <p:txBody>
+          <a:bodyPr wrap="square" lIns="0" tIns="0" rIns="0" bIns="0" rtlCol="0" anchor="ctr"/>
+          <a:lstStyle/>
+          <a:p>
+            <a:pPr marL="203200" indent="-203200">
+              <a:lnSpc>
+                <a:spcPct val="100000"/>
+              </a:lnSpc>
+              <a:buSzPct val="100000"/>
+              <a:buChar char="•"/>
+            </a:pPr>
+            <a:r>
+              <a:rPr lang="en-PH" sz="1200" dirty="0"/>
+              <a:t>Median salary rises from $55,000 (1 year or less) to $104,000 (21-30 years). </a:t>
+            </a:r>
+          </a:p>
+          <a:p>
+            <a:pPr marL="203200" indent="-203200">
+              <a:lnSpc>
+                <a:spcPct val="100000"/>
+              </a:lnSpc>
+              <a:buSzPct val="100000"/>
+              <a:buChar char="•"/>
+            </a:pPr>
+            <a:r>
+              <a:rPr lang="en-PH" sz="1200" dirty="0"/>
+              <a:t>Pay grows fastest in the first 10-20 years, then levels off, dipping slightly at 31-40 years ($100,000) before ticking back up at 41+ years ($108,000).</a:t>
+            </a:r>
+          </a:p>
+        </p:txBody>
+      </p:sp>
+      <p:sp>
+        <p:nvSpPr>
+          <p:cNvPr id="8" name="Shape 5"/>
+          <p:cNvSpPr/>
+          <p:nvPr/>
+        </p:nvSpPr>
+        <p:spPr>
+          <a:xfrm>
+            <a:off x="7772400" y="5120640"/>
+            <a:ext cx="3886200" cy="1051560"/>
+          </a:xfrm>
+          <a:prstGeom prst="roundRect">
+            <a:avLst>
+              <a:gd name="adj" fmla="val 6087"/>
+            </a:avLst>
+          </a:prstGeom>
+          <a:solidFill>
+            <a:srgbClr val="1E2761"/>
+          </a:solidFill>
+          <a:ln/>
+        </p:spPr>
+      </p:sp>
+      <p:sp>
+        <p:nvSpPr>
+          <p:cNvPr id="9" name="Text 6"/>
+          <p:cNvSpPr/>
+          <p:nvPr/>
+        </p:nvSpPr>
+        <p:spPr>
+          <a:xfrm>
+            <a:off x="8001000" y="5248656"/>
+            <a:ext cx="3429000" cy="274320"/>
+          </a:xfrm>
+          <a:prstGeom prst="rect">
+            <a:avLst/>
+          </a:prstGeom>
+          <a:noFill/>
+          <a:ln/>
+        </p:spPr>
+        <p:txBody>
+          <a:bodyPr wrap="square" lIns="0" tIns="0" rIns="0" bIns="0" rtlCol="0" anchor="ctr"/>
+          <a:lstStyle/>
+          <a:p>
+            <a:pPr marL="0" indent="0">
+              <a:buNone/>
+            </a:pPr>
+            <a:r>
+              <a:rPr lang="en-US" sz="1050" b="1" kern="0" spc="120" dirty="0">
+                <a:solidFill>
+                  <a:srgbClr val="C9A24B"/>
+                </a:solidFill>
+                <a:latin typeface="Calibri" pitchFamily="34" charset="0"/>
+                <a:ea typeface="Calibri" pitchFamily="34" charset="-122"/>
+                <a:cs typeface="Calibri" pitchFamily="34" charset="-120"/>
+              </a:rPr>
+              <a:t>TAKEAWAY</a:t>
+            </a:r>
+            <a:endParaRPr lang="en-US" sz="1050" dirty="0"/>
+          </a:p>
+        </p:txBody>
+      </p:sp>
+      <p:sp>
+        <p:nvSpPr>
+          <p:cNvPr id="10" name="Text 7"/>
+          <p:cNvSpPr/>
+          <p:nvPr/>
+        </p:nvSpPr>
+        <p:spPr>
+          <a:xfrm>
+            <a:off x="8001000" y="5532120"/>
+            <a:ext cx="3429000" cy="548640"/>
+          </a:xfrm>
+          <a:prstGeom prst="rect">
+            <a:avLst/>
+          </a:prstGeom>
+          <a:noFill/>
+          <a:ln/>
+        </p:spPr>
+        <p:txBody>
+          <a:bodyPr wrap="square" lIns="0" tIns="0" rIns="0" bIns="0" rtlCol="0" anchor="ctr"/>
+          <a:lstStyle/>
+          <a:p>
+            <a:r>
+              <a:rPr lang="en-PH" sz="1400" dirty="0">
+                <a:solidFill>
+                  <a:schemeClr val="bg1"/>
+                </a:solidFill>
+              </a:rPr>
+              <a:t>More experience means more pay, but only up to a point, then it levels off.</a:t>
+            </a:r>
+            <a:endParaRPr lang="en-US" sz="1250" dirty="0">
+              <a:solidFill>
+                <a:schemeClr val="bg1"/>
+              </a:solidFill>
+            </a:endParaRPr>
+          </a:p>
+        </p:txBody>
+      </p:sp>
+      <p:sp>
+        <p:nvSpPr>
+          <p:cNvPr id="11" name="Text 8"/>
+          <p:cNvSpPr/>
+          <p:nvPr/>
+        </p:nvSpPr>
+        <p:spPr>
+          <a:xfrm>
+            <a:off x="548640" y="6528816"/>
+            <a:ext cx="7315200" cy="274320"/>
+          </a:xfrm>
+          <a:prstGeom prst="rect">
+            <a:avLst/>
+          </a:prstGeom>
+          <a:noFill/>
+          <a:ln/>
+        </p:spPr>
+        <p:txBody>
+          <a:bodyPr wrap="square" lIns="0" tIns="0" rIns="0" bIns="0" rtlCol="0" anchor="ctr"/>
+          <a:lstStyle/>
+          <a:p>
+            <a:pPr marL="0" indent="0">
+              <a:buNone/>
+            </a:pPr>
+            <a:r>
+              <a:rPr lang="en-US" sz="900" dirty="0">
+                <a:solidFill>
+                  <a:srgbClr val="6B7280"/>
+                </a:solidFill>
+                <a:latin typeface="Calibri" pitchFamily="34" charset="0"/>
+                <a:ea typeface="Calibri" pitchFamily="34" charset="-122"/>
+                <a:cs typeface="Calibri" pitchFamily="34" charset="-120"/>
+              </a:rPr>
+              <a:t>2021 Salary Survey — Key Points</a:t>
+            </a:r>
+            <a:endParaRPr lang="en-US" sz="900" dirty="0"/>
+          </a:p>
+        </p:txBody>
+      </p:sp>
+      <p:sp>
+        <p:nvSpPr>
+          <p:cNvPr id="12" name="Text 9"/>
+          <p:cNvSpPr/>
+          <p:nvPr/>
+        </p:nvSpPr>
+        <p:spPr>
+          <a:xfrm>
+            <a:off x="11338560" y="6528816"/>
+            <a:ext cx="365760" cy="274320"/>
+          </a:xfrm>
+          <a:prstGeom prst="rect">
+            <a:avLst/>
+          </a:prstGeom>
+          <a:noFill/>
+          <a:ln/>
+        </p:spPr>
+        <p:txBody>
+          <a:bodyPr wrap="square" lIns="0" tIns="0" rIns="0" bIns="0" rtlCol="0" anchor="ctr"/>
+          <a:lstStyle/>
+          <a:p>
+            <a:pPr marL="0" indent="0" algn="r">
+              <a:buNone/>
+            </a:pPr>
+            <a:r>
+              <a:rPr lang="en-US" sz="900" dirty="0">
+                <a:solidFill>
+                  <a:srgbClr val="6B7280"/>
+                </a:solidFill>
+                <a:latin typeface="Calibri" pitchFamily="34" charset="0"/>
+                <a:ea typeface="Calibri" pitchFamily="34" charset="-122"/>
+                <a:cs typeface="Calibri" pitchFamily="34" charset="-120"/>
+              </a:rPr>
+              <a:t>4</a:t>
+            </a:r>
+            <a:endParaRPr lang="en-US" sz="900" dirty="0"/>
+          </a:p>
+        </p:txBody>
+      </p:sp>
+      <p:pic>
+        <p:nvPicPr>
+          <p:cNvPr id="13" name="Picture 12">
+            <a:extLst>
+              <a:ext uri="{FF2B5EF4-FFF2-40B4-BE49-F238E27FC236}">
+                <a16:creationId xmlns:a16="http://schemas.microsoft.com/office/drawing/2014/main" id="{483C865B-F543-92F7-2BA1-FA21D089B483}"/>
+              </a:ext>
+            </a:extLst>
+          </p:cNvPr>
+          <p:cNvPicPr>
+            <a:picLocks noChangeAspect="1"/>
+          </p:cNvPicPr>
+          <p:nvPr/>
+        </p:nvPicPr>
+        <p:blipFill>
+          <a:blip r:embed="rId3"/>
+          <a:stretch>
+            <a:fillRect/>
+          </a:stretch>
+        </p:blipFill>
+        <p:spPr>
+          <a:xfrm>
+            <a:off x="324853" y="1797287"/>
+            <a:ext cx="7006389" cy="4378993"/>
+          </a:xfrm>
+          <a:prstGeom prst="rect">
+            <a:avLst/>
+          </a:prstGeom>
+        </p:spPr>
+      </p:pic>
+    </p:spTree>
+  </p:cSld>
+  <p:clrMapOvr>
+    <a:masterClrMapping/>
+  </p:clrMapOvr>
+</p:sld>
+</file>
+
+<file path=ppt/slides/slide8.xml><?xml version="1.0" encoding="utf-8"?>
+<p:sld xmlns:a="http://schemas.openxmlformats.org/drawingml/2006/main" xmlns:r="http://schemas.openxmlformats.org/officeDocument/2006/relationships" xmlns:p="http://schemas.openxmlformats.org/presentationml/2006/main">
+  <p:cSld name="Slide 5">
+    <p:bg>
+      <p:bgPr>
+        <a:solidFill>
+          <a:srgbClr val="FFFFFF"/>
+        </a:solidFill>
+        <a:effectLst/>
+      </p:bgPr>
+    </p:bg>
+    <p:spTree>
+      <p:nvGrpSpPr>
+        <p:cNvPr id="1" name=""/>
+        <p:cNvGrpSpPr/>
+        <p:nvPr/>
+      </p:nvGrpSpPr>
+      <p:grpSpPr>
+        <a:xfrm>
+          <a:off x="0" y="0"/>
+          <a:ext cx="0" cy="0"/>
+          <a:chOff x="0" y="0"/>
+          <a:chExt cx="0" cy="0"/>
+        </a:xfrm>
+      </p:grpSpPr>
+      <p:sp>
+        <p:nvSpPr>
+          <p:cNvPr id="2" name="Shape 0"/>
+          <p:cNvSpPr/>
+          <p:nvPr/>
+        </p:nvSpPr>
+        <p:spPr>
+          <a:xfrm>
+            <a:off x="548640" y="457200"/>
+            <a:ext cx="566928" cy="566928"/>
+          </a:xfrm>
+          <a:prstGeom prst="roundRect">
+            <a:avLst>
+              <a:gd name="adj" fmla="val 80645"/>
+            </a:avLst>
+          </a:prstGeom>
+          <a:solidFill>
+            <a:srgbClr val="1E2761"/>
+          </a:solidFill>
+          <a:ln/>
+        </p:spPr>
+      </p:sp>
+      <p:sp>
+        <p:nvSpPr>
+          <p:cNvPr id="3" name="Text 1"/>
+          <p:cNvSpPr/>
+          <p:nvPr/>
+        </p:nvSpPr>
+        <p:spPr>
+          <a:xfrm>
+            <a:off x="548640" y="457200"/>
+            <a:ext cx="566928" cy="566928"/>
+          </a:xfrm>
+          <a:prstGeom prst="rect">
+            <a:avLst/>
+          </a:prstGeom>
+          <a:noFill/>
+          <a:ln/>
+        </p:spPr>
+        <p:txBody>
+          <a:bodyPr wrap="square" lIns="0" tIns="0" rIns="0" bIns="0" rtlCol="0" anchor="ctr"/>
+          <a:lstStyle/>
+          <a:p>
+            <a:pPr marL="0" indent="0" algn="ctr">
+              <a:buNone/>
+            </a:pPr>
+            <a:r>
+              <a:rPr lang="en-US" sz="2000" b="1" dirty="0">
+                <a:solidFill>
+                  <a:srgbClr val="C9A24B"/>
+                </a:solidFill>
+                <a:latin typeface="Cambria" pitchFamily="34" charset="0"/>
+                <a:ea typeface="Cambria" pitchFamily="34" charset="-122"/>
+                <a:cs typeface="Cambria" pitchFamily="34" charset="-120"/>
+              </a:rPr>
+              <a:t>2</a:t>
+            </a:r>
+            <a:endParaRPr lang="en-US" sz="2000" dirty="0"/>
+          </a:p>
+        </p:txBody>
+      </p:sp>
+      <p:sp>
+        <p:nvSpPr>
+          <p:cNvPr id="4" name="Text 2"/>
+          <p:cNvSpPr/>
+          <p:nvPr/>
+        </p:nvSpPr>
+        <p:spPr>
+          <a:xfrm>
+            <a:off x="1298448" y="411480"/>
+            <a:ext cx="10314432" cy="731520"/>
+          </a:xfrm>
+          <a:prstGeom prst="rect">
+            <a:avLst/>
+          </a:prstGeom>
+          <a:noFill/>
+          <a:ln/>
+        </p:spPr>
+        <p:txBody>
+          <a:bodyPr wrap="square" lIns="0" tIns="0" rIns="0" bIns="0" rtlCol="0" anchor="ctr"/>
+          <a:lstStyle/>
+          <a:p>
+            <a:pPr marL="0" indent="0">
+              <a:buNone/>
+            </a:pPr>
+            <a:r>
+              <a:rPr lang="en-US" sz="2800" b="1" dirty="0">
+                <a:solidFill>
+                  <a:srgbClr val="1E2761"/>
+                </a:solidFill>
+                <a:latin typeface="Cambria" pitchFamily="34" charset="0"/>
+                <a:ea typeface="Cambria" pitchFamily="34" charset="-122"/>
+                <a:cs typeface="Cambria" pitchFamily="34" charset="-120"/>
+              </a:rPr>
+              <a:t>Education → Salary</a:t>
+            </a:r>
+            <a:endParaRPr lang="en-US" sz="2800" dirty="0"/>
+          </a:p>
+        </p:txBody>
+      </p:sp>
+      <p:sp>
+        <p:nvSpPr>
+          <p:cNvPr id="5" name="Text 3"/>
+          <p:cNvSpPr/>
+          <p:nvPr/>
+        </p:nvSpPr>
+        <p:spPr>
+          <a:xfrm>
+            <a:off x="1298448" y="1042416"/>
+            <a:ext cx="10314432" cy="365760"/>
+          </a:xfrm>
+          <a:prstGeom prst="rect">
+            <a:avLst/>
+          </a:prstGeom>
+          <a:noFill/>
+          <a:ln/>
+        </p:spPr>
+        <p:txBody>
+          <a:bodyPr wrap="square" lIns="0" tIns="0" rIns="0" bIns="0" rtlCol="0" anchor="ctr"/>
+          <a:lstStyle/>
+          <a:p>
+            <a:pPr marL="0" indent="0">
+              <a:buNone/>
+            </a:pPr>
+            <a:r>
+              <a:rPr lang="en-US" sz="1300" i="1" dirty="0">
+                <a:solidFill>
+                  <a:srgbClr val="6B7280"/>
+                </a:solidFill>
+                <a:latin typeface="Calibri" pitchFamily="34" charset="0"/>
+                <a:ea typeface="Calibri" pitchFamily="34" charset="-122"/>
+                <a:cs typeface="Calibri" pitchFamily="34" charset="-120"/>
+              </a:rPr>
+              <a:t>A Master's degree is worth more, but the gap is modest.</a:t>
+            </a:r>
+            <a:endParaRPr lang="en-US" sz="1300" dirty="0"/>
+          </a:p>
+        </p:txBody>
+      </p:sp>
+      <p:sp>
+        <p:nvSpPr>
+          <p:cNvPr id="7" name="Text 4"/>
+          <p:cNvSpPr/>
+          <p:nvPr/>
+        </p:nvSpPr>
+        <p:spPr>
+          <a:xfrm>
+            <a:off x="7772400" y="1737360"/>
+            <a:ext cx="3886200" cy="2225040"/>
+          </a:xfrm>
+          <a:prstGeom prst="rect">
+            <a:avLst/>
+          </a:prstGeom>
+          <a:noFill/>
+          <a:ln/>
+        </p:spPr>
+        <p:txBody>
+          <a:bodyPr wrap="square" lIns="0" tIns="0" rIns="0" bIns="0" rtlCol="0" anchor="ctr"/>
+          <a:lstStyle/>
+          <a:p>
+            <a:pPr>
+              <a:lnSpc>
+                <a:spcPts val="1700"/>
+              </a:lnSpc>
+              <a:buSzPct val="100000"/>
+            </a:pPr>
+            <a:r>
+              <a:rPr lang="en-US" sz="1350" b="1" dirty="0">
+                <a:solidFill>
+                  <a:srgbClr val="262A3F"/>
+                </a:solidFill>
+                <a:latin typeface="Calibri" pitchFamily="34" charset="0"/>
+                <a:ea typeface="Calibri" pitchFamily="34" charset="-122"/>
+                <a:cs typeface="Calibri" pitchFamily="34" charset="-120"/>
+              </a:rPr>
+              <a:t>Summary:</a:t>
+            </a:r>
+          </a:p>
+          <a:p>
+            <a:pPr>
+              <a:lnSpc>
+                <a:spcPct val="100000"/>
+              </a:lnSpc>
+              <a:buSzPct val="100000"/>
+            </a:pPr>
+            <a:r>
+              <a:rPr lang="en-PH" sz="1200" dirty="0"/>
+              <a:t>Median salary rises with education, from $55,467 (High School) to $120,000 (Professional degree). The biggest jump is College → Professional degree (+$45,000). PhD ($97,000) actually earns less than Professional degree ($120,000).</a:t>
+            </a:r>
+            <a:endParaRPr lang="en-US" sz="1350" dirty="0"/>
+          </a:p>
+        </p:txBody>
+      </p:sp>
+      <p:sp>
+        <p:nvSpPr>
+          <p:cNvPr id="8" name="Shape 5"/>
+          <p:cNvSpPr/>
+          <p:nvPr/>
+        </p:nvSpPr>
+        <p:spPr>
+          <a:xfrm>
+            <a:off x="7772400" y="5120640"/>
+            <a:ext cx="3886200" cy="1051560"/>
+          </a:xfrm>
+          <a:prstGeom prst="roundRect">
+            <a:avLst>
+              <a:gd name="adj" fmla="val 6087"/>
+            </a:avLst>
+          </a:prstGeom>
+          <a:solidFill>
+            <a:srgbClr val="1E2761"/>
+          </a:solidFill>
+          <a:ln/>
+        </p:spPr>
+      </p:sp>
+      <p:sp>
+        <p:nvSpPr>
+          <p:cNvPr id="9" name="Text 6"/>
+          <p:cNvSpPr/>
+          <p:nvPr/>
+        </p:nvSpPr>
+        <p:spPr>
+          <a:xfrm>
+            <a:off x="8001000" y="5248656"/>
+            <a:ext cx="3429000" cy="274320"/>
+          </a:xfrm>
+          <a:prstGeom prst="rect">
+            <a:avLst/>
+          </a:prstGeom>
+          <a:noFill/>
+          <a:ln/>
+        </p:spPr>
+        <p:txBody>
+          <a:bodyPr wrap="square" lIns="0" tIns="0" rIns="0" bIns="0" rtlCol="0" anchor="ctr"/>
+          <a:lstStyle/>
+          <a:p>
+            <a:pPr marL="0" indent="0">
+              <a:buNone/>
+            </a:pPr>
+            <a:r>
+              <a:rPr lang="en-US" sz="1050" b="1" kern="0" spc="120" dirty="0">
+                <a:solidFill>
+                  <a:srgbClr val="C9A24B"/>
+                </a:solidFill>
+                <a:latin typeface="Calibri" pitchFamily="34" charset="0"/>
+                <a:ea typeface="Calibri" pitchFamily="34" charset="-122"/>
+                <a:cs typeface="Calibri" pitchFamily="34" charset="-120"/>
+              </a:rPr>
+              <a:t>CAVEAT</a:t>
+            </a:r>
+            <a:endParaRPr lang="en-US" sz="1050" dirty="0"/>
+          </a:p>
+        </p:txBody>
+      </p:sp>
+      <p:sp>
+        <p:nvSpPr>
+          <p:cNvPr id="10" name="Text 7"/>
+          <p:cNvSpPr/>
+          <p:nvPr/>
+        </p:nvSpPr>
+        <p:spPr>
+          <a:xfrm>
+            <a:off x="8001000" y="5532120"/>
+            <a:ext cx="3429000" cy="548640"/>
+          </a:xfrm>
+          <a:prstGeom prst="rect">
+            <a:avLst/>
+          </a:prstGeom>
+          <a:noFill/>
+          <a:ln/>
+        </p:spPr>
+        <p:txBody>
+          <a:bodyPr wrap="square" lIns="0" tIns="0" rIns="0" bIns="0" rtlCol="0" anchor="ctr"/>
+          <a:lstStyle/>
+          <a:p>
+            <a:pPr marL="0" indent="0">
+              <a:lnSpc>
+                <a:spcPct val="100000"/>
+              </a:lnSpc>
+              <a:buNone/>
+            </a:pPr>
+            <a:r>
+              <a:rPr lang="en-US" sz="1250" dirty="0">
+                <a:solidFill>
+                  <a:srgbClr val="FFFFFF"/>
+                </a:solidFill>
+                <a:latin typeface="Calibri" pitchFamily="34" charset="0"/>
+                <a:ea typeface="Calibri" pitchFamily="34" charset="-122"/>
+                <a:cs typeface="Calibri" pitchFamily="34" charset="-120"/>
+              </a:rPr>
+              <a:t>Individual salaries overlap heavily across education levels — a degree alone doesn't guarantee higher pay.</a:t>
+            </a:r>
+            <a:endParaRPr lang="en-US" sz="1250" dirty="0"/>
+          </a:p>
+        </p:txBody>
+      </p:sp>
+      <p:sp>
+        <p:nvSpPr>
+          <p:cNvPr id="11" name="Text 8"/>
+          <p:cNvSpPr/>
+          <p:nvPr/>
+        </p:nvSpPr>
+        <p:spPr>
+          <a:xfrm>
+            <a:off x="548640" y="6528816"/>
+            <a:ext cx="7315200" cy="274320"/>
+          </a:xfrm>
+          <a:prstGeom prst="rect">
+            <a:avLst/>
+          </a:prstGeom>
+          <a:noFill/>
+          <a:ln/>
+        </p:spPr>
+        <p:txBody>
+          <a:bodyPr wrap="square" lIns="0" tIns="0" rIns="0" bIns="0" rtlCol="0" anchor="ctr"/>
+          <a:lstStyle/>
+          <a:p>
+            <a:pPr marL="0" indent="0">
+              <a:buNone/>
+            </a:pPr>
+            <a:r>
+              <a:rPr lang="en-US" sz="900" dirty="0">
+                <a:solidFill>
+                  <a:srgbClr val="6B7280"/>
+                </a:solidFill>
+                <a:latin typeface="Calibri" pitchFamily="34" charset="0"/>
+                <a:ea typeface="Calibri" pitchFamily="34" charset="-122"/>
+                <a:cs typeface="Calibri" pitchFamily="34" charset="-120"/>
+              </a:rPr>
+              <a:t>2021 Salary Survey — Key Points</a:t>
+            </a:r>
+            <a:endParaRPr lang="en-US" sz="900" dirty="0"/>
+          </a:p>
+        </p:txBody>
+      </p:sp>
+      <p:sp>
+        <p:nvSpPr>
+          <p:cNvPr id="12" name="Text 9"/>
+          <p:cNvSpPr/>
+          <p:nvPr/>
+        </p:nvSpPr>
+        <p:spPr>
+          <a:xfrm>
+            <a:off x="11338560" y="6528816"/>
+            <a:ext cx="365760" cy="274320"/>
+          </a:xfrm>
+          <a:prstGeom prst="rect">
+            <a:avLst/>
+          </a:prstGeom>
+          <a:noFill/>
+          <a:ln/>
+        </p:spPr>
+        <p:txBody>
+          <a:bodyPr wrap="square" lIns="0" tIns="0" rIns="0" bIns="0" rtlCol="0" anchor="ctr"/>
+          <a:lstStyle/>
+          <a:p>
+            <a:pPr marL="0" indent="0" algn="r">
+              <a:buNone/>
+            </a:pPr>
+            <a:r>
+              <a:rPr lang="en-US" sz="900" dirty="0">
+                <a:solidFill>
+                  <a:srgbClr val="6B7280"/>
+                </a:solidFill>
+                <a:latin typeface="Calibri" pitchFamily="34" charset="0"/>
+                <a:ea typeface="Calibri" pitchFamily="34" charset="-122"/>
+                <a:cs typeface="Calibri" pitchFamily="34" charset="-120"/>
+              </a:rPr>
+              <a:t>5</a:t>
+            </a:r>
+            <a:endParaRPr lang="en-US" sz="900" dirty="0"/>
+          </a:p>
+        </p:txBody>
+      </p:sp>
+      <p:pic>
+        <p:nvPicPr>
+          <p:cNvPr id="13" name="Picture 12">
+            <a:extLst>
+              <a:ext uri="{FF2B5EF4-FFF2-40B4-BE49-F238E27FC236}">
+                <a16:creationId xmlns:a16="http://schemas.microsoft.com/office/drawing/2014/main" id="{BEFB761C-6008-5D2C-444A-DE5EB712601A}"/>
+              </a:ext>
+            </a:extLst>
+          </p:cNvPr>
+          <p:cNvPicPr>
+            <a:picLocks noChangeAspect="1"/>
+          </p:cNvPicPr>
+          <p:nvPr/>
+        </p:nvPicPr>
+        <p:blipFill>
+          <a:blip r:embed="rId3"/>
+          <a:stretch>
+            <a:fillRect/>
+          </a:stretch>
+        </p:blipFill>
+        <p:spPr>
+          <a:xfrm>
+            <a:off x="762000" y="1626368"/>
+            <a:ext cx="6646244" cy="4153903"/>
+          </a:xfrm>
+          <a:prstGeom prst="rect">
+            <a:avLst/>
+          </a:prstGeom>
+        </p:spPr>
+      </p:pic>
+    </p:spTree>
+  </p:cSld>
+  <p:clrMapOvr>
+    <a:masterClrMapping/>
+  </p:clrMapOvr>
+</p:sld>
+</file>
+
+<file path=ppt/slides/slide9.xml><?xml version="1.0" encoding="utf-8"?>
+<p:sld xmlns:a="http://schemas.openxmlformats.org/drawingml/2006/main" xmlns:r="http://schemas.openxmlformats.org/officeDocument/2006/relationships" xmlns:p="http://schemas.openxmlformats.org/presentationml/2006/main">
+  <p:cSld name="Slide 6">
+    <p:bg>
+      <p:bgPr>
+        <a:solidFill>
+          <a:srgbClr val="FFFFFF"/>
+        </a:solidFill>
+        <a:effectLst/>
+      </p:bgPr>
+    </p:bg>
+    <p:spTree>
+      <p:nvGrpSpPr>
+        <p:cNvPr id="1" name=""/>
+        <p:cNvGrpSpPr/>
+        <p:nvPr/>
+      </p:nvGrpSpPr>
+      <p:grpSpPr>
+        <a:xfrm>
+          <a:off x="0" y="0"/>
+          <a:ext cx="0" cy="0"/>
+          <a:chOff x="0" y="0"/>
+          <a:chExt cx="0" cy="0"/>
+        </a:xfrm>
+      </p:grpSpPr>
+      <p:sp>
+        <p:nvSpPr>
+          <p:cNvPr id="2" name="Shape 0"/>
+          <p:cNvSpPr/>
+          <p:nvPr/>
+        </p:nvSpPr>
+        <p:spPr>
+          <a:xfrm>
+            <a:off x="548640" y="457200"/>
+            <a:ext cx="566928" cy="566928"/>
+          </a:xfrm>
+          <a:prstGeom prst="roundRect">
+            <a:avLst>
+              <a:gd name="adj" fmla="val 80645"/>
+            </a:avLst>
+          </a:prstGeom>
+          <a:solidFill>
+            <a:srgbClr val="1E2761"/>
+          </a:solidFill>
+          <a:ln/>
+        </p:spPr>
+      </p:sp>
+      <p:sp>
+        <p:nvSpPr>
+          <p:cNvPr id="3" name="Text 1"/>
+          <p:cNvSpPr/>
+          <p:nvPr/>
+        </p:nvSpPr>
+        <p:spPr>
+          <a:xfrm>
+            <a:off x="548640" y="457200"/>
+            <a:ext cx="566928" cy="566928"/>
+          </a:xfrm>
+          <a:prstGeom prst="rect">
+            <a:avLst/>
+          </a:prstGeom>
+          <a:noFill/>
+          <a:ln/>
+        </p:spPr>
+        <p:txBody>
+          <a:bodyPr wrap="square" lIns="0" tIns="0" rIns="0" bIns="0" rtlCol="0" anchor="ctr"/>
+          <a:lstStyle/>
+          <a:p>
+            <a:pPr marL="0" indent="0" algn="ctr">
+              <a:buNone/>
+            </a:pPr>
+            <a:r>
+              <a:rPr lang="en-US" sz="2000" b="1" dirty="0">
+                <a:solidFill>
+                  <a:srgbClr val="C9A24B"/>
+                </a:solidFill>
+                <a:latin typeface="Cambria" pitchFamily="34" charset="0"/>
+                <a:ea typeface="Cambria" pitchFamily="34" charset="-122"/>
+                <a:cs typeface="Cambria" pitchFamily="34" charset="-120"/>
+              </a:rPr>
+              <a:t>3</a:t>
+            </a:r>
+            <a:endParaRPr lang="en-US" sz="2000" dirty="0"/>
+          </a:p>
+        </p:txBody>
+      </p:sp>
+      <p:sp>
+        <p:nvSpPr>
+          <p:cNvPr id="4" name="Text 2"/>
+          <p:cNvSpPr/>
+          <p:nvPr/>
+        </p:nvSpPr>
+        <p:spPr>
+          <a:xfrm>
+            <a:off x="1298448" y="411480"/>
+            <a:ext cx="10314432" cy="731520"/>
+          </a:xfrm>
+          <a:prstGeom prst="rect">
+            <a:avLst/>
+          </a:prstGeom>
+          <a:noFill/>
+          <a:ln/>
+        </p:spPr>
+        <p:txBody>
+          <a:bodyPr wrap="square" lIns="0" tIns="0" rIns="0" bIns="0" rtlCol="0" anchor="ctr"/>
+          <a:lstStyle/>
+          <a:p>
+            <a:pPr marL="0" indent="0">
+              <a:buNone/>
+            </a:pPr>
+            <a:r>
+              <a:rPr lang="en-US" sz="2800" b="1" dirty="0">
+                <a:solidFill>
+                  <a:srgbClr val="1E2761"/>
+                </a:solidFill>
+                <a:latin typeface="Cambria" pitchFamily="34" charset="0"/>
+                <a:ea typeface="Cambria" pitchFamily="34" charset="-122"/>
+                <a:cs typeface="Cambria" pitchFamily="34" charset="-120"/>
+              </a:rPr>
+              <a:t>Industry → Salary</a:t>
+            </a:r>
+            <a:endParaRPr lang="en-US" sz="2800" dirty="0"/>
+          </a:p>
+        </p:txBody>
+      </p:sp>
+      <p:sp>
+        <p:nvSpPr>
+          <p:cNvPr id="5" name="Text 3"/>
+          <p:cNvSpPr/>
+          <p:nvPr/>
+        </p:nvSpPr>
+        <p:spPr>
+          <a:xfrm>
+            <a:off x="1298448" y="1042416"/>
+            <a:ext cx="10314432" cy="365760"/>
+          </a:xfrm>
+          <a:prstGeom prst="rect">
+            <a:avLst/>
+          </a:prstGeom>
+          <a:noFill/>
+          <a:ln/>
+        </p:spPr>
+        <p:txBody>
+          <a:bodyPr wrap="square" lIns="0" tIns="0" rIns="0" bIns="0" rtlCol="0" anchor="ctr"/>
+          <a:lstStyle/>
+          <a:p>
+            <a:pPr marL="0" indent="0">
+              <a:buNone/>
+            </a:pPr>
+            <a:r>
+              <a:rPr lang="en-US" sz="1300" i="1" dirty="0">
+                <a:solidFill>
+                  <a:srgbClr val="6B7280"/>
+                </a:solidFill>
+                <a:latin typeface="Calibri" pitchFamily="34" charset="0"/>
+                <a:ea typeface="Calibri" pitchFamily="34" charset="-122"/>
+                <a:cs typeface="Calibri" pitchFamily="34" charset="-120"/>
+              </a:rPr>
+              <a:t>Pay varies sharply by industry (≥100 responses each).</a:t>
+            </a:r>
+            <a:endParaRPr lang="en-US" sz="1300" dirty="0"/>
+          </a:p>
+        </p:txBody>
+      </p:sp>
+      <p:sp>
+        <p:nvSpPr>
+          <p:cNvPr id="7" name="Text 4"/>
+          <p:cNvSpPr/>
+          <p:nvPr/>
+        </p:nvSpPr>
+        <p:spPr>
+          <a:xfrm>
+            <a:off x="7772400" y="1737360"/>
+            <a:ext cx="3886200" cy="868680"/>
+          </a:xfrm>
+          <a:prstGeom prst="rect">
+            <a:avLst/>
+          </a:prstGeom>
+          <a:noFill/>
+          <a:ln/>
+        </p:spPr>
+        <p:txBody>
+          <a:bodyPr wrap="square" lIns="0" tIns="0" rIns="0" bIns="0" rtlCol="0" anchor="ctr"/>
+          <a:lstStyle/>
+          <a:p>
+            <a:pPr marL="0" indent="0">
+              <a:lnSpc>
+                <a:spcPts val="1500"/>
+              </a:lnSpc>
+              <a:buNone/>
+            </a:pPr>
+            <a:r>
+              <a:rPr lang="en-US" sz="2400" b="1" dirty="0">
+                <a:solidFill>
+                  <a:srgbClr val="C9A24B"/>
+                </a:solidFill>
+                <a:latin typeface="Cambria" pitchFamily="34" charset="0"/>
+                <a:ea typeface="Cambria" pitchFamily="34" charset="-122"/>
+                <a:cs typeface="Cambria" pitchFamily="34" charset="-120"/>
+              </a:rPr>
+              <a:t>$112,500</a:t>
+            </a:r>
+            <a:endParaRPr lang="en-US" sz="2400" dirty="0"/>
+          </a:p>
+          <a:p>
+            <a:pPr marL="0" indent="0">
+              <a:lnSpc>
+                <a:spcPts val="1500"/>
+              </a:lnSpc>
+              <a:buNone/>
+            </a:pPr>
+            <a:r>
+              <a:rPr lang="en-US" sz="1250" dirty="0">
+                <a:solidFill>
+                  <a:srgbClr val="6B7280"/>
+                </a:solidFill>
+                <a:latin typeface="Cambria" pitchFamily="34" charset="0"/>
+                <a:ea typeface="Cambria" pitchFamily="34" charset="-122"/>
+                <a:cs typeface="Cambria" pitchFamily="34" charset="-120"/>
+              </a:rPr>
+              <a:t>Information Technology — highest paying</a:t>
+            </a:r>
+            <a:endParaRPr lang="en-US" sz="2400" dirty="0"/>
+          </a:p>
+        </p:txBody>
+      </p:sp>
+      <p:sp>
+        <p:nvSpPr>
+          <p:cNvPr id="8" name="Shape 5"/>
+          <p:cNvSpPr/>
+          <p:nvPr/>
+        </p:nvSpPr>
+        <p:spPr>
+          <a:xfrm>
+            <a:off x="7772400" y="2697480"/>
+            <a:ext cx="3886200" cy="0"/>
+          </a:xfrm>
+          <a:prstGeom prst="line">
+            <a:avLst/>
+          </a:prstGeom>
+          <a:noFill/>
+          <a:ln w="12700">
+            <a:solidFill>
+              <a:srgbClr val="D8DEEC"/>
+            </a:solidFill>
+            <a:prstDash val="solid"/>
+          </a:ln>
+        </p:spPr>
+      </p:sp>
+      <p:sp>
+        <p:nvSpPr>
+          <p:cNvPr id="9" name="Text 6"/>
+          <p:cNvSpPr/>
+          <p:nvPr/>
+        </p:nvSpPr>
+        <p:spPr>
+          <a:xfrm>
+            <a:off x="7772400" y="2834640"/>
+            <a:ext cx="3886200" cy="868680"/>
+          </a:xfrm>
+          <a:prstGeom prst="rect">
+            <a:avLst/>
+          </a:prstGeom>
+          <a:noFill/>
+          <a:ln/>
+        </p:spPr>
+        <p:txBody>
+          <a:bodyPr wrap="square" lIns="0" tIns="0" rIns="0" bIns="0" rtlCol="0" anchor="ctr"/>
+          <a:lstStyle/>
+          <a:p>
+            <a:pPr marL="0" indent="0">
+              <a:lnSpc>
+                <a:spcPts val="1500"/>
+              </a:lnSpc>
+              <a:buNone/>
+            </a:pPr>
+            <a:r>
+              <a:rPr lang="en-US" sz="2400" b="1" dirty="0">
+                <a:solidFill>
+                  <a:srgbClr val="B4483C"/>
+                </a:solidFill>
+                <a:latin typeface="Cambria" pitchFamily="34" charset="0"/>
+                <a:ea typeface="Cambria" pitchFamily="34" charset="-122"/>
+                <a:cs typeface="Cambria" pitchFamily="34" charset="-120"/>
+              </a:rPr>
+              <a:t>$49,000</a:t>
+            </a:r>
+            <a:endParaRPr lang="en-US" sz="2400" dirty="0"/>
+          </a:p>
+          <a:p>
+            <a:pPr marL="0" indent="0">
+              <a:lnSpc>
+                <a:spcPts val="1500"/>
+              </a:lnSpc>
+              <a:buNone/>
+            </a:pPr>
+            <a:r>
+              <a:rPr lang="en-US" sz="1250" dirty="0">
+                <a:solidFill>
+                  <a:srgbClr val="6B7280"/>
+                </a:solidFill>
+                <a:latin typeface="Cambria" pitchFamily="34" charset="0"/>
+                <a:ea typeface="Cambria" pitchFamily="34" charset="-122"/>
+                <a:cs typeface="Cambria" pitchFamily="34" charset="-120"/>
+              </a:rPr>
+              <a:t>Retail/Sales — lowest paying</a:t>
+            </a:r>
+            <a:endParaRPr lang="en-US" sz="2400" dirty="0"/>
+          </a:p>
+        </p:txBody>
+      </p:sp>
+      <p:sp>
+        <p:nvSpPr>
+          <p:cNvPr id="10" name="Text 7"/>
+          <p:cNvSpPr/>
+          <p:nvPr/>
+        </p:nvSpPr>
+        <p:spPr>
+          <a:xfrm>
+            <a:off x="7772400" y="3794760"/>
+            <a:ext cx="3886200" cy="822960"/>
+          </a:xfrm>
+          <a:prstGeom prst="rect">
+            <a:avLst/>
+          </a:prstGeom>
+          <a:noFill/>
+          <a:ln/>
+        </p:spPr>
+        <p:txBody>
+          <a:bodyPr wrap="square" lIns="0" tIns="0" rIns="0" bIns="0" rtlCol="0" anchor="ctr"/>
+          <a:lstStyle/>
+          <a:p>
+            <a:pPr marL="0" indent="0">
+              <a:lnSpc>
+                <a:spcPts val="1600"/>
+              </a:lnSpc>
+              <a:buNone/>
+            </a:pPr>
+            <a:r>
+              <a:rPr lang="en-US" sz="1250" dirty="0">
+                <a:solidFill>
+                  <a:srgbClr val="262A3F"/>
+                </a:solidFill>
+                <a:latin typeface="Calibri" pitchFamily="34" charset="0"/>
+                <a:ea typeface="Calibri" pitchFamily="34" charset="-122"/>
+                <a:cs typeface="Calibri" pitchFamily="34" charset="-120"/>
+              </a:rPr>
+              <a:t>Other notable: Legal ($90,000), Business/Consulting ($88,000), Engineering/Manufacturing ($83,500).</a:t>
+            </a:r>
+            <a:endParaRPr lang="en-US" sz="1250" dirty="0"/>
+          </a:p>
+        </p:txBody>
+      </p:sp>
+      <p:sp>
+        <p:nvSpPr>
+          <p:cNvPr id="11" name="Shape 8"/>
+          <p:cNvSpPr/>
+          <p:nvPr/>
+        </p:nvSpPr>
+        <p:spPr>
+          <a:xfrm>
+            <a:off x="7772400" y="5120640"/>
+            <a:ext cx="3886200" cy="1051560"/>
+          </a:xfrm>
+          <a:prstGeom prst="roundRect">
+            <a:avLst>
+              <a:gd name="adj" fmla="val 6087"/>
+            </a:avLst>
+          </a:prstGeom>
+          <a:solidFill>
+            <a:srgbClr val="1E2761"/>
+          </a:solidFill>
+          <a:ln/>
+        </p:spPr>
+      </p:sp>
+      <p:sp>
+        <p:nvSpPr>
+          <p:cNvPr id="12" name="Text 9"/>
+          <p:cNvSpPr/>
+          <p:nvPr/>
+        </p:nvSpPr>
+        <p:spPr>
+          <a:xfrm>
+            <a:off x="8001000" y="5248656"/>
+            <a:ext cx="3429000" cy="274320"/>
+          </a:xfrm>
+          <a:prstGeom prst="rect">
+            <a:avLst/>
+          </a:prstGeom>
+          <a:noFill/>
+          <a:ln/>
+        </p:spPr>
+        <p:txBody>
+          <a:bodyPr wrap="square" lIns="0" tIns="0" rIns="0" bIns="0" rtlCol="0" anchor="ctr"/>
+          <a:lstStyle/>
+          <a:p>
+            <a:pPr marL="0" indent="0">
+              <a:buNone/>
+            </a:pPr>
+            <a:r>
+              <a:rPr lang="en-US" sz="1050" b="1" kern="0" spc="120" dirty="0">
+                <a:solidFill>
+                  <a:srgbClr val="C9A24B"/>
+                </a:solidFill>
+                <a:latin typeface="Calibri" pitchFamily="34" charset="0"/>
+                <a:ea typeface="Calibri" pitchFamily="34" charset="-122"/>
+                <a:cs typeface="Calibri" pitchFamily="34" charset="-120"/>
+              </a:rPr>
+              <a:t>TAKEAWAY</a:t>
+            </a:r>
+            <a:endParaRPr lang="en-US" sz="1050" dirty="0"/>
+          </a:p>
+        </p:txBody>
+      </p:sp>
+      <p:sp>
+        <p:nvSpPr>
+          <p:cNvPr id="13" name="Text 10"/>
+          <p:cNvSpPr/>
+          <p:nvPr/>
+        </p:nvSpPr>
+        <p:spPr>
+          <a:xfrm>
+            <a:off x="8001000" y="5532120"/>
+            <a:ext cx="3429000" cy="548640"/>
+          </a:xfrm>
+          <a:prstGeom prst="rect">
+            <a:avLst/>
+          </a:prstGeom>
+          <a:noFill/>
+          <a:ln/>
+        </p:spPr>
+        <p:txBody>
+          <a:bodyPr wrap="square" lIns="0" tIns="0" rIns="0" bIns="0" rtlCol="0" anchor="ctr"/>
+          <a:lstStyle/>
+          <a:p>
+            <a:pPr marL="0" indent="0">
+              <a:lnSpc>
+                <a:spcPts val="1600"/>
+              </a:lnSpc>
+              <a:buNone/>
+            </a:pPr>
+            <a:r>
+              <a:rPr lang="en-US" sz="1250" dirty="0">
+                <a:solidFill>
+                  <a:srgbClr val="FFFFFF"/>
+                </a:solidFill>
+                <a:latin typeface="Calibri" pitchFamily="34" charset="0"/>
+                <a:ea typeface="Calibri" pitchFamily="34" charset="-122"/>
+                <a:cs typeface="Calibri" pitchFamily="34" charset="-120"/>
+              </a:rPr>
+              <a:t>Pay clearly depends on industry — IT tops the list, Retail/Sales is lowest.</a:t>
+            </a:r>
+            <a:endParaRPr lang="en-US" sz="1250" dirty="0"/>
+          </a:p>
+        </p:txBody>
+      </p:sp>
+      <p:sp>
+        <p:nvSpPr>
+          <p:cNvPr id="14" name="Text 11"/>
+          <p:cNvSpPr/>
+          <p:nvPr/>
+        </p:nvSpPr>
+        <p:spPr>
+          <a:xfrm>
+            <a:off x="548640" y="6528816"/>
+            <a:ext cx="7315200" cy="274320"/>
+          </a:xfrm>
+          <a:prstGeom prst="rect">
+            <a:avLst/>
+          </a:prstGeom>
+          <a:noFill/>
+          <a:ln/>
+        </p:spPr>
+        <p:txBody>
+          <a:bodyPr wrap="square" lIns="0" tIns="0" rIns="0" bIns="0" rtlCol="0" anchor="ctr"/>
+          <a:lstStyle/>
+          <a:p>
+            <a:pPr marL="0" indent="0">
+              <a:buNone/>
+            </a:pPr>
+            <a:r>
+              <a:rPr lang="en-US" sz="900" dirty="0">
+                <a:solidFill>
+                  <a:srgbClr val="6B7280"/>
+                </a:solidFill>
+                <a:latin typeface="Calibri" pitchFamily="34" charset="0"/>
+                <a:ea typeface="Calibri" pitchFamily="34" charset="-122"/>
+                <a:cs typeface="Calibri" pitchFamily="34" charset="-120"/>
+              </a:rPr>
+              <a:t>2021 Salary Survey — Key Points</a:t>
+            </a:r>
+            <a:endParaRPr lang="en-US" sz="900" dirty="0"/>
+          </a:p>
+        </p:txBody>
+      </p:sp>
+      <p:sp>
+        <p:nvSpPr>
+          <p:cNvPr id="15" name="Text 12"/>
+          <p:cNvSpPr/>
+          <p:nvPr/>
+        </p:nvSpPr>
+        <p:spPr>
+          <a:xfrm>
+            <a:off x="11338560" y="6528816"/>
+            <a:ext cx="365760" cy="274320"/>
+          </a:xfrm>
+          <a:prstGeom prst="rect">
+            <a:avLst/>
+          </a:prstGeom>
+          <a:noFill/>
+          <a:ln/>
+        </p:spPr>
+        <p:txBody>
+          <a:bodyPr wrap="square" lIns="0" tIns="0" rIns="0" bIns="0" rtlCol="0" anchor="ctr"/>
+          <a:lstStyle/>
+          <a:p>
+            <a:pPr marL="0" indent="0" algn="r">
+              <a:buNone/>
+            </a:pPr>
+            <a:r>
+              <a:rPr lang="en-US" sz="900" dirty="0">
+                <a:solidFill>
+                  <a:srgbClr val="6B7280"/>
+                </a:solidFill>
+                <a:latin typeface="Calibri" pitchFamily="34" charset="0"/>
+                <a:ea typeface="Calibri" pitchFamily="34" charset="-122"/>
+                <a:cs typeface="Calibri" pitchFamily="34" charset="-120"/>
+              </a:rPr>
+              <a:t>6</a:t>
+            </a:r>
+            <a:endParaRPr lang="en-US" sz="900" dirty="0"/>
+          </a:p>
+        </p:txBody>
+      </p:sp>
+      <p:pic>
+        <p:nvPicPr>
+          <p:cNvPr id="16" name="Picture 15">
+            <a:extLst>
+              <a:ext uri="{FF2B5EF4-FFF2-40B4-BE49-F238E27FC236}">
+                <a16:creationId xmlns:a16="http://schemas.microsoft.com/office/drawing/2014/main" id="{CDB53829-73ED-7086-CD64-0A9B9C4152CD}"/>
+              </a:ext>
+            </a:extLst>
+          </p:cNvPr>
+          <p:cNvPicPr>
+            <a:picLocks noChangeAspect="1"/>
+          </p:cNvPicPr>
+          <p:nvPr/>
+        </p:nvPicPr>
+        <p:blipFill>
+          <a:blip r:embed="rId3"/>
+          <a:stretch>
+            <a:fillRect/>
+          </a:stretch>
+        </p:blipFill>
+        <p:spPr>
+          <a:xfrm>
+            <a:off x="604787" y="1473537"/>
+            <a:ext cx="6357486" cy="4961272"/>
+          </a:xfrm>
+          <a:prstGeom prst="rect">
+            <a:avLst/>
+          </a:prstGeom>
+        </p:spPr>
+      </p:pic>
+    </p:spTree>
+  </p:cSld>
+  <p:clrMapOvr>
+    <a:masterClrMapping/>
+  </p:clrMapOvr>
+</p:sld>
 </file>
 
 <file path=ppt/theme/theme1.xml><?xml version="1.0" encoding="utf-8"?>
